--- a/internship-presentation/DYNATREK_IB普及分析_成果発表.pptx
+++ b/internship-presentation/DYNATREK_IB普及分析_成果発表.pptx
@@ -510,7 +510,7 @@
               <a:t>本日は、2週間のインターンシップで取り組んだ内容についてご報告します。
 タイトルにあるとおり、今回私が扱ったのは「愛知銀行のインターネットバンキング、IBがどれくらい広がっているのか」という疑問です。
 ただ、本日一番お伝えしたいのは分析結果そのものではありません。
-専門的なデータ分析の知識がなくても、DYNATREKを使えば業務上の疑問をデータで確かめていける、ということを、実際に自分がやってみた分析を例にお話しします。</a:t>
+今日お伝えしたいのは、DYNATREKを使えば、データ分析の専門知識や経験がない人でも、業務データを集計して傾向をつかめる、ということです。そして今回は、その一例として、私が実際にやってみた分析をご紹介します。</a:t>
             </a:r>
             <a:endParaRPr lang="en-US" dirty="0"/>
           </a:p>
@@ -599,12 +599,12 @@
             <a:r>
               <a:rPr lang="en-US" dirty="0"/>
               <a:t>まず、今回のテーマと背景です。愛知銀行ではIBの普及に向けた施策やキャンペーンが行われていて、では実際にどれくらい使われるようになったのか、を確かめたい、というのが出発点でした。
-実際に取り組んでみて感じたのは、業務上の疑問をデータで確かめようとすると、壁が2つあるということです。
+ここで、今日の主張をはっきりさせておきます。分析の専門知識や経験がなくても、業務データから傾向はつかめる、ということです。
+というのも、業務上の疑問をデータで確かめようとすると、壁が2つあるからです。
 壁①は「そもそも何を見れば答えになるのか」を決めること。これは人が考えるしかありません。
-壁②は「そのデータを業務DBから取り出す」こと。業務DBには分析に使わない項目も大量にあるので、ここでつまずくことが多いと思います。
-DYNATREKは、条件を指定して必要なデータだけを表示・集計できるツールで、この壁②を下げてくれます。
-つまり、専門的な分析の知識がなくても、壁①を考えることに時間を使える。ここが今日お伝えしたい一番のポイントです。
-では実際にどう考えたのか、次のスライドでご説明します。</a:t>
+壁②は「そのデータを業務DBから取り出す」こと。業務DBには分析に使わない項目も大量にあるので、専門知識がないとここでつまずきます。
+DYNATREKは条件を指定して必要なデータだけを表示・集計できるので、この壁②を引き受けてくれます。だから壁①を考えることに時間を使える。ここが一番のポイントです。
+そして今回は、その一例として、私が実際に行った分析をご紹介します。どう考えて、どう集計したのかを見ていただければと思います。</a:t>
             </a:r>
             <a:endParaRPr lang="en-US" dirty="0"/>
           </a:p>
@@ -1533,7 +1533,7 @@
                 <a:ea typeface="Meiryo" pitchFamily="34" charset="-122"/>
                 <a:cs typeface="Meiryo" pitchFamily="34" charset="-120"/>
               </a:rPr>
-              <a:t>専門的なデータ分析の知識がなくても、DYNATREKなら業務の疑問を確かめられる</a:t>
+              <a:t>分析の専門知識や経験がなくても、DYNATREKなら業務データから傾向をつかめる</a:t>
             </a:r>
             <a:endParaRPr lang="en-US" sz="1550" dirty="0"/>
           </a:p>
@@ -1748,7 +1748,7 @@
                 <a:ea typeface="Meiryo" pitchFamily="34" charset="-122"/>
                 <a:cs typeface="Meiryo" pitchFamily="34" charset="-120"/>
               </a:rPr>
-              <a:t>業務の疑問をデータで確かめるには、2つの壁がある</a:t>
+              <a:t>分析の専門知識や経験がなくても、データから傾向はつかめる</a:t>
             </a:r>
             <a:endParaRPr lang="en-US" sz="2600" dirty="0"/>
           </a:p>
@@ -1787,7 +1787,7 @@
                 <a:ea typeface="Meiryo" pitchFamily="34" charset="-122"/>
                 <a:cs typeface="Meiryo" pitchFamily="34" charset="-120"/>
               </a:rPr>
-              <a:t>専門知識がないと越えにくいのは「データを取り出す」壁。DYNATREKはそこを下げてくれる。</a:t>
+              <a:t>ネックになるのは「必要なデータを取り出す」ところ。DYNATREKがそこを引き受けるので、「何を見るか」に時間を使える。</a:t>
             </a:r>
             <a:endParaRPr lang="en-US" sz="1350" dirty="0"/>
           </a:p>
@@ -2465,7 +2465,7 @@
                 <a:ea typeface="Meiryo" pitchFamily="34" charset="-122"/>
                 <a:cs typeface="Meiryo" pitchFamily="34" charset="-120"/>
               </a:rPr>
-              <a:t>壁②が下がるからこそ、壁①を考えることに時間を使える。</a:t>
+              <a:t>今回は、その一例として行った分析を紹介します。</a:t>
             </a:r>
             <a:endParaRPr lang="en-US" sz="1350" dirty="0"/>
           </a:p>

--- a/internship-presentation/DYNATREK_IB普及分析_成果発表.pptx
+++ b/internship-presentation/DYNATREK_IB普及分析_成果発表.pptx
@@ -11,9 +11,11 @@
     <p:sldId id="259" r:id="rId5"/>
     <p:sldId id="260" r:id="rId6"/>
     <p:sldId id="261" r:id="rId7"/>
+    <p:sldId id="262" r:id="rId8"/>
+    <p:sldId id="263" r:id="rId9"/>
   </p:sldIdLst>
   <p:notesMasterIdLst>
-    <p:notesMasterId r:id="rId8"/>
+    <p:notesMasterId r:id="rId10"/>
   </p:notesMasterIdLst>
   <p:sldSz cx="12192000" cy="6858000"/>
   <p:notesSz cx="6858000" cy="12192000"/>
@@ -508,9 +510,9 @@
             <a:r>
               <a:rPr lang="en-US" dirty="0"/>
               <a:t>本日は、2週間のインターンシップで取り組んだ内容についてご報告します。
-タイトルにあるとおり、今回私が扱ったのは「愛知銀行のインターネットバンキング、IBがどれくらい広がっているのか」という疑問です。
-ただ、本日一番お伝えしたいのは分析結果そのものではありません。
-今日お伝えしたいのは、DYNATREKを使えば、データ分析の専門知識や経験がない人でも、業務データを集計して傾向をつかめる、ということです。そして今回は、その一例として、私が実際にやってみた分析をご紹介します。</a:t>
+今日お伝えしたいのは、DYNATREKを使えば、データ分析の専門的な知識や経験がない人でも、業務データを集計・比較して傾向をつかめる、ということです。
+そして今回は、その一例として、私が実際に行った分析をご紹介します。題材は、愛知銀行のインターネットバンキング、IBの普及状況です。
+分析結果そのものよりも、どう考えて、どう使ったのか、という流れを見ていただければと思います。</a:t>
             </a:r>
             <a:endParaRPr lang="en-US" dirty="0"/>
           </a:p>
@@ -598,13 +600,14 @@
           <a:p>
             <a:r>
               <a:rPr lang="en-US" dirty="0"/>
-              <a:t>まず、今回のテーマと背景です。愛知銀行ではIBの普及に向けた施策やキャンペーンが行われていて、では実際にどれくらい使われるようになったのか、を確かめたい、というのが出発点でした。
-ここで、今日の主張をはっきりさせておきます。分析の専門知識や経験がなくても、業務データから傾向はつかめる、ということです。
-というのも、業務上の疑問をデータで確かめようとすると、壁が2つあるからです。
-壁①は「そもそも何を見れば答えになるのか」を決めること。これは人が考えるしかありません。
-壁②は「そのデータを業務DBから取り出す」こと。業務DBには分析に使わない項目も大量にあるので、専門知識がないとここでつまずきます。
-DYNATREKは条件を指定して必要なデータだけを表示・集計できるので、この壁②を引き受けてくれます。だから壁①を考えることに時間を使える。ここが一番のポイントです。
-そして今回は、その一例として、私が実際に行った分析をご紹介します。どう考えて、どう集計したのかを見ていただければと思います。</a:t>
+              <a:t>はじめに、今日の発表の目的をはっきりさせておきます。2点です。
+1点目。DYNATREKを使えば、データ分析の専門的な知識や経験がない人でも、業務データを集計・比較して、傾向をつかむことができる。これが今日お伝えしたいことです。
+2点目。今回は、その一例として、私が実際に行った分析をご紹介します。題材は愛知銀行のIBの普及状況です。
+なぜ専門知識がなくてもできるのか、簡単に触れておきます。業務上の疑問をデータで確かめようとすると、壁が2つあります。
+壁①は「何を見れば答えになるのか」を決めること。これは人が考えるしかありません。
+壁②は「そのデータを業務DBから取り出す」こと。業務DBには分析に使わない項目も大量にあって、専門知識がないとここで止まります。
+DYNATREKはこの壁②を引き受けてくれるので、壁①を考えることに時間を使えます。
+では、その一例を見ていただきます。まずは題材の背景からです。</a:t>
             </a:r>
             <a:endParaRPr lang="en-US" dirty="0"/>
           </a:p>
@@ -692,13 +695,9 @@
           <a:p>
             <a:r>
               <a:rPr lang="en-US" dirty="0"/>
-              <a:t>壁①、つまり「何を見れば答えになるのか」を考えた部分です。今回、時間を一番使ったのはここでした。
-最初に思いついたのは、単純にIBの利用件数を数えることでした。ただ、取引全体が増えれば件数も増えるので、件数が増えたことだけでは「普及した」とは言い切れません。
-そこで、IBの普及とは「IBでも行える取引が、IBで行われるようになること」ではないか、と考え直しました。
-この考え方に立つと、比べるべきものが決まります。右の図のとおり、振込・振替のようにIBでも行える取引を、IBで実施されたものと、ATMで実施されたものに分けて見る、ということです。
-ATMでしか行えない現金の入出金などは、IBに移りようがないので今回は対象から外しました。
-対象期間は、使えるデータの範囲である2025年と2026年の4〜6月、計6か月です。
-ここまでが「何を見るか」を決めるところで、ここから先が実際の集計になります。</a:t>
+              <a:t>題材の背景です。愛知銀行では、IBの利用を広げるための取り組みが行われています。
+（※ここで、実際の施策の内容・ねらい・実施時期を具体的に説明する。スライドの記入欄に入れた内容をそのまま話す）
+こうした取り組みが行われているなかで、では実際にIBの利用はどう変化しているのか。それを確かめたい、というのが今回の出発点でした。</a:t>
             </a:r>
             <a:endParaRPr lang="en-US" dirty="0"/>
           </a:p>
@@ -786,11 +785,13 @@
           <a:p>
             <a:r>
               <a:rPr lang="en-US" dirty="0"/>
-              <a:t>実際にDYNATREKで行ったことは、左に書いた3つだけです。期間を指定し、取引の種類を指定し、チャネル別に件数を集計して並べる。統計モデルや機械学習は使っていません。
-結果ですが、IBの利用件数は1か月あたり、2025年が約15万から16万件、2026年が約18万から20万件でした。前年の同じ4〜6月と比べると増えています。
-グラフ①が月ごとの推移、グラフ②が同じ月のIBとATMのIB代替可能取引を並べたものです。（※グラフ②の見え方については、実際の数字を見ながら説明する）
-ここで強調したいのは、この集計自体は、条件を指定して数えただけだということです。特別な分析の知識は使っていません。
-ただ、この数字をどう読むかは、また別の話になります。</a:t>
+              <a:t>ここが壁①、つまり「何を見れば答えになるのか」を考えた部分です。今回いちばん時間を使ったのはここでした。
+最初に思いついたのは、単純にIBの利用件数を数えることでした。ただ、取引全体が増えれば件数も増えるので、件数が増えたことだけでは「普及した」とは言い切れません。
+そこで、IBの普及とは「IBでも行える取引が、IBで行われるようになること」ではないか、と考え直しました。
+この考え方に立つと、比べるべきものが決まります。右の図のとおり、振込・振替のようにIBでも行える取引を、IBで実施されたものと、ATMで実施されたものに分けて見る、ということです。
+ATMでしか行えない現金の入出金などは、IBに移りようがないので今回は対象から外しました。
+対象期間は、使えるデータの範囲である2025年と2026年の4〜6月、計6か月です。
+ここまでが人が考えるところです。ここから先、実際の画面をお見せします。</a:t>
             </a:r>
             <a:endParaRPr lang="en-US" dirty="0"/>
           </a:p>
@@ -878,12 +879,12 @@
           <a:p>
             <a:r>
               <a:rPr lang="en-US" dirty="0"/>
-              <a:t>結果をどう読むかです。ここは意識して3つに分けました。
-まず言えることは、前年の同じ4〜6月と比べてIBの利用件数は増えている、という事実です。
-一方で、言えないこともあります。今回使えたデータは4〜6月の3か月分が2年分だけで、連続した推移が追えません。また、口座数の変化や取引全体の増減、季節性、社会全体でIB利用が広がっていること、といった施策以外の要因を切り分けることもできません。
-ですので、「IB普及施策によって増えた」という因果関係は、このデータだけでは判断できない、というのが今回の結論です。ここは断定しないようにしました。
-ただ、言えないことがはっきりしたことで、次に何を見ればよいかも具体的になりました。連続した月次推移で施策の前後を比べる、ATM側のIB代替可能取引が減っているかを対応させて見る、支店や年代などの属性別に見る、といったことです。
-これらは、データが蓄積されれば、今回と同じやり方で確かめられると考えています。</a:t>
+              <a:t>実際の画面をお見せします。やったことは、左に書いた3つの条件を指定しただけです。
+期間、取引の種類、そしてチャネルをIBとATMに分けること。この3つです。
+画面①が、その条件を指定しているところです。（※どこに何を入れたのかを指しながら説明する）
+画面②が、その結果として出てきた集計結果です。（※どの数字を見ているのかを指しながら説明する）
+統計モデルや機械学習は使っていませんし、特別な操作も必要ありませんでした。この2画面だけで、比べたい数字が出せています。
+では、出てきた数字を見ていきます。</a:t>
             </a:r>
             <a:endParaRPr lang="en-US" dirty="0"/>
           </a:p>
@@ -971,12 +972,11 @@
           <a:p>
             <a:r>
               <a:rPr lang="en-US" dirty="0"/>
-              <a:t>最後にまとめです。
-今回、DYNATREKに感じた価値は、機能の多さではなく、目的のデータを取り出すところの負担を下げてくれることでした。業務DBには分析に使わない項目も多く、そこが難しいのですが、DYNATREKは条件を指定して必要なデータだけを見られるので、専門的な分析知識がなくても、疑問をその場でデータに当てられます。
-一方で、今回いちばん難しかったのは分析手法ではありませんでした。私は大学の研究でPOSデータを扱ってきたので、分析そのものの経験はあります。それでも、目的に対して何を見るべきか、何と比べるべきか、どこまで条件を絞るかを決めることが難しかったです。
-DYNATREKは条件を細かく設定できるので、仮説はいくらでも立てられます。ただ実際の分析時間には限りがあるので、「分析できること」ではなく「目的の達成に必要な分析」を選ぶことが重要だと感じました。これが今回いちばんの学びです。
-また、複数の打ち合わせにも参加させていただき、社員の方々が意見を出し合いながら進めていく様子を見られたことも、実際の業務を知るうえで貴重な経験でした。
-専門的なデータ分析の知識がなくても、DYNATREKを使えば業務上の疑問にデータで向き合っていける。今回の分析を通して、それを実感しました。ありがとうございました。</a:t>
+              <a:t>結果です。IBの利用件数は1か月あたり、2025年が約15万から16万件、2026年が約18万から20万件でした。前年の同じ4〜6月と比べると増えています。
+グラフ①が月ごとの推移です。
+あわせて、ATMで行われた取引のうちIBでも代替できるものも、まったく同じ条件指定で集計し、同じ月どうしで並べました。それがグラフ②です。
+（※グラフ②については、実際に出た数字を見ながら説明する）
+では、この数字から何が言えるのか。ここは分けて考える必要があります。</a:t>
             </a:r>
             <a:endParaRPr lang="en-US" dirty="0"/>
           </a:p>
@@ -1000,6 +1000,191 @@
             <a:fld id="{F7021451-1387-4CA6-816F-3879F97B5CBC}" type="slidenum">
               <a:rPr lang="en-US"/>
               <a:t>6</a:t>
+            </a:fld>
+            <a:endParaRPr lang="en-US"/>
+          </a:p>
+        </p:txBody>
+      </p:sp>
+    </p:spTree>
+    <p:extLst>
+      <p:ext uri="{BB962C8B-B14F-4D97-AF65-F5344CB8AC3E}">
+        <p14:creationId xmlns:p14="http://schemas.microsoft.com/office/powerpoint/2010/main" val="1024086991"/>
+      </p:ext>
+    </p:extLst>
+  </p:cSld>
+  <p:clrMapOvr>
+    <a:masterClrMapping/>
+  </p:clrMapOvr>
+</p:notes>
+</file>
+
+<file path=ppt/notesSlides/notesSlide7.xml><?xml version="1.0" encoding="utf-8"?>
+<p:notes xmlns:a="http://schemas.openxmlformats.org/drawingml/2006/main" xmlns:r="http://schemas.openxmlformats.org/officeDocument/2006/relationships" xmlns:p="http://schemas.openxmlformats.org/presentationml/2006/main">
+  <p:cSld>
+    <p:spTree>
+      <p:nvGrpSpPr>
+        <p:cNvPr id="1" name=""/>
+        <p:cNvGrpSpPr/>
+        <p:nvPr/>
+      </p:nvGrpSpPr>
+      <p:grpSpPr>
+        <a:xfrm>
+          <a:off x="0" y="0"/>
+          <a:ext cx="0" cy="0"/>
+          <a:chOff x="0" y="0"/>
+          <a:chExt cx="0" cy="0"/>
+        </a:xfrm>
+      </p:grpSpPr>
+      <p:sp>
+        <p:nvSpPr>
+          <p:cNvPr id="2" name="Slide Image Placeholder 1"/>
+          <p:cNvSpPr>
+            <a:spLocks noGrp="1" noRot="1" noChangeAspect="1"/>
+          </p:cNvSpPr>
+          <p:nvPr>
+            <p:ph type="sldImg"/>
+          </p:nvPr>
+        </p:nvSpPr>
+        <p:spPr/>
+      </p:sp>
+      <p:sp>
+        <p:nvSpPr>
+          <p:cNvPr id="3" name="Notes Placeholder 2"/>
+          <p:cNvSpPr>
+            <a:spLocks noGrp="1"/>
+          </p:cNvSpPr>
+          <p:nvPr>
+            <p:ph type="body" idx="1"/>
+          </p:nvPr>
+        </p:nvSpPr>
+        <p:spPr/>
+        <p:txBody>
+          <a:bodyPr/>
+          <a:lstStyle/>
+          <a:p>
+            <a:r>
+              <a:rPr lang="en-US" dirty="0"/>
+              <a:t>結果をどう読むかです。ここは意識して3つに分けました。
+まず言えることは、前年の同じ4〜6月と比べてIBの利用件数は増えている、という事実です。
+一方で、言えないこともあります。今回使えたデータは4〜6月の3か月分が2年分だけで、連続した推移が追えません。また、口座数の変化や取引全体の増減、季節性、社会全体でIB利用が広がっていること、といった施策以外の要因を切り分けることもできません。
+ですので、「IB普及施策によって増えた」という因果関係は、このデータだけでは判断できません。ここは断定しないようにしました。
+ただ、言えないことがはっきりしたことで、次に何を見ればよいかも具体的になりました。連続した月次推移で施策の前後を比べる、ATM側のIB代替可能取引が減っているかを対応させて見る、支店や年代などの属性別に見る、といったことです。
+これらも、データが蓄積されれば、今回と同じやり方で確かめられると考えています。</a:t>
+            </a:r>
+            <a:endParaRPr lang="en-US" dirty="0"/>
+          </a:p>
+        </p:txBody>
+      </p:sp>
+      <p:sp>
+        <p:nvSpPr>
+          <p:cNvPr id="4" name="Slide Number Placeholder 3"/>
+          <p:cNvSpPr>
+            <a:spLocks noGrp="1"/>
+          </p:cNvSpPr>
+          <p:nvPr>
+            <p:ph type="sldNum" sz="quarter" idx="10"/>
+          </p:nvPr>
+        </p:nvSpPr>
+        <p:spPr/>
+        <p:txBody>
+          <a:bodyPr/>
+          <a:lstStyle/>
+          <a:p>
+            <a:fld id="{F7021451-1387-4CA6-816F-3879F97B5CBC}" type="slidenum">
+              <a:rPr lang="en-US"/>
+              <a:t>7</a:t>
+            </a:fld>
+            <a:endParaRPr lang="en-US"/>
+          </a:p>
+        </p:txBody>
+      </p:sp>
+    </p:spTree>
+    <p:extLst>
+      <p:ext uri="{BB962C8B-B14F-4D97-AF65-F5344CB8AC3E}">
+        <p14:creationId xmlns:p14="http://schemas.microsoft.com/office/powerpoint/2010/main" val="1024086991"/>
+      </p:ext>
+    </p:extLst>
+  </p:cSld>
+  <p:clrMapOvr>
+    <a:masterClrMapping/>
+  </p:clrMapOvr>
+</p:notes>
+</file>
+
+<file path=ppt/notesSlides/notesSlide8.xml><?xml version="1.0" encoding="utf-8"?>
+<p:notes xmlns:a="http://schemas.openxmlformats.org/drawingml/2006/main" xmlns:r="http://schemas.openxmlformats.org/officeDocument/2006/relationships" xmlns:p="http://schemas.openxmlformats.org/presentationml/2006/main">
+  <p:cSld>
+    <p:spTree>
+      <p:nvGrpSpPr>
+        <p:cNvPr id="1" name=""/>
+        <p:cNvGrpSpPr/>
+        <p:nvPr/>
+      </p:nvGrpSpPr>
+      <p:grpSpPr>
+        <a:xfrm>
+          <a:off x="0" y="0"/>
+          <a:ext cx="0" cy="0"/>
+          <a:chOff x="0" y="0"/>
+          <a:chExt cx="0" cy="0"/>
+        </a:xfrm>
+      </p:grpSpPr>
+      <p:sp>
+        <p:nvSpPr>
+          <p:cNvPr id="2" name="Slide Image Placeholder 1"/>
+          <p:cNvSpPr>
+            <a:spLocks noGrp="1" noRot="1" noChangeAspect="1"/>
+          </p:cNvSpPr>
+          <p:nvPr>
+            <p:ph type="sldImg"/>
+          </p:nvPr>
+        </p:nvSpPr>
+        <p:spPr/>
+      </p:sp>
+      <p:sp>
+        <p:nvSpPr>
+          <p:cNvPr id="3" name="Notes Placeholder 2"/>
+          <p:cNvSpPr>
+            <a:spLocks noGrp="1"/>
+          </p:cNvSpPr>
+          <p:nvPr>
+            <p:ph type="body" idx="1"/>
+          </p:nvPr>
+        </p:nvSpPr>
+        <p:spPr/>
+        <p:txBody>
+          <a:bodyPr/>
+          <a:lstStyle/>
+          <a:p>
+            <a:r>
+              <a:rPr lang="en-US" dirty="0"/>
+              <a:t>今回やったことを、はじめから並べるとこの5ステップです。
+IBの普及状況を知りたい。では何と比べればよいか考える。条件を指定して集計する。出てきた結果を見る。そこから何が言えるかを考える。
+このうち、赤い2つ、条件を指定して集計するところと結果を出すところは、DYNATREKが引き受けてくれた部分です。専門的な知識が要るのはまさにここで、業務DBから必要なデータを取り出すところでした。
+残りの3つ、何を知りたいのか、何と比べるのか、何が言えるのかは、人が考えるところです。私が時間を使ったのもここでした。
+分析の専門知識や経験がなくても、DYNATREKを使えば、業務上の疑問に対してデータで確認・比較していける。今回、それを実際にやってみることができました。</a:t>
+            </a:r>
+            <a:endParaRPr lang="en-US" dirty="0"/>
+          </a:p>
+        </p:txBody>
+      </p:sp>
+      <p:sp>
+        <p:nvSpPr>
+          <p:cNvPr id="4" name="Slide Number Placeholder 3"/>
+          <p:cNvSpPr>
+            <a:spLocks noGrp="1"/>
+          </p:cNvSpPr>
+          <p:nvPr>
+            <p:ph type="sldNum" sz="quarter" idx="10"/>
+          </p:nvPr>
+        </p:nvSpPr>
+        <p:spPr/>
+        <p:txBody>
+          <a:bodyPr/>
+          <a:lstStyle/>
+          <a:p>
+            <a:fld id="{F7021451-1387-4CA6-816F-3879F97B5CBC}" type="slidenum">
+              <a:rPr lang="en-US"/>
+              <a:t>8</a:t>
             </a:fld>
             <a:endParaRPr lang="en-US"/>
           </a:p>
@@ -1474,7 +1659,7 @@
                 <a:ea typeface="Meiryo" pitchFamily="34" charset="-122"/>
                 <a:cs typeface="Meiryo" pitchFamily="34" charset="-120"/>
               </a:rPr>
-              <a:t>「IBはどれくらい広がったのか」に</a:t>
+              <a:t>分析の専門知識や経験がなくても、</a:t>
             </a:r>
             <a:endParaRPr lang="en-US" sz="3300" dirty="0"/>
           </a:p>
@@ -1494,7 +1679,7 @@
                 <a:ea typeface="Meiryo" pitchFamily="34" charset="-122"/>
                 <a:cs typeface="Meiryo" pitchFamily="34" charset="-120"/>
               </a:rPr>
-              <a:t>データで答える</a:t>
+              <a:t>DYNATREKなら分析できる</a:t>
             </a:r>
             <a:endParaRPr lang="en-US" sz="3300" dirty="0"/>
           </a:p>
@@ -1533,7 +1718,7 @@
                 <a:ea typeface="Meiryo" pitchFamily="34" charset="-122"/>
                 <a:cs typeface="Meiryo" pitchFamily="34" charset="-120"/>
               </a:rPr>
-              <a:t>分析の専門知識や経験がなくても、DYNATREKなら業務データから傾向をつかめる</a:t>
+              <a:t>業務データを集計・比較して、そこから傾向をつかむまでを実際にやってみました</a:t>
             </a:r>
             <a:endParaRPr lang="en-US" sz="1550" dirty="0"/>
           </a:p>
@@ -1548,7 +1733,7 @@
         <p:spPr>
           <a:xfrm>
             <a:off x="502920" y="3977640"/>
-            <a:ext cx="6675120" cy="566928"/>
+            <a:ext cx="7223760" cy="566928"/>
           </a:xfrm>
           <a:prstGeom prst="roundRect">
             <a:avLst>
@@ -1575,7 +1760,7 @@
         <p:spPr>
           <a:xfrm>
             <a:off x="704088" y="3977640"/>
-            <a:ext cx="6309360" cy="566928"/>
+            <a:ext cx="6858000" cy="566928"/>
           </a:xfrm>
           <a:prstGeom prst="rect">
             <a:avLst/>
@@ -1599,7 +1784,7 @@
                 <a:ea typeface="Meiryo" pitchFamily="34" charset="-122"/>
                 <a:cs typeface="Meiryo" pitchFamily="34" charset="-120"/>
               </a:rPr>
-              <a:t>事例：愛知銀行　インターネットバンキング（IB）普及状況の分析</a:t>
+              <a:t>その一例：愛知銀行　インターネットバンキング（IB）の普及状況の分析</a:t>
             </a:r>
             <a:endParaRPr lang="en-US" sz="1300" dirty="0"/>
           </a:p>
@@ -1652,7 +1837,7 @@
         </p:nvSpPr>
         <p:spPr>
           <a:xfrm>
-            <a:off x="11411712" y="6382512"/>
+            <a:off x="11411712" y="6419088"/>
             <a:ext cx="365760" cy="274320"/>
           </a:xfrm>
           <a:prstGeom prst="rect">
@@ -1736,7 +1921,7 @@
           <a:bodyPr wrap="square" lIns="0" tIns="0" rIns="0" bIns="0" rtlCol="0" anchor="ctr"/>
           <a:lstStyle/>
           <a:p>
-            <a:pPr algn="l" indent="0" marL="0">
+            <a:pPr indent="0" marL="0">
               <a:buNone/>
             </a:pPr>
             <a:r>
@@ -1748,7 +1933,7 @@
                 <a:ea typeface="Meiryo" pitchFamily="34" charset="-122"/>
                 <a:cs typeface="Meiryo" pitchFamily="34" charset="-120"/>
               </a:rPr>
-              <a:t>分析の専門知識や経験がなくても、データから傾向はつかめる</a:t>
+              <a:t>本発表でお伝えしたいことは、次の2点です</a:t>
             </a:r>
             <a:endParaRPr lang="en-US" sz="2600" dirty="0"/>
           </a:p>
@@ -1756,42 +1941,30 @@
       </p:sp>
       <p:sp>
         <p:nvSpPr>
-          <p:cNvPr id="3" name="Text 1"/>
-          <p:cNvSpPr txBox="1"/>
-          <p:nvPr/>
-        </p:nvSpPr>
-        <p:spPr>
-          <a:xfrm>
-            <a:off x="502920" y="950976"/>
-            <a:ext cx="11183112" cy="384048"/>
-          </a:xfrm>
-          <a:prstGeom prst="rect">
-            <a:avLst/>
-          </a:prstGeom>
-          <a:noFill/>
-          <a:ln/>
-        </p:spPr>
-        <p:txBody>
-          <a:bodyPr wrap="square" lIns="0" tIns="0" rIns="0" bIns="0" rtlCol="0" anchor="ctr"/>
-          <a:lstStyle/>
-          <a:p>
-            <a:pPr algn="l" indent="0" marL="0">
-              <a:buNone/>
-            </a:pPr>
-            <a:r>
-              <a:rPr lang="en-US" sz="1350" b="1" dirty="0">
-                <a:solidFill>
-                  <a:srgbClr val="D9482F"/>
-                </a:solidFill>
-                <a:latin typeface="Meiryo" pitchFamily="34" charset="0"/>
-                <a:ea typeface="Meiryo" pitchFamily="34" charset="-122"/>
-                <a:cs typeface="Meiryo" pitchFamily="34" charset="-120"/>
-              </a:rPr>
-              <a:t>ネックになるのは「必要なデータを取り出す」ところ。DYNATREKがそこを引き受けるので、「何を見るか」に時間を使える。</a:t>
-            </a:r>
-            <a:endParaRPr lang="en-US" sz="1350" dirty="0"/>
-          </a:p>
-        </p:txBody>
+          <p:cNvPr id="3" name="Shape 1"/>
+          <p:cNvSpPr/>
+          <p:nvPr/>
+        </p:nvSpPr>
+        <p:spPr>
+          <a:xfrm>
+            <a:off x="502920" y="1298448"/>
+            <a:ext cx="4937760" cy="2286000"/>
+          </a:xfrm>
+          <a:prstGeom prst="roundRect">
+            <a:avLst>
+              <a:gd name="adj" fmla="val 2400"/>
+            </a:avLst>
+          </a:prstGeom>
+          <a:solidFill>
+            <a:srgbClr val="13294B"/>
+          </a:solidFill>
+          <a:ln w="6350">
+            <a:solidFill>
+              <a:srgbClr val="13294B"/>
+            </a:solidFill>
+            <a:prstDash val="solid"/>
+          </a:ln>
+        </p:spPr>
       </p:sp>
       <p:sp>
         <p:nvSpPr>
@@ -1801,12 +1974,413 @@
         </p:nvSpPr>
         <p:spPr>
           <a:xfrm>
-            <a:off x="502920" y="1572768"/>
-            <a:ext cx="5212080" cy="2651760"/>
+            <a:off x="758952" y="1517904"/>
+            <a:ext cx="329184" cy="329184"/>
+          </a:xfrm>
+          <a:prstGeom prst="ellipse">
+            <a:avLst/>
+          </a:prstGeom>
+          <a:solidFill>
+            <a:srgbClr val="D9482F"/>
+          </a:solidFill>
+          <a:ln w="6350">
+            <a:solidFill>
+              <a:srgbClr val="D9482F"/>
+            </a:solidFill>
+            <a:prstDash val="solid"/>
+          </a:ln>
+        </p:spPr>
+      </p:sp>
+      <p:sp>
+        <p:nvSpPr>
+          <p:cNvPr id="5" name="Text 3"/>
+          <p:cNvSpPr txBox="1"/>
+          <p:nvPr/>
+        </p:nvSpPr>
+        <p:spPr>
+          <a:xfrm>
+            <a:off x="758952" y="1517904"/>
+            <a:ext cx="329184" cy="329184"/>
+          </a:xfrm>
+          <a:prstGeom prst="rect">
+            <a:avLst/>
+          </a:prstGeom>
+          <a:noFill/>
+          <a:ln/>
+        </p:spPr>
+        <p:txBody>
+          <a:bodyPr wrap="square" lIns="0" tIns="0" rIns="0" bIns="0" rtlCol="0" anchor="ctr"/>
+          <a:lstStyle/>
+          <a:p>
+            <a:pPr algn="ctr" indent="0" marL="0">
+              <a:buNone/>
+            </a:pPr>
+            <a:r>
+              <a:rPr lang="en-US" sz="1300" b="1" dirty="0">
+                <a:solidFill>
+                  <a:srgbClr val="FFFFFF"/>
+                </a:solidFill>
+                <a:latin typeface="Meiryo" pitchFamily="34" charset="0"/>
+                <a:ea typeface="Meiryo" pitchFamily="34" charset="-122"/>
+                <a:cs typeface="Meiryo" pitchFamily="34" charset="-120"/>
+              </a:rPr>
+              <a:t>1</a:t>
+            </a:r>
+            <a:endParaRPr lang="en-US" sz="1300" dirty="0"/>
+          </a:p>
+        </p:txBody>
+      </p:sp>
+      <p:sp>
+        <p:nvSpPr>
+          <p:cNvPr id="6" name="Text 4"/>
+          <p:cNvSpPr txBox="1"/>
+          <p:nvPr/>
+        </p:nvSpPr>
+        <p:spPr>
+          <a:xfrm>
+            <a:off x="1197864" y="1499616"/>
+            <a:ext cx="3931920" cy="365760"/>
+          </a:xfrm>
+          <a:prstGeom prst="rect">
+            <a:avLst/>
+          </a:prstGeom>
+          <a:noFill/>
+          <a:ln/>
+        </p:spPr>
+        <p:txBody>
+          <a:bodyPr wrap="square" lIns="0" tIns="0" rIns="0" bIns="0" rtlCol="0" anchor="ctr"/>
+          <a:lstStyle/>
+          <a:p>
+            <a:pPr indent="0" marL="0">
+              <a:buNone/>
+            </a:pPr>
+            <a:r>
+              <a:rPr lang="en-US" sz="1400" b="1" dirty="0">
+                <a:solidFill>
+                  <a:srgbClr val="FFC9BC"/>
+                </a:solidFill>
+                <a:latin typeface="Meiryo" pitchFamily="34" charset="0"/>
+                <a:ea typeface="Meiryo" pitchFamily="34" charset="-122"/>
+                <a:cs typeface="Meiryo" pitchFamily="34" charset="-120"/>
+              </a:rPr>
+              <a:t>お伝えしたいこと</a:t>
+            </a:r>
+            <a:endParaRPr lang="en-US" sz="1400" dirty="0"/>
+          </a:p>
+        </p:txBody>
+      </p:sp>
+      <p:sp>
+        <p:nvSpPr>
+          <p:cNvPr id="7" name="Text 5"/>
+          <p:cNvSpPr txBox="1"/>
+          <p:nvPr/>
+        </p:nvSpPr>
+        <p:spPr>
+          <a:xfrm>
+            <a:off x="777240" y="2011680"/>
+            <a:ext cx="4389120" cy="1417320"/>
+          </a:xfrm>
+          <a:prstGeom prst="rect">
+            <a:avLst/>
+          </a:prstGeom>
+          <a:noFill/>
+          <a:ln/>
+        </p:spPr>
+        <p:txBody>
+          <a:bodyPr wrap="square" lIns="0" tIns="0" rIns="0" bIns="0" rtlCol="0" anchor="ctr"/>
+          <a:lstStyle/>
+          <a:p>
+            <a:pPr indent="0" marL="0">
+              <a:lnSpc>
+                <a:spcPct val="140000"/>
+              </a:lnSpc>
+              <a:buNone/>
+            </a:pPr>
+            <a:r>
+              <a:rPr lang="en-US" sz="1400" b="1" dirty="0">
+                <a:solidFill>
+                  <a:srgbClr val="FFFFFF"/>
+                </a:solidFill>
+                <a:latin typeface="Meiryo" pitchFamily="34" charset="0"/>
+                <a:ea typeface="Meiryo" pitchFamily="34" charset="-122"/>
+                <a:cs typeface="Meiryo" pitchFamily="34" charset="-120"/>
+              </a:rPr>
+              <a:t>DYNATREKを使えば、データ分析の専門的な知識や経験がない人でも、業務データを集計・比較して、そこから傾向をつかむことができる。</a:t>
+            </a:r>
+            <a:endParaRPr lang="en-US" sz="1400" dirty="0"/>
+          </a:p>
+        </p:txBody>
+      </p:sp>
+      <p:sp>
+        <p:nvSpPr>
+          <p:cNvPr id="8" name="Shape 6"/>
+          <p:cNvSpPr/>
+          <p:nvPr/>
+        </p:nvSpPr>
+        <p:spPr>
+          <a:xfrm>
+            <a:off x="5559552" y="2212848"/>
+            <a:ext cx="566928" cy="457200"/>
+          </a:xfrm>
+          <a:prstGeom prst="rightArrow">
+            <a:avLst/>
+          </a:prstGeom>
+          <a:solidFill>
+            <a:srgbClr val="D9482F"/>
+          </a:solidFill>
+          <a:ln w="6350">
+            <a:solidFill>
+              <a:srgbClr val="D9482F"/>
+            </a:solidFill>
+            <a:prstDash val="solid"/>
+          </a:ln>
+        </p:spPr>
+      </p:sp>
+      <p:sp>
+        <p:nvSpPr>
+          <p:cNvPr id="9" name="Shape 7"/>
+          <p:cNvSpPr/>
+          <p:nvPr/>
+        </p:nvSpPr>
+        <p:spPr>
+          <a:xfrm>
+            <a:off x="6309360" y="1298448"/>
+            <a:ext cx="5376672" cy="2286000"/>
           </a:xfrm>
           <a:prstGeom prst="roundRect">
             <a:avLst>
-              <a:gd name="adj" fmla="val 2069"/>
+              <a:gd name="adj" fmla="val 2400"/>
+            </a:avLst>
+          </a:prstGeom>
+          <a:solidFill>
+            <a:srgbClr val="FBEAE4"/>
+          </a:solidFill>
+          <a:ln w="12700">
+            <a:solidFill>
+              <a:srgbClr val="D9482F"/>
+            </a:solidFill>
+            <a:prstDash val="solid"/>
+          </a:ln>
+        </p:spPr>
+      </p:sp>
+      <p:sp>
+        <p:nvSpPr>
+          <p:cNvPr id="10" name="Shape 8"/>
+          <p:cNvSpPr/>
+          <p:nvPr/>
+        </p:nvSpPr>
+        <p:spPr>
+          <a:xfrm>
+            <a:off x="6565392" y="1517904"/>
+            <a:ext cx="329184" cy="329184"/>
+          </a:xfrm>
+          <a:prstGeom prst="ellipse">
+            <a:avLst/>
+          </a:prstGeom>
+          <a:solidFill>
+            <a:srgbClr val="D9482F"/>
+          </a:solidFill>
+          <a:ln w="6350">
+            <a:solidFill>
+              <a:srgbClr val="D9482F"/>
+            </a:solidFill>
+            <a:prstDash val="solid"/>
+          </a:ln>
+        </p:spPr>
+      </p:sp>
+      <p:sp>
+        <p:nvSpPr>
+          <p:cNvPr id="11" name="Text 9"/>
+          <p:cNvSpPr txBox="1"/>
+          <p:nvPr/>
+        </p:nvSpPr>
+        <p:spPr>
+          <a:xfrm>
+            <a:off x="6565392" y="1517904"/>
+            <a:ext cx="329184" cy="329184"/>
+          </a:xfrm>
+          <a:prstGeom prst="rect">
+            <a:avLst/>
+          </a:prstGeom>
+          <a:noFill/>
+          <a:ln/>
+        </p:spPr>
+        <p:txBody>
+          <a:bodyPr wrap="square" lIns="0" tIns="0" rIns="0" bIns="0" rtlCol="0" anchor="ctr"/>
+          <a:lstStyle/>
+          <a:p>
+            <a:pPr algn="ctr" indent="0" marL="0">
+              <a:buNone/>
+            </a:pPr>
+            <a:r>
+              <a:rPr lang="en-US" sz="1300" b="1" dirty="0">
+                <a:solidFill>
+                  <a:srgbClr val="FFFFFF"/>
+                </a:solidFill>
+                <a:latin typeface="Meiryo" pitchFamily="34" charset="0"/>
+                <a:ea typeface="Meiryo" pitchFamily="34" charset="-122"/>
+                <a:cs typeface="Meiryo" pitchFamily="34" charset="-120"/>
+              </a:rPr>
+              <a:t>2</a:t>
+            </a:r>
+            <a:endParaRPr lang="en-US" sz="1300" dirty="0"/>
+          </a:p>
+        </p:txBody>
+      </p:sp>
+      <p:sp>
+        <p:nvSpPr>
+          <p:cNvPr id="12" name="Text 10"/>
+          <p:cNvSpPr txBox="1"/>
+          <p:nvPr/>
+        </p:nvSpPr>
+        <p:spPr>
+          <a:xfrm>
+            <a:off x="7004304" y="1499616"/>
+            <a:ext cx="4389120" cy="365760"/>
+          </a:xfrm>
+          <a:prstGeom prst="rect">
+            <a:avLst/>
+          </a:prstGeom>
+          <a:noFill/>
+          <a:ln/>
+        </p:spPr>
+        <p:txBody>
+          <a:bodyPr wrap="square" lIns="0" tIns="0" rIns="0" bIns="0" rtlCol="0" anchor="ctr"/>
+          <a:lstStyle/>
+          <a:p>
+            <a:pPr indent="0" marL="0">
+              <a:buNone/>
+            </a:pPr>
+            <a:r>
+              <a:rPr lang="en-US" sz="1400" b="1" dirty="0">
+                <a:solidFill>
+                  <a:srgbClr val="D9482F"/>
+                </a:solidFill>
+                <a:latin typeface="Meiryo" pitchFamily="34" charset="0"/>
+                <a:ea typeface="Meiryo" pitchFamily="34" charset="-122"/>
+                <a:cs typeface="Meiryo" pitchFamily="34" charset="-120"/>
+              </a:rPr>
+              <a:t>本発表ですること</a:t>
+            </a:r>
+            <a:endParaRPr lang="en-US" sz="1400" dirty="0"/>
+          </a:p>
+        </p:txBody>
+      </p:sp>
+      <p:sp>
+        <p:nvSpPr>
+          <p:cNvPr id="13" name="Text 11"/>
+          <p:cNvSpPr txBox="1"/>
+          <p:nvPr/>
+        </p:nvSpPr>
+        <p:spPr>
+          <a:xfrm>
+            <a:off x="6583680" y="2011680"/>
+            <a:ext cx="4828032" cy="1417320"/>
+          </a:xfrm>
+          <a:prstGeom prst="rect">
+            <a:avLst/>
+          </a:prstGeom>
+          <a:noFill/>
+          <a:ln/>
+        </p:spPr>
+        <p:txBody>
+          <a:bodyPr wrap="square" lIns="0" tIns="0" rIns="0" bIns="0" rtlCol="0" anchor="ctr"/>
+          <a:lstStyle/>
+          <a:p>
+            <a:pPr indent="0" marL="0">
+              <a:lnSpc>
+                <a:spcPct val="140000"/>
+              </a:lnSpc>
+              <a:buNone/>
+            </a:pPr>
+            <a:r>
+              <a:rPr lang="en-US" sz="1400" b="1" dirty="0">
+                <a:solidFill>
+                  <a:srgbClr val="1E2A38"/>
+                </a:solidFill>
+                <a:latin typeface="Meiryo" pitchFamily="34" charset="0"/>
+                <a:ea typeface="Meiryo" pitchFamily="34" charset="-122"/>
+                <a:cs typeface="Meiryo" pitchFamily="34" charset="-120"/>
+              </a:rPr>
+              <a:t>今回は、その一例として、私が実際に行った分析を紹介します。</a:t>
+            </a:r>
+            <a:endParaRPr lang="en-US" sz="1400" dirty="0"/>
+          </a:p>
+          <a:p>
+            <a:pPr indent="0" marL="0">
+              <a:lnSpc>
+                <a:spcPct val="140000"/>
+              </a:lnSpc>
+              <a:buNone/>
+            </a:pPr>
+            <a:r>
+              <a:rPr lang="en-US" sz="1400" b="1" dirty="0">
+                <a:solidFill>
+                  <a:srgbClr val="1E2A38"/>
+                </a:solidFill>
+                <a:latin typeface="Meiryo" pitchFamily="34" charset="0"/>
+                <a:ea typeface="Meiryo" pitchFamily="34" charset="-122"/>
+                <a:cs typeface="Meiryo" pitchFamily="34" charset="-120"/>
+              </a:rPr>
+              <a:t>題材は、愛知銀行のインターネットバンキング（IB）の普及状況です。</a:t>
+            </a:r>
+            <a:endParaRPr lang="en-US" sz="1400" dirty="0"/>
+          </a:p>
+        </p:txBody>
+      </p:sp>
+      <p:sp>
+        <p:nvSpPr>
+          <p:cNvPr id="14" name="Text 12"/>
+          <p:cNvSpPr txBox="1"/>
+          <p:nvPr/>
+        </p:nvSpPr>
+        <p:spPr>
+          <a:xfrm>
+            <a:off x="502920" y="3858768"/>
+            <a:ext cx="11183112" cy="329184"/>
+          </a:xfrm>
+          <a:prstGeom prst="rect">
+            <a:avLst/>
+          </a:prstGeom>
+          <a:noFill/>
+          <a:ln/>
+        </p:spPr>
+        <p:txBody>
+          <a:bodyPr wrap="square" lIns="0" tIns="0" rIns="0" bIns="0" rtlCol="0" anchor="ctr"/>
+          <a:lstStyle/>
+          <a:p>
+            <a:pPr indent="0" marL="0">
+              <a:buNone/>
+            </a:pPr>
+            <a:r>
+              <a:rPr lang="en-US" sz="1400" b="1" dirty="0">
+                <a:solidFill>
+                  <a:srgbClr val="13294B"/>
+                </a:solidFill>
+                <a:latin typeface="Meiryo" pitchFamily="34" charset="0"/>
+                <a:ea typeface="Meiryo" pitchFamily="34" charset="-122"/>
+                <a:cs typeface="Meiryo" pitchFamily="34" charset="-120"/>
+              </a:rPr>
+              <a:t>なぜ、専門知識や経験がなくても分析できるのか</a:t>
+            </a:r>
+            <a:endParaRPr lang="en-US" sz="1400" dirty="0"/>
+          </a:p>
+        </p:txBody>
+      </p:sp>
+      <p:sp>
+        <p:nvSpPr>
+          <p:cNvPr id="15" name="Shape 13"/>
+          <p:cNvSpPr/>
+          <p:nvPr/>
+        </p:nvSpPr>
+        <p:spPr>
+          <a:xfrm>
+            <a:off x="502920" y="4261104"/>
+            <a:ext cx="5486400" cy="1627632"/>
+          </a:xfrm>
+          <a:prstGeom prst="roundRect">
+            <a:avLst>
+              <a:gd name="adj" fmla="val 3371"/>
             </a:avLst>
           </a:prstGeom>
           <a:solidFill>
@@ -1822,285 +2396,19 @@
       </p:sp>
       <p:sp>
         <p:nvSpPr>
-          <p:cNvPr id="5" name="Text 3"/>
-          <p:cNvSpPr txBox="1"/>
-          <p:nvPr/>
-        </p:nvSpPr>
-        <p:spPr>
-          <a:xfrm>
-            <a:off x="758952" y="1737360"/>
-            <a:ext cx="4754880" cy="310896"/>
-          </a:xfrm>
-          <a:prstGeom prst="rect">
-            <a:avLst/>
-          </a:prstGeom>
-          <a:noFill/>
-          <a:ln/>
-        </p:spPr>
-        <p:txBody>
-          <a:bodyPr wrap="square" lIns="0" tIns="0" rIns="0" bIns="0" rtlCol="0" anchor="ctr"/>
-          <a:lstStyle/>
-          <a:p>
-            <a:pPr indent="0" marL="0">
-              <a:buNone/>
-            </a:pPr>
-            <a:r>
-              <a:rPr lang="en-US" sz="1500" b="1" dirty="0">
-                <a:solidFill>
-                  <a:srgbClr val="13294B"/>
-                </a:solidFill>
-                <a:latin typeface="Meiryo" pitchFamily="34" charset="0"/>
-                <a:ea typeface="Meiryo" pitchFamily="34" charset="-122"/>
-                <a:cs typeface="Meiryo" pitchFamily="34" charset="-120"/>
-              </a:rPr>
-              <a:t>今回のテーマと背景</a:t>
-            </a:r>
-            <a:endParaRPr lang="en-US" sz="1500" dirty="0"/>
-          </a:p>
-        </p:txBody>
-      </p:sp>
-      <p:sp>
-        <p:nvSpPr>
-          <p:cNvPr id="6" name="Text 4"/>
-          <p:cNvSpPr txBox="1"/>
-          <p:nvPr/>
-        </p:nvSpPr>
-        <p:spPr>
-          <a:xfrm>
-            <a:off x="758952" y="2103120"/>
-            <a:ext cx="4718304" cy="2011680"/>
-          </a:xfrm>
-          <a:prstGeom prst="rect">
-            <a:avLst/>
-          </a:prstGeom>
-          <a:noFill/>
-          <a:ln/>
-        </p:spPr>
-        <p:txBody>
-          <a:bodyPr wrap="square" lIns="0" tIns="0" rIns="0" bIns="0" rtlCol="0" anchor="t"/>
-          <a:lstStyle/>
-          <a:p>
-            <a:pPr marL="342900" indent="-342900">
-              <a:lnSpc>
-                <a:spcPct val="130000"/>
-              </a:lnSpc>
-              <a:spcAft>
-                <a:spcPts val="900"/>
-              </a:spcAft>
-              <a:buSzPct val="100000"/>
-              <a:buChar char="▪"/>
-            </a:pPr>
-            <a:r>
-              <a:rPr lang="en-US" sz="1250" dirty="0">
-                <a:solidFill>
-                  <a:srgbClr val="1E2A38"/>
-                </a:solidFill>
-                <a:latin typeface="Meiryo" pitchFamily="34" charset="0"/>
-                <a:ea typeface="Meiryo" pitchFamily="34" charset="-122"/>
-                <a:cs typeface="Meiryo" pitchFamily="34" charset="-120"/>
-              </a:rPr>
-              <a:t>愛知銀行では、インターネットバンキング（IB）の普及に向けた施策やキャンペーンが行われている。</a:t>
-            </a:r>
-            <a:endParaRPr lang="en-US" sz="1250" dirty="0"/>
-          </a:p>
-          <a:p>
-            <a:pPr marL="342900" indent="-342900">
-              <a:lnSpc>
-                <a:spcPct val="130000"/>
-              </a:lnSpc>
-              <a:spcAft>
-                <a:spcPts val="900"/>
-              </a:spcAft>
-              <a:buSzPct val="100000"/>
-              <a:buChar char="▪"/>
-            </a:pPr>
-            <a:r>
-              <a:rPr lang="en-US" sz="1250" dirty="0">
-                <a:solidFill>
-                  <a:srgbClr val="1E2A38"/>
-                </a:solidFill>
-                <a:latin typeface="Meiryo" pitchFamily="34" charset="0"/>
-                <a:ea typeface="Meiryo" pitchFamily="34" charset="-122"/>
-                <a:cs typeface="Meiryo" pitchFamily="34" charset="-120"/>
-              </a:rPr>
-              <a:t>現場の疑問は「IBは、実際にどれくらい使われるようになったのか」。</a:t>
-            </a:r>
-            <a:endParaRPr lang="en-US" sz="1250" dirty="0"/>
-          </a:p>
-          <a:p>
-            <a:pPr marL="342900" indent="-342900">
-              <a:lnSpc>
-                <a:spcPct val="130000"/>
-              </a:lnSpc>
-              <a:spcAft>
-                <a:spcPts val="900"/>
-              </a:spcAft>
-              <a:buSzPct val="100000"/>
-              <a:buChar char="▪"/>
-            </a:pPr>
-            <a:r>
-              <a:rPr lang="en-US" sz="1250" dirty="0">
-                <a:solidFill>
-                  <a:srgbClr val="1E2A38"/>
-                </a:solidFill>
-                <a:latin typeface="Meiryo" pitchFamily="34" charset="0"/>
-                <a:ea typeface="Meiryo" pitchFamily="34" charset="-122"/>
-                <a:cs typeface="Meiryo" pitchFamily="34" charset="-120"/>
-              </a:rPr>
-              <a:t>この疑問に答えるため、銀行の業務データをDYNATREKで分析した。</a:t>
-            </a:r>
-            <a:endParaRPr lang="en-US" sz="1250" dirty="0"/>
-          </a:p>
-        </p:txBody>
-      </p:sp>
-      <p:sp>
-        <p:nvSpPr>
-          <p:cNvPr id="7" name="Shape 5"/>
+          <p:cNvPr id="16" name="Shape 14"/>
           <p:cNvSpPr/>
           <p:nvPr/>
         </p:nvSpPr>
         <p:spPr>
           <a:xfrm>
-            <a:off x="502920" y="4462272"/>
-            <a:ext cx="5212080" cy="1481328"/>
+            <a:off x="740664" y="4480560"/>
+            <a:ext cx="658368" cy="310896"/>
           </a:xfrm>
           <a:prstGeom prst="roundRect">
             <a:avLst>
-              <a:gd name="adj" fmla="val 3704"/>
+              <a:gd name="adj" fmla="val 14706"/>
             </a:avLst>
-          </a:prstGeom>
-          <a:solidFill>
-            <a:srgbClr val="FFFFFF"/>
-          </a:solidFill>
-          <a:ln w="12700">
-            <a:solidFill>
-              <a:srgbClr val="D3DCE8"/>
-            </a:solidFill>
-            <a:prstDash val="solid"/>
-          </a:ln>
-        </p:spPr>
-      </p:sp>
-      <p:sp>
-        <p:nvSpPr>
-          <p:cNvPr id="8" name="Text 6"/>
-          <p:cNvSpPr txBox="1"/>
-          <p:nvPr/>
-        </p:nvSpPr>
-        <p:spPr>
-          <a:xfrm>
-            <a:off x="758952" y="4608576"/>
-            <a:ext cx="4754880" cy="292608"/>
-          </a:xfrm>
-          <a:prstGeom prst="rect">
-            <a:avLst/>
-          </a:prstGeom>
-          <a:noFill/>
-          <a:ln/>
-        </p:spPr>
-        <p:txBody>
-          <a:bodyPr wrap="square" lIns="0" tIns="0" rIns="0" bIns="0" rtlCol="0" anchor="ctr"/>
-          <a:lstStyle/>
-          <a:p>
-            <a:pPr indent="0" marL="0">
-              <a:buNone/>
-            </a:pPr>
-            <a:r>
-              <a:rPr lang="en-US" sz="1400" b="1" dirty="0">
-                <a:solidFill>
-                  <a:srgbClr val="D9482F"/>
-                </a:solidFill>
-                <a:latin typeface="Meiryo" pitchFamily="34" charset="0"/>
-                <a:ea typeface="Meiryo" pitchFamily="34" charset="-122"/>
-                <a:cs typeface="Meiryo" pitchFamily="34" charset="-120"/>
-              </a:rPr>
-              <a:t>DYNATREKとは</a:t>
-            </a:r>
-            <a:endParaRPr lang="en-US" sz="1400" dirty="0"/>
-          </a:p>
-        </p:txBody>
-      </p:sp>
-      <p:sp>
-        <p:nvSpPr>
-          <p:cNvPr id="9" name="Text 7"/>
-          <p:cNvSpPr txBox="1"/>
-          <p:nvPr/>
-        </p:nvSpPr>
-        <p:spPr>
-          <a:xfrm>
-            <a:off x="758952" y="4974336"/>
-            <a:ext cx="4718304" cy="868680"/>
-          </a:xfrm>
-          <a:prstGeom prst="rect">
-            <a:avLst/>
-          </a:prstGeom>
-          <a:noFill/>
-          <a:ln/>
-        </p:spPr>
-        <p:txBody>
-          <a:bodyPr wrap="square" lIns="0" tIns="0" rIns="0" bIns="0" rtlCol="0" anchor="t"/>
-          <a:lstStyle/>
-          <a:p>
-            <a:pPr indent="0" marL="0">
-              <a:lnSpc>
-                <a:spcPct val="130000"/>
-              </a:lnSpc>
-              <a:buNone/>
-            </a:pPr>
-            <a:r>
-              <a:rPr lang="en-US" sz="1200" dirty="0">
-                <a:solidFill>
-                  <a:srgbClr val="1E2A38"/>
-                </a:solidFill>
-                <a:latin typeface="Meiryo" pitchFamily="34" charset="0"/>
-                <a:ea typeface="Meiryo" pitchFamily="34" charset="-122"/>
-                <a:cs typeface="Meiryo" pitchFamily="34" charset="-120"/>
-              </a:rPr>
-              <a:t>業務データベースに対して、期間・取引の種類・チャネルなどの条件を指定し、必要なデータだけを表示・集計・比較できるツール。</a:t>
-            </a:r>
-            <a:endParaRPr lang="en-US" sz="1200" dirty="0"/>
-          </a:p>
-        </p:txBody>
-      </p:sp>
-      <p:sp>
-        <p:nvSpPr>
-          <p:cNvPr id="10" name="Shape 8"/>
-          <p:cNvSpPr/>
-          <p:nvPr/>
-        </p:nvSpPr>
-        <p:spPr>
-          <a:xfrm>
-            <a:off x="6080760" y="1572768"/>
-            <a:ext cx="5605272" cy="1737360"/>
-          </a:xfrm>
-          <a:prstGeom prst="roundRect">
-            <a:avLst>
-              <a:gd name="adj" fmla="val 3158"/>
-            </a:avLst>
-          </a:prstGeom>
-          <a:solidFill>
-            <a:srgbClr val="FFFFFF"/>
-          </a:solidFill>
-          <a:ln w="12700">
-            <a:solidFill>
-              <a:srgbClr val="D3DCE8"/>
-            </a:solidFill>
-            <a:prstDash val="solid"/>
-          </a:ln>
-        </p:spPr>
-      </p:sp>
-      <p:sp>
-        <p:nvSpPr>
-          <p:cNvPr id="11" name="Shape 9"/>
-          <p:cNvSpPr/>
-          <p:nvPr/>
-        </p:nvSpPr>
-        <p:spPr>
-          <a:xfrm>
-            <a:off x="6336792" y="1810512"/>
-            <a:ext cx="329184" cy="329184"/>
-          </a:xfrm>
-          <a:prstGeom prst="ellipse">
-            <a:avLst/>
           </a:prstGeom>
           <a:solidFill>
             <a:srgbClr val="13294B"/>
@@ -2115,14 +2423,14 @@
       </p:sp>
       <p:sp>
         <p:nvSpPr>
-          <p:cNvPr id="12" name="Text 10"/>
-          <p:cNvSpPr txBox="1"/>
-          <p:nvPr/>
-        </p:nvSpPr>
-        <p:spPr>
-          <a:xfrm>
-            <a:off x="6336792" y="1810512"/>
-            <a:ext cx="329184" cy="329184"/>
+          <p:cNvPr id="17" name="Text 15"/>
+          <p:cNvSpPr txBox="1"/>
+          <p:nvPr/>
+        </p:nvSpPr>
+        <p:spPr>
+          <a:xfrm>
+            <a:off x="740664" y="4480560"/>
+            <a:ext cx="658368" cy="310896"/>
           </a:xfrm>
           <a:prstGeom prst="rect">
             <a:avLst/>
@@ -2138,7 +2446,7 @@
               <a:buNone/>
             </a:pPr>
             <a:r>
-              <a:rPr lang="en-US" sz="1300" b="1" dirty="0">
+              <a:rPr lang="en-US" sz="1150" b="1" dirty="0">
                 <a:solidFill>
                   <a:srgbClr val="FFFFFF"/>
                 </a:solidFill>
@@ -2146,22 +2454,22 @@
                 <a:ea typeface="Meiryo" pitchFamily="34" charset="-122"/>
                 <a:cs typeface="Meiryo" pitchFamily="34" charset="-120"/>
               </a:rPr>
-              <a:t>1</a:t>
-            </a:r>
-            <a:endParaRPr lang="en-US" sz="1300" dirty="0"/>
-          </a:p>
-        </p:txBody>
-      </p:sp>
-      <p:sp>
-        <p:nvSpPr>
-          <p:cNvPr id="13" name="Text 11"/>
-          <p:cNvSpPr txBox="1"/>
-          <p:nvPr/>
-        </p:nvSpPr>
-        <p:spPr>
-          <a:xfrm>
-            <a:off x="6793992" y="1792224"/>
-            <a:ext cx="4645152" cy="365760"/>
+              <a:t>壁①</a:t>
+            </a:r>
+            <a:endParaRPr lang="en-US" sz="1150" dirty="0"/>
+          </a:p>
+        </p:txBody>
+      </p:sp>
+      <p:sp>
+        <p:nvSpPr>
+          <p:cNvPr id="18" name="Text 16"/>
+          <p:cNvSpPr txBox="1"/>
+          <p:nvPr/>
+        </p:nvSpPr>
+        <p:spPr>
+          <a:xfrm>
+            <a:off x="1508760" y="4462272"/>
+            <a:ext cx="4206240" cy="347472"/>
           </a:xfrm>
           <a:prstGeom prst="rect">
             <a:avLst/>
@@ -2177,7 +2485,7 @@
               <a:buNone/>
             </a:pPr>
             <a:r>
-              <a:rPr lang="en-US" sz="1500" b="1" dirty="0">
+              <a:rPr lang="en-US" sz="1400" b="1" dirty="0">
                 <a:solidFill>
                   <a:srgbClr val="13294B"/>
                 </a:solidFill>
@@ -2185,22 +2493,22 @@
                 <a:ea typeface="Meiryo" pitchFamily="34" charset="-122"/>
                 <a:cs typeface="Meiryo" pitchFamily="34" charset="-120"/>
               </a:rPr>
-              <a:t>壁①　何を見れば答えになるのかを決める</a:t>
-            </a:r>
-            <a:endParaRPr lang="en-US" sz="1500" dirty="0"/>
-          </a:p>
-        </p:txBody>
-      </p:sp>
-      <p:sp>
-        <p:nvSpPr>
-          <p:cNvPr id="14" name="Text 12"/>
-          <p:cNvSpPr txBox="1"/>
-          <p:nvPr/>
-        </p:nvSpPr>
-        <p:spPr>
-          <a:xfrm>
-            <a:off x="6793992" y="2212848"/>
-            <a:ext cx="4645152" cy="914400"/>
+              <a:t>何を見れば答えになるのかを決める</a:t>
+            </a:r>
+            <a:endParaRPr lang="en-US" sz="1400" dirty="0"/>
+          </a:p>
+        </p:txBody>
+      </p:sp>
+      <p:sp>
+        <p:nvSpPr>
+          <p:cNvPr id="19" name="Text 17"/>
+          <p:cNvSpPr txBox="1"/>
+          <p:nvPr/>
+        </p:nvSpPr>
+        <p:spPr>
+          <a:xfrm>
+            <a:off x="758952" y="4882896"/>
+            <a:ext cx="4974336" cy="896112"/>
           </a:xfrm>
           <a:prstGeom prst="rect">
             <a:avLst/>
@@ -2219,7 +2527,7 @@
               <a:buNone/>
             </a:pPr>
             <a:r>
-              <a:rPr lang="en-US" sz="1250" dirty="0">
+              <a:rPr lang="en-US" sz="1200" dirty="0">
                 <a:solidFill>
                   <a:srgbClr val="1E2A38"/>
                 </a:solidFill>
@@ -2227,26 +2535,26 @@
                 <a:ea typeface="Meiryo" pitchFamily="34" charset="-122"/>
                 <a:cs typeface="Meiryo" pitchFamily="34" charset="-120"/>
               </a:rPr>
-              <a:t>「IBの普及」を、どの数字で見れば確かめたことになるのか。ここは人が考えるところで、ツールでは代われない。</a:t>
-            </a:r>
-            <a:endParaRPr lang="en-US" sz="1250" dirty="0"/>
-          </a:p>
-        </p:txBody>
-      </p:sp>
-      <p:sp>
-        <p:nvSpPr>
-          <p:cNvPr id="15" name="Shape 13"/>
+              <a:t>「普及したかどうか」を、どの数字で見れば確かめたことになるのか。ここは人が考えるところで、ツールでは代われない。</a:t>
+            </a:r>
+            <a:endParaRPr lang="en-US" sz="1200" dirty="0"/>
+          </a:p>
+        </p:txBody>
+      </p:sp>
+      <p:sp>
+        <p:nvSpPr>
+          <p:cNvPr id="20" name="Shape 18"/>
           <p:cNvSpPr/>
           <p:nvPr/>
         </p:nvSpPr>
         <p:spPr>
           <a:xfrm>
-            <a:off x="6080760" y="3456432"/>
-            <a:ext cx="5605272" cy="1737360"/>
+            <a:off x="6199632" y="4261104"/>
+            <a:ext cx="5486400" cy="1627632"/>
           </a:xfrm>
           <a:prstGeom prst="roundRect">
             <a:avLst>
-              <a:gd name="adj" fmla="val 3158"/>
+              <a:gd name="adj" fmla="val 3371"/>
             </a:avLst>
           </a:prstGeom>
           <a:solidFill>
@@ -2262,17 +2570,19 @@
       </p:sp>
       <p:sp>
         <p:nvSpPr>
-          <p:cNvPr id="16" name="Shape 14"/>
+          <p:cNvPr id="21" name="Shape 19"/>
           <p:cNvSpPr/>
           <p:nvPr/>
         </p:nvSpPr>
         <p:spPr>
           <a:xfrm>
-            <a:off x="6336792" y="3694176"/>
-            <a:ext cx="329184" cy="329184"/>
-          </a:xfrm>
-          <a:prstGeom prst="ellipse">
-            <a:avLst/>
+            <a:off x="6437376" y="4480560"/>
+            <a:ext cx="658368" cy="310896"/>
+          </a:xfrm>
+          <a:prstGeom prst="roundRect">
+            <a:avLst>
+              <a:gd name="adj" fmla="val 14706"/>
+            </a:avLst>
           </a:prstGeom>
           <a:solidFill>
             <a:srgbClr val="D9482F"/>
@@ -2287,14 +2597,14 @@
       </p:sp>
       <p:sp>
         <p:nvSpPr>
-          <p:cNvPr id="17" name="Text 15"/>
-          <p:cNvSpPr txBox="1"/>
-          <p:nvPr/>
-        </p:nvSpPr>
-        <p:spPr>
-          <a:xfrm>
-            <a:off x="6336792" y="3694176"/>
-            <a:ext cx="329184" cy="329184"/>
+          <p:cNvPr id="22" name="Text 20"/>
+          <p:cNvSpPr txBox="1"/>
+          <p:nvPr/>
+        </p:nvSpPr>
+        <p:spPr>
+          <a:xfrm>
+            <a:off x="6437376" y="4480560"/>
+            <a:ext cx="658368" cy="310896"/>
           </a:xfrm>
           <a:prstGeom prst="rect">
             <a:avLst/>
@@ -2310,7 +2620,7 @@
               <a:buNone/>
             </a:pPr>
             <a:r>
-              <a:rPr lang="en-US" sz="1300" b="1" dirty="0">
+              <a:rPr lang="en-US" sz="1150" b="1" dirty="0">
                 <a:solidFill>
                   <a:srgbClr val="FFFFFF"/>
                 </a:solidFill>
@@ -2318,22 +2628,22 @@
                 <a:ea typeface="Meiryo" pitchFamily="34" charset="-122"/>
                 <a:cs typeface="Meiryo" pitchFamily="34" charset="-120"/>
               </a:rPr>
-              <a:t>2</a:t>
-            </a:r>
-            <a:endParaRPr lang="en-US" sz="1300" dirty="0"/>
-          </a:p>
-        </p:txBody>
-      </p:sp>
-      <p:sp>
-        <p:nvSpPr>
-          <p:cNvPr id="18" name="Text 16"/>
-          <p:cNvSpPr txBox="1"/>
-          <p:nvPr/>
-        </p:nvSpPr>
-        <p:spPr>
-          <a:xfrm>
-            <a:off x="6793992" y="3675888"/>
-            <a:ext cx="4645152" cy="365760"/>
+              <a:t>壁②</a:t>
+            </a:r>
+            <a:endParaRPr lang="en-US" sz="1150" dirty="0"/>
+          </a:p>
+        </p:txBody>
+      </p:sp>
+      <p:sp>
+        <p:nvSpPr>
+          <p:cNvPr id="23" name="Text 21"/>
+          <p:cNvSpPr txBox="1"/>
+          <p:nvPr/>
+        </p:nvSpPr>
+        <p:spPr>
+          <a:xfrm>
+            <a:off x="7205472" y="4462272"/>
+            <a:ext cx="4206240" cy="347472"/>
           </a:xfrm>
           <a:prstGeom prst="rect">
             <a:avLst/>
@@ -2349,7 +2659,7 @@
               <a:buNone/>
             </a:pPr>
             <a:r>
-              <a:rPr lang="en-US" sz="1500" b="1" dirty="0">
+              <a:rPr lang="en-US" sz="1400" b="1" dirty="0">
                 <a:solidFill>
                   <a:srgbClr val="D9482F"/>
                 </a:solidFill>
@@ -2357,22 +2667,22 @@
                 <a:ea typeface="Meiryo" pitchFamily="34" charset="-122"/>
                 <a:cs typeface="Meiryo" pitchFamily="34" charset="-120"/>
               </a:rPr>
-              <a:t>壁②　必要なデータを業務DBから取り出す</a:t>
-            </a:r>
-            <a:endParaRPr lang="en-US" sz="1500" dirty="0"/>
-          </a:p>
-        </p:txBody>
-      </p:sp>
-      <p:sp>
-        <p:nvSpPr>
-          <p:cNvPr id="19" name="Text 17"/>
-          <p:cNvSpPr txBox="1"/>
-          <p:nvPr/>
-        </p:nvSpPr>
-        <p:spPr>
-          <a:xfrm>
-            <a:off x="6793992" y="4096512"/>
-            <a:ext cx="4645152" cy="914400"/>
+              <a:t>必要なデータを業務DBから取り出す</a:t>
+            </a:r>
+            <a:endParaRPr lang="en-US" sz="1400" dirty="0"/>
+          </a:p>
+        </p:txBody>
+      </p:sp>
+      <p:sp>
+        <p:nvSpPr>
+          <p:cNvPr id="24" name="Text 22"/>
+          <p:cNvSpPr txBox="1"/>
+          <p:nvPr/>
+        </p:nvSpPr>
+        <p:spPr>
+          <a:xfrm>
+            <a:off x="6455664" y="4882896"/>
+            <a:ext cx="4974336" cy="896112"/>
           </a:xfrm>
           <a:prstGeom prst="rect">
             <a:avLst/>
@@ -2391,7 +2701,7 @@
               <a:buNone/>
             </a:pPr>
             <a:r>
-              <a:rPr lang="en-US" sz="1250" dirty="0">
+              <a:rPr lang="en-US" sz="1200" dirty="0">
                 <a:solidFill>
                   <a:srgbClr val="1E2A38"/>
                 </a:solidFill>
@@ -2399,87 +2709,21 @@
                 <a:ea typeface="Meiryo" pitchFamily="34" charset="-122"/>
                 <a:cs typeface="Meiryo" pitchFamily="34" charset="-120"/>
               </a:rPr>
-              <a:t>業務DBには分析に使わない項目も数多く含まれ、目的のデータを抜き出すこと自体が難しい。ここをDYNATREKが引き受ける。</a:t>
-            </a:r>
-            <a:endParaRPr lang="en-US" sz="1250" dirty="0"/>
-          </a:p>
-        </p:txBody>
-      </p:sp>
-      <p:sp>
-        <p:nvSpPr>
-          <p:cNvPr id="20" name="Shape 18"/>
-          <p:cNvSpPr/>
-          <p:nvPr/>
-        </p:nvSpPr>
-        <p:spPr>
-          <a:xfrm>
-            <a:off x="6080760" y="5340096"/>
-            <a:ext cx="5605272" cy="603504"/>
-          </a:xfrm>
-          <a:prstGeom prst="roundRect">
-            <a:avLst>
-              <a:gd name="adj" fmla="val 9091"/>
-            </a:avLst>
-          </a:prstGeom>
-          <a:solidFill>
-            <a:srgbClr val="13294B"/>
-          </a:solidFill>
-          <a:ln w="6350">
-            <a:solidFill>
-              <a:srgbClr val="13294B"/>
-            </a:solidFill>
-            <a:prstDash val="solid"/>
-          </a:ln>
-        </p:spPr>
-      </p:sp>
-      <p:sp>
-        <p:nvSpPr>
-          <p:cNvPr id="21" name="Text 19"/>
-          <p:cNvSpPr txBox="1"/>
-          <p:nvPr/>
-        </p:nvSpPr>
-        <p:spPr>
-          <a:xfrm>
-            <a:off x="6336792" y="5340096"/>
-            <a:ext cx="5093208" cy="603504"/>
-          </a:xfrm>
-          <a:prstGeom prst="rect">
-            <a:avLst/>
-          </a:prstGeom>
-          <a:noFill/>
-          <a:ln/>
-        </p:spPr>
-        <p:txBody>
-          <a:bodyPr wrap="square" lIns="0" tIns="0" rIns="0" bIns="0" rtlCol="0" anchor="ctr"/>
-          <a:lstStyle/>
-          <a:p>
-            <a:pPr algn="ctr" indent="0" marL="0">
-              <a:buNone/>
-            </a:pPr>
-            <a:r>
-              <a:rPr lang="en-US" sz="1350" b="1" dirty="0">
-                <a:solidFill>
-                  <a:srgbClr val="FFFFFF"/>
-                </a:solidFill>
-                <a:latin typeface="Meiryo" pitchFamily="34" charset="0"/>
-                <a:ea typeface="Meiryo" pitchFamily="34" charset="-122"/>
-                <a:cs typeface="Meiryo" pitchFamily="34" charset="-120"/>
-              </a:rPr>
-              <a:t>今回は、その一例として行った分析を紹介します。</a:t>
-            </a:r>
-            <a:endParaRPr lang="en-US" sz="1350" dirty="0"/>
-          </a:p>
-        </p:txBody>
-      </p:sp>
-      <p:sp>
-        <p:nvSpPr>
-          <p:cNvPr id="23" name="Text 20"/>
-          <p:cNvSpPr txBox="1"/>
-          <p:nvPr/>
-        </p:nvSpPr>
-        <p:spPr>
-          <a:xfrm>
-            <a:off x="11411712" y="6382512"/>
+              <a:t>業務DBには分析に使わない項目も数多く含まれ、目的のデータを抜き出すこと自体が難しい。ここをDYNATREKが引き受けるので、壁①を考えることに時間を使える。</a:t>
+            </a:r>
+            <a:endParaRPr lang="en-US" sz="1200" dirty="0"/>
+          </a:p>
+        </p:txBody>
+      </p:sp>
+      <p:sp>
+        <p:nvSpPr>
+          <p:cNvPr id="26" name="Text 23"/>
+          <p:cNvSpPr txBox="1"/>
+          <p:nvPr/>
+        </p:nvSpPr>
+        <p:spPr>
+          <a:xfrm>
+            <a:off x="11411712" y="6419088"/>
             <a:ext cx="365760" cy="274320"/>
           </a:xfrm>
           <a:prstGeom prst="rect">
@@ -2563,7 +2807,7 @@
           <a:bodyPr wrap="square" lIns="0" tIns="0" rIns="0" bIns="0" rtlCol="0" anchor="ctr"/>
           <a:lstStyle/>
           <a:p>
-            <a:pPr algn="l" indent="0" marL="0">
+            <a:pPr indent="0" marL="0">
               <a:buNone/>
             </a:pPr>
             <a:r>
@@ -2575,7 +2819,7 @@
                 <a:ea typeface="Meiryo" pitchFamily="34" charset="-122"/>
                 <a:cs typeface="Meiryo" pitchFamily="34" charset="-120"/>
               </a:rPr>
-              <a:t>IBの件数を数えるだけでは、普及は測れない</a:t>
+              <a:t>愛知銀行では、IBの利用を広げるための取り組みが行われている</a:t>
             </a:r>
             <a:endParaRPr lang="en-US" sz="2600" dirty="0"/>
           </a:p>
@@ -2602,7 +2846,7 @@
           <a:bodyPr wrap="square" lIns="0" tIns="0" rIns="0" bIns="0" rtlCol="0" anchor="ctr"/>
           <a:lstStyle/>
           <a:p>
-            <a:pPr algn="l" indent="0" marL="0">
+            <a:pPr indent="0" marL="0">
               <a:buNone/>
             </a:pPr>
             <a:r>
@@ -2614,7 +2858,7 @@
                 <a:ea typeface="Meiryo" pitchFamily="34" charset="-122"/>
                 <a:cs typeface="Meiryo" pitchFamily="34" charset="-120"/>
               </a:rPr>
-              <a:t>「IBでも行える取引が、どれだけIBで行われているか」という見方に置き換えた。</a:t>
+              <a:t>まず、どのような取り組みが行われているのかを押さえておく。</a:t>
             </a:r>
             <a:endParaRPr lang="en-US" sz="1350" dirty="0"/>
           </a:p>
@@ -2628,12 +2872,12 @@
         </p:nvSpPr>
         <p:spPr>
           <a:xfrm>
-            <a:off x="502920" y="1627632"/>
-            <a:ext cx="5486400" cy="1481328"/>
+            <a:off x="502920" y="1536192"/>
+            <a:ext cx="3520440" cy="3529584"/>
           </a:xfrm>
           <a:prstGeom prst="roundRect">
             <a:avLst>
-              <a:gd name="adj" fmla="val 3704"/>
+              <a:gd name="adj" fmla="val 1558"/>
             </a:avLst>
           </a:prstGeom>
           <a:solidFill>
@@ -2649,17 +2893,1045 @@
       </p:sp>
       <p:sp>
         <p:nvSpPr>
-          <p:cNvPr id="5" name="Shape 3"/>
+          <p:cNvPr id="5" name="Text 3"/>
+          <p:cNvSpPr txBox="1"/>
+          <p:nvPr/>
+        </p:nvSpPr>
+        <p:spPr>
+          <a:xfrm>
+            <a:off x="758952" y="1700784"/>
+            <a:ext cx="3008376" cy="274320"/>
+          </a:xfrm>
+          <a:prstGeom prst="rect">
+            <a:avLst/>
+          </a:prstGeom>
+          <a:noFill/>
+          <a:ln/>
+        </p:spPr>
+        <p:txBody>
+          <a:bodyPr wrap="square" lIns="0" tIns="0" rIns="0" bIns="0" rtlCol="0" anchor="ctr"/>
+          <a:lstStyle/>
+          <a:p>
+            <a:pPr indent="0" marL="0">
+              <a:buNone/>
+            </a:pPr>
+            <a:r>
+              <a:rPr lang="en-US" sz="1150" b="1" dirty="0">
+                <a:solidFill>
+                  <a:srgbClr val="D9482F"/>
+                </a:solidFill>
+                <a:latin typeface="Meiryo" pitchFamily="34" charset="0"/>
+                <a:ea typeface="Meiryo" pitchFamily="34" charset="-122"/>
+                <a:cs typeface="Meiryo" pitchFamily="34" charset="-120"/>
+              </a:rPr>
+              <a:t>施策①</a:t>
+            </a:r>
+            <a:endParaRPr lang="en-US" sz="1150" dirty="0"/>
+          </a:p>
+        </p:txBody>
+      </p:sp>
+      <p:sp>
+        <p:nvSpPr>
+          <p:cNvPr id="6" name="Text 4"/>
+          <p:cNvSpPr txBox="1"/>
+          <p:nvPr/>
+        </p:nvSpPr>
+        <p:spPr>
+          <a:xfrm>
+            <a:off x="758952" y="1993392"/>
+            <a:ext cx="3008376" cy="548640"/>
+          </a:xfrm>
+          <a:prstGeom prst="rect">
+            <a:avLst/>
+          </a:prstGeom>
+          <a:noFill/>
+          <a:ln/>
+        </p:spPr>
+        <p:txBody>
+          <a:bodyPr wrap="square" lIns="0" tIns="0" rIns="0" bIns="0" rtlCol="0" anchor="t"/>
+          <a:lstStyle/>
+          <a:p>
+            <a:pPr indent="0" marL="0">
+              <a:lnSpc>
+                <a:spcPct val="120000"/>
+              </a:lnSpc>
+              <a:buNone/>
+            </a:pPr>
+            <a:r>
+              <a:rPr lang="en-US" sz="1500" b="1" dirty="0">
+                <a:solidFill>
+                  <a:srgbClr val="8A9AAD"/>
+                </a:solidFill>
+                <a:latin typeface="Meiryo" pitchFamily="34" charset="0"/>
+                <a:ea typeface="Meiryo" pitchFamily="34" charset="-122"/>
+                <a:cs typeface="Meiryo" pitchFamily="34" charset="-120"/>
+              </a:rPr>
+              <a:t>（施策の名称を記入）</a:t>
+            </a:r>
+            <a:endParaRPr lang="en-US" sz="1500" dirty="0"/>
+          </a:p>
+        </p:txBody>
+      </p:sp>
+      <p:sp>
+        <p:nvSpPr>
+          <p:cNvPr id="7" name="Text 5"/>
+          <p:cNvSpPr txBox="1"/>
+          <p:nvPr/>
+        </p:nvSpPr>
+        <p:spPr>
+          <a:xfrm>
+            <a:off x="758952" y="2670048"/>
+            <a:ext cx="3008376" cy="237744"/>
+          </a:xfrm>
+          <a:prstGeom prst="rect">
+            <a:avLst/>
+          </a:prstGeom>
+          <a:noFill/>
+          <a:ln/>
+        </p:spPr>
+        <p:txBody>
+          <a:bodyPr wrap="square" lIns="0" tIns="0" rIns="0" bIns="0" rtlCol="0" anchor="ctr"/>
+          <a:lstStyle/>
+          <a:p>
+            <a:pPr indent="0" marL="0">
+              <a:buNone/>
+            </a:pPr>
+            <a:r>
+              <a:rPr lang="en-US" sz="1100" b="1" dirty="0">
+                <a:solidFill>
+                  <a:srgbClr val="13294B"/>
+                </a:solidFill>
+                <a:latin typeface="Meiryo" pitchFamily="34" charset="0"/>
+                <a:ea typeface="Meiryo" pitchFamily="34" charset="-122"/>
+                <a:cs typeface="Meiryo" pitchFamily="34" charset="-120"/>
+              </a:rPr>
+              <a:t>内容</a:t>
+            </a:r>
+            <a:endParaRPr lang="en-US" sz="1100" dirty="0"/>
+          </a:p>
+        </p:txBody>
+      </p:sp>
+      <p:sp>
+        <p:nvSpPr>
+          <p:cNvPr id="8" name="Text 6"/>
+          <p:cNvSpPr txBox="1"/>
+          <p:nvPr/>
+        </p:nvSpPr>
+        <p:spPr>
+          <a:xfrm>
+            <a:off x="758952" y="2907792"/>
+            <a:ext cx="3008376" cy="475488"/>
+          </a:xfrm>
+          <a:prstGeom prst="rect">
+            <a:avLst/>
+          </a:prstGeom>
+          <a:noFill/>
+          <a:ln/>
+        </p:spPr>
+        <p:txBody>
+          <a:bodyPr wrap="square" lIns="0" tIns="0" rIns="0" bIns="0" rtlCol="0" anchor="t"/>
+          <a:lstStyle/>
+          <a:p>
+            <a:pPr indent="0" marL="0">
+              <a:lnSpc>
+                <a:spcPct val="125000"/>
+              </a:lnSpc>
+              <a:buNone/>
+            </a:pPr>
+            <a:r>
+              <a:rPr lang="en-US" sz="1150" dirty="0">
+                <a:solidFill>
+                  <a:srgbClr val="8A9AAD"/>
+                </a:solidFill>
+                <a:latin typeface="Meiryo" pitchFamily="34" charset="0"/>
+                <a:ea typeface="Meiryo" pitchFamily="34" charset="-122"/>
+                <a:cs typeface="Meiryo" pitchFamily="34" charset="-120"/>
+              </a:rPr>
+              <a:t>（どのような取り組みかを記入）</a:t>
+            </a:r>
+            <a:endParaRPr lang="en-US" sz="1150" dirty="0"/>
+          </a:p>
+        </p:txBody>
+      </p:sp>
+      <p:sp>
+        <p:nvSpPr>
+          <p:cNvPr id="9" name="Text 7"/>
+          <p:cNvSpPr txBox="1"/>
+          <p:nvPr/>
+        </p:nvSpPr>
+        <p:spPr>
+          <a:xfrm>
+            <a:off x="758952" y="3438144"/>
+            <a:ext cx="3008376" cy="237744"/>
+          </a:xfrm>
+          <a:prstGeom prst="rect">
+            <a:avLst/>
+          </a:prstGeom>
+          <a:noFill/>
+          <a:ln/>
+        </p:spPr>
+        <p:txBody>
+          <a:bodyPr wrap="square" lIns="0" tIns="0" rIns="0" bIns="0" rtlCol="0" anchor="ctr"/>
+          <a:lstStyle/>
+          <a:p>
+            <a:pPr indent="0" marL="0">
+              <a:buNone/>
+            </a:pPr>
+            <a:r>
+              <a:rPr lang="en-US" sz="1100" b="1" dirty="0">
+                <a:solidFill>
+                  <a:srgbClr val="13294B"/>
+                </a:solidFill>
+                <a:latin typeface="Meiryo" pitchFamily="34" charset="0"/>
+                <a:ea typeface="Meiryo" pitchFamily="34" charset="-122"/>
+                <a:cs typeface="Meiryo" pitchFamily="34" charset="-120"/>
+              </a:rPr>
+              <a:t>ねらい</a:t>
+            </a:r>
+            <a:endParaRPr lang="en-US" sz="1100" dirty="0"/>
+          </a:p>
+        </p:txBody>
+      </p:sp>
+      <p:sp>
+        <p:nvSpPr>
+          <p:cNvPr id="10" name="Text 8"/>
+          <p:cNvSpPr txBox="1"/>
+          <p:nvPr/>
+        </p:nvSpPr>
+        <p:spPr>
+          <a:xfrm>
+            <a:off x="758952" y="3675888"/>
+            <a:ext cx="3008376" cy="475488"/>
+          </a:xfrm>
+          <a:prstGeom prst="rect">
+            <a:avLst/>
+          </a:prstGeom>
+          <a:noFill/>
+          <a:ln/>
+        </p:spPr>
+        <p:txBody>
+          <a:bodyPr wrap="square" lIns="0" tIns="0" rIns="0" bIns="0" rtlCol="0" anchor="t"/>
+          <a:lstStyle/>
+          <a:p>
+            <a:pPr indent="0" marL="0">
+              <a:lnSpc>
+                <a:spcPct val="125000"/>
+              </a:lnSpc>
+              <a:buNone/>
+            </a:pPr>
+            <a:r>
+              <a:rPr lang="en-US" sz="1150" dirty="0">
+                <a:solidFill>
+                  <a:srgbClr val="8A9AAD"/>
+                </a:solidFill>
+                <a:latin typeface="Meiryo" pitchFamily="34" charset="0"/>
+                <a:ea typeface="Meiryo" pitchFamily="34" charset="-122"/>
+                <a:cs typeface="Meiryo" pitchFamily="34" charset="-120"/>
+              </a:rPr>
+              <a:t>（何を増やしたいのかを記入）</a:t>
+            </a:r>
+            <a:endParaRPr lang="en-US" sz="1150" dirty="0"/>
+          </a:p>
+        </p:txBody>
+      </p:sp>
+      <p:sp>
+        <p:nvSpPr>
+          <p:cNvPr id="11" name="Text 9"/>
+          <p:cNvSpPr txBox="1"/>
+          <p:nvPr/>
+        </p:nvSpPr>
+        <p:spPr>
+          <a:xfrm>
+            <a:off x="758952" y="4206240"/>
+            <a:ext cx="3008376" cy="237744"/>
+          </a:xfrm>
+          <a:prstGeom prst="rect">
+            <a:avLst/>
+          </a:prstGeom>
+          <a:noFill/>
+          <a:ln/>
+        </p:spPr>
+        <p:txBody>
+          <a:bodyPr wrap="square" lIns="0" tIns="0" rIns="0" bIns="0" rtlCol="0" anchor="ctr"/>
+          <a:lstStyle/>
+          <a:p>
+            <a:pPr indent="0" marL="0">
+              <a:buNone/>
+            </a:pPr>
+            <a:r>
+              <a:rPr lang="en-US" sz="1100" b="1" dirty="0">
+                <a:solidFill>
+                  <a:srgbClr val="13294B"/>
+                </a:solidFill>
+                <a:latin typeface="Meiryo" pitchFamily="34" charset="0"/>
+                <a:ea typeface="Meiryo" pitchFamily="34" charset="-122"/>
+                <a:cs typeface="Meiryo" pitchFamily="34" charset="-120"/>
+              </a:rPr>
+              <a:t>実施時期</a:t>
+            </a:r>
+            <a:endParaRPr lang="en-US" sz="1100" dirty="0"/>
+          </a:p>
+        </p:txBody>
+      </p:sp>
+      <p:sp>
+        <p:nvSpPr>
+          <p:cNvPr id="12" name="Text 10"/>
+          <p:cNvSpPr txBox="1"/>
+          <p:nvPr/>
+        </p:nvSpPr>
+        <p:spPr>
+          <a:xfrm>
+            <a:off x="758952" y="4443984"/>
+            <a:ext cx="3008376" cy="475488"/>
+          </a:xfrm>
+          <a:prstGeom prst="rect">
+            <a:avLst/>
+          </a:prstGeom>
+          <a:noFill/>
+          <a:ln/>
+        </p:spPr>
+        <p:txBody>
+          <a:bodyPr wrap="square" lIns="0" tIns="0" rIns="0" bIns="0" rtlCol="0" anchor="t"/>
+          <a:lstStyle/>
+          <a:p>
+            <a:pPr indent="0" marL="0">
+              <a:lnSpc>
+                <a:spcPct val="125000"/>
+              </a:lnSpc>
+              <a:buNone/>
+            </a:pPr>
+            <a:r>
+              <a:rPr lang="en-US" sz="1150" dirty="0">
+                <a:solidFill>
+                  <a:srgbClr val="8A9AAD"/>
+                </a:solidFill>
+                <a:latin typeface="Meiryo" pitchFamily="34" charset="0"/>
+                <a:ea typeface="Meiryo" pitchFamily="34" charset="-122"/>
+                <a:cs typeface="Meiryo" pitchFamily="34" charset="-120"/>
+              </a:rPr>
+              <a:t>（いつ行われているかを記入）</a:t>
+            </a:r>
+            <a:endParaRPr lang="en-US" sz="1150" dirty="0"/>
+          </a:p>
+        </p:txBody>
+      </p:sp>
+      <p:sp>
+        <p:nvSpPr>
+          <p:cNvPr id="13" name="Shape 11"/>
           <p:cNvSpPr/>
           <p:nvPr/>
         </p:nvSpPr>
         <p:spPr>
           <a:xfrm>
-            <a:off x="740664" y="1865376"/>
-            <a:ext cx="329184" cy="329184"/>
-          </a:xfrm>
-          <a:prstGeom prst="ellipse">
-            <a:avLst/>
+            <a:off x="4288536" y="1536192"/>
+            <a:ext cx="3520440" cy="3529584"/>
+          </a:xfrm>
+          <a:prstGeom prst="roundRect">
+            <a:avLst>
+              <a:gd name="adj" fmla="val 1558"/>
+            </a:avLst>
+          </a:prstGeom>
+          <a:solidFill>
+            <a:srgbClr val="FFFFFF"/>
+          </a:solidFill>
+          <a:ln w="12700">
+            <a:solidFill>
+              <a:srgbClr val="D3DCE8"/>
+            </a:solidFill>
+            <a:prstDash val="solid"/>
+          </a:ln>
+        </p:spPr>
+      </p:sp>
+      <p:sp>
+        <p:nvSpPr>
+          <p:cNvPr id="14" name="Text 12"/>
+          <p:cNvSpPr txBox="1"/>
+          <p:nvPr/>
+        </p:nvSpPr>
+        <p:spPr>
+          <a:xfrm>
+            <a:off x="4544568" y="1700784"/>
+            <a:ext cx="3008376" cy="274320"/>
+          </a:xfrm>
+          <a:prstGeom prst="rect">
+            <a:avLst/>
+          </a:prstGeom>
+          <a:noFill/>
+          <a:ln/>
+        </p:spPr>
+        <p:txBody>
+          <a:bodyPr wrap="square" lIns="0" tIns="0" rIns="0" bIns="0" rtlCol="0" anchor="ctr"/>
+          <a:lstStyle/>
+          <a:p>
+            <a:pPr indent="0" marL="0">
+              <a:buNone/>
+            </a:pPr>
+            <a:r>
+              <a:rPr lang="en-US" sz="1150" b="1" dirty="0">
+                <a:solidFill>
+                  <a:srgbClr val="D9482F"/>
+                </a:solidFill>
+                <a:latin typeface="Meiryo" pitchFamily="34" charset="0"/>
+                <a:ea typeface="Meiryo" pitchFamily="34" charset="-122"/>
+                <a:cs typeface="Meiryo" pitchFamily="34" charset="-120"/>
+              </a:rPr>
+              <a:t>施策②</a:t>
+            </a:r>
+            <a:endParaRPr lang="en-US" sz="1150" dirty="0"/>
+          </a:p>
+        </p:txBody>
+      </p:sp>
+      <p:sp>
+        <p:nvSpPr>
+          <p:cNvPr id="15" name="Text 13"/>
+          <p:cNvSpPr txBox="1"/>
+          <p:nvPr/>
+        </p:nvSpPr>
+        <p:spPr>
+          <a:xfrm>
+            <a:off x="4544568" y="1993392"/>
+            <a:ext cx="3008376" cy="548640"/>
+          </a:xfrm>
+          <a:prstGeom prst="rect">
+            <a:avLst/>
+          </a:prstGeom>
+          <a:noFill/>
+          <a:ln/>
+        </p:spPr>
+        <p:txBody>
+          <a:bodyPr wrap="square" lIns="0" tIns="0" rIns="0" bIns="0" rtlCol="0" anchor="t"/>
+          <a:lstStyle/>
+          <a:p>
+            <a:pPr indent="0" marL="0">
+              <a:lnSpc>
+                <a:spcPct val="120000"/>
+              </a:lnSpc>
+              <a:buNone/>
+            </a:pPr>
+            <a:r>
+              <a:rPr lang="en-US" sz="1500" b="1" dirty="0">
+                <a:solidFill>
+                  <a:srgbClr val="8A9AAD"/>
+                </a:solidFill>
+                <a:latin typeface="Meiryo" pitchFamily="34" charset="0"/>
+                <a:ea typeface="Meiryo" pitchFamily="34" charset="-122"/>
+                <a:cs typeface="Meiryo" pitchFamily="34" charset="-120"/>
+              </a:rPr>
+              <a:t>（施策の名称を記入）</a:t>
+            </a:r>
+            <a:endParaRPr lang="en-US" sz="1500" dirty="0"/>
+          </a:p>
+        </p:txBody>
+      </p:sp>
+      <p:sp>
+        <p:nvSpPr>
+          <p:cNvPr id="16" name="Text 14"/>
+          <p:cNvSpPr txBox="1"/>
+          <p:nvPr/>
+        </p:nvSpPr>
+        <p:spPr>
+          <a:xfrm>
+            <a:off x="4544568" y="2670048"/>
+            <a:ext cx="3008376" cy="237744"/>
+          </a:xfrm>
+          <a:prstGeom prst="rect">
+            <a:avLst/>
+          </a:prstGeom>
+          <a:noFill/>
+          <a:ln/>
+        </p:spPr>
+        <p:txBody>
+          <a:bodyPr wrap="square" lIns="0" tIns="0" rIns="0" bIns="0" rtlCol="0" anchor="ctr"/>
+          <a:lstStyle/>
+          <a:p>
+            <a:pPr indent="0" marL="0">
+              <a:buNone/>
+            </a:pPr>
+            <a:r>
+              <a:rPr lang="en-US" sz="1100" b="1" dirty="0">
+                <a:solidFill>
+                  <a:srgbClr val="13294B"/>
+                </a:solidFill>
+                <a:latin typeface="Meiryo" pitchFamily="34" charset="0"/>
+                <a:ea typeface="Meiryo" pitchFamily="34" charset="-122"/>
+                <a:cs typeface="Meiryo" pitchFamily="34" charset="-120"/>
+              </a:rPr>
+              <a:t>内容</a:t>
+            </a:r>
+            <a:endParaRPr lang="en-US" sz="1100" dirty="0"/>
+          </a:p>
+        </p:txBody>
+      </p:sp>
+      <p:sp>
+        <p:nvSpPr>
+          <p:cNvPr id="17" name="Text 15"/>
+          <p:cNvSpPr txBox="1"/>
+          <p:nvPr/>
+        </p:nvSpPr>
+        <p:spPr>
+          <a:xfrm>
+            <a:off x="4544568" y="2907792"/>
+            <a:ext cx="3008376" cy="475488"/>
+          </a:xfrm>
+          <a:prstGeom prst="rect">
+            <a:avLst/>
+          </a:prstGeom>
+          <a:noFill/>
+          <a:ln/>
+        </p:spPr>
+        <p:txBody>
+          <a:bodyPr wrap="square" lIns="0" tIns="0" rIns="0" bIns="0" rtlCol="0" anchor="t"/>
+          <a:lstStyle/>
+          <a:p>
+            <a:pPr indent="0" marL="0">
+              <a:lnSpc>
+                <a:spcPct val="125000"/>
+              </a:lnSpc>
+              <a:buNone/>
+            </a:pPr>
+            <a:r>
+              <a:rPr lang="en-US" sz="1150" dirty="0">
+                <a:solidFill>
+                  <a:srgbClr val="8A9AAD"/>
+                </a:solidFill>
+                <a:latin typeface="Meiryo" pitchFamily="34" charset="0"/>
+                <a:ea typeface="Meiryo" pitchFamily="34" charset="-122"/>
+                <a:cs typeface="Meiryo" pitchFamily="34" charset="-120"/>
+              </a:rPr>
+              <a:t>（どのような取り組みかを記入）</a:t>
+            </a:r>
+            <a:endParaRPr lang="en-US" sz="1150" dirty="0"/>
+          </a:p>
+        </p:txBody>
+      </p:sp>
+      <p:sp>
+        <p:nvSpPr>
+          <p:cNvPr id="18" name="Text 16"/>
+          <p:cNvSpPr txBox="1"/>
+          <p:nvPr/>
+        </p:nvSpPr>
+        <p:spPr>
+          <a:xfrm>
+            <a:off x="4544568" y="3438144"/>
+            <a:ext cx="3008376" cy="237744"/>
+          </a:xfrm>
+          <a:prstGeom prst="rect">
+            <a:avLst/>
+          </a:prstGeom>
+          <a:noFill/>
+          <a:ln/>
+        </p:spPr>
+        <p:txBody>
+          <a:bodyPr wrap="square" lIns="0" tIns="0" rIns="0" bIns="0" rtlCol="0" anchor="ctr"/>
+          <a:lstStyle/>
+          <a:p>
+            <a:pPr indent="0" marL="0">
+              <a:buNone/>
+            </a:pPr>
+            <a:r>
+              <a:rPr lang="en-US" sz="1100" b="1" dirty="0">
+                <a:solidFill>
+                  <a:srgbClr val="13294B"/>
+                </a:solidFill>
+                <a:latin typeface="Meiryo" pitchFamily="34" charset="0"/>
+                <a:ea typeface="Meiryo" pitchFamily="34" charset="-122"/>
+                <a:cs typeface="Meiryo" pitchFamily="34" charset="-120"/>
+              </a:rPr>
+              <a:t>ねらい</a:t>
+            </a:r>
+            <a:endParaRPr lang="en-US" sz="1100" dirty="0"/>
+          </a:p>
+        </p:txBody>
+      </p:sp>
+      <p:sp>
+        <p:nvSpPr>
+          <p:cNvPr id="19" name="Text 17"/>
+          <p:cNvSpPr txBox="1"/>
+          <p:nvPr/>
+        </p:nvSpPr>
+        <p:spPr>
+          <a:xfrm>
+            <a:off x="4544568" y="3675888"/>
+            <a:ext cx="3008376" cy="475488"/>
+          </a:xfrm>
+          <a:prstGeom prst="rect">
+            <a:avLst/>
+          </a:prstGeom>
+          <a:noFill/>
+          <a:ln/>
+        </p:spPr>
+        <p:txBody>
+          <a:bodyPr wrap="square" lIns="0" tIns="0" rIns="0" bIns="0" rtlCol="0" anchor="t"/>
+          <a:lstStyle/>
+          <a:p>
+            <a:pPr indent="0" marL="0">
+              <a:lnSpc>
+                <a:spcPct val="125000"/>
+              </a:lnSpc>
+              <a:buNone/>
+            </a:pPr>
+            <a:r>
+              <a:rPr lang="en-US" sz="1150" dirty="0">
+                <a:solidFill>
+                  <a:srgbClr val="8A9AAD"/>
+                </a:solidFill>
+                <a:latin typeface="Meiryo" pitchFamily="34" charset="0"/>
+                <a:ea typeface="Meiryo" pitchFamily="34" charset="-122"/>
+                <a:cs typeface="Meiryo" pitchFamily="34" charset="-120"/>
+              </a:rPr>
+              <a:t>（何を増やしたいのかを記入）</a:t>
+            </a:r>
+            <a:endParaRPr lang="en-US" sz="1150" dirty="0"/>
+          </a:p>
+        </p:txBody>
+      </p:sp>
+      <p:sp>
+        <p:nvSpPr>
+          <p:cNvPr id="20" name="Text 18"/>
+          <p:cNvSpPr txBox="1"/>
+          <p:nvPr/>
+        </p:nvSpPr>
+        <p:spPr>
+          <a:xfrm>
+            <a:off x="4544568" y="4206240"/>
+            <a:ext cx="3008376" cy="237744"/>
+          </a:xfrm>
+          <a:prstGeom prst="rect">
+            <a:avLst/>
+          </a:prstGeom>
+          <a:noFill/>
+          <a:ln/>
+        </p:spPr>
+        <p:txBody>
+          <a:bodyPr wrap="square" lIns="0" tIns="0" rIns="0" bIns="0" rtlCol="0" anchor="ctr"/>
+          <a:lstStyle/>
+          <a:p>
+            <a:pPr indent="0" marL="0">
+              <a:buNone/>
+            </a:pPr>
+            <a:r>
+              <a:rPr lang="en-US" sz="1100" b="1" dirty="0">
+                <a:solidFill>
+                  <a:srgbClr val="13294B"/>
+                </a:solidFill>
+                <a:latin typeface="Meiryo" pitchFamily="34" charset="0"/>
+                <a:ea typeface="Meiryo" pitchFamily="34" charset="-122"/>
+                <a:cs typeface="Meiryo" pitchFamily="34" charset="-120"/>
+              </a:rPr>
+              <a:t>実施時期</a:t>
+            </a:r>
+            <a:endParaRPr lang="en-US" sz="1100" dirty="0"/>
+          </a:p>
+        </p:txBody>
+      </p:sp>
+      <p:sp>
+        <p:nvSpPr>
+          <p:cNvPr id="21" name="Text 19"/>
+          <p:cNvSpPr txBox="1"/>
+          <p:nvPr/>
+        </p:nvSpPr>
+        <p:spPr>
+          <a:xfrm>
+            <a:off x="4544568" y="4443984"/>
+            <a:ext cx="3008376" cy="475488"/>
+          </a:xfrm>
+          <a:prstGeom prst="rect">
+            <a:avLst/>
+          </a:prstGeom>
+          <a:noFill/>
+          <a:ln/>
+        </p:spPr>
+        <p:txBody>
+          <a:bodyPr wrap="square" lIns="0" tIns="0" rIns="0" bIns="0" rtlCol="0" anchor="t"/>
+          <a:lstStyle/>
+          <a:p>
+            <a:pPr indent="0" marL="0">
+              <a:lnSpc>
+                <a:spcPct val="125000"/>
+              </a:lnSpc>
+              <a:buNone/>
+            </a:pPr>
+            <a:r>
+              <a:rPr lang="en-US" sz="1150" dirty="0">
+                <a:solidFill>
+                  <a:srgbClr val="8A9AAD"/>
+                </a:solidFill>
+                <a:latin typeface="Meiryo" pitchFamily="34" charset="0"/>
+                <a:ea typeface="Meiryo" pitchFamily="34" charset="-122"/>
+                <a:cs typeface="Meiryo" pitchFamily="34" charset="-120"/>
+              </a:rPr>
+              <a:t>（いつ行われているかを記入）</a:t>
+            </a:r>
+            <a:endParaRPr lang="en-US" sz="1150" dirty="0"/>
+          </a:p>
+        </p:txBody>
+      </p:sp>
+      <p:sp>
+        <p:nvSpPr>
+          <p:cNvPr id="22" name="Shape 20"/>
+          <p:cNvSpPr/>
+          <p:nvPr/>
+        </p:nvSpPr>
+        <p:spPr>
+          <a:xfrm>
+            <a:off x="8074152" y="1536192"/>
+            <a:ext cx="3520440" cy="3529584"/>
+          </a:xfrm>
+          <a:prstGeom prst="roundRect">
+            <a:avLst>
+              <a:gd name="adj" fmla="val 1558"/>
+            </a:avLst>
+          </a:prstGeom>
+          <a:solidFill>
+            <a:srgbClr val="FFFFFF"/>
+          </a:solidFill>
+          <a:ln w="12700">
+            <a:solidFill>
+              <a:srgbClr val="D3DCE8"/>
+            </a:solidFill>
+            <a:prstDash val="solid"/>
+          </a:ln>
+        </p:spPr>
+      </p:sp>
+      <p:sp>
+        <p:nvSpPr>
+          <p:cNvPr id="23" name="Text 21"/>
+          <p:cNvSpPr txBox="1"/>
+          <p:nvPr/>
+        </p:nvSpPr>
+        <p:spPr>
+          <a:xfrm>
+            <a:off x="8330184" y="1700784"/>
+            <a:ext cx="3008376" cy="274320"/>
+          </a:xfrm>
+          <a:prstGeom prst="rect">
+            <a:avLst/>
+          </a:prstGeom>
+          <a:noFill/>
+          <a:ln/>
+        </p:spPr>
+        <p:txBody>
+          <a:bodyPr wrap="square" lIns="0" tIns="0" rIns="0" bIns="0" rtlCol="0" anchor="ctr"/>
+          <a:lstStyle/>
+          <a:p>
+            <a:pPr indent="0" marL="0">
+              <a:buNone/>
+            </a:pPr>
+            <a:r>
+              <a:rPr lang="en-US" sz="1150" b="1" dirty="0">
+                <a:solidFill>
+                  <a:srgbClr val="D9482F"/>
+                </a:solidFill>
+                <a:latin typeface="Meiryo" pitchFamily="34" charset="0"/>
+                <a:ea typeface="Meiryo" pitchFamily="34" charset="-122"/>
+                <a:cs typeface="Meiryo" pitchFamily="34" charset="-120"/>
+              </a:rPr>
+              <a:t>施策③</a:t>
+            </a:r>
+            <a:endParaRPr lang="en-US" sz="1150" dirty="0"/>
+          </a:p>
+        </p:txBody>
+      </p:sp>
+      <p:sp>
+        <p:nvSpPr>
+          <p:cNvPr id="24" name="Text 22"/>
+          <p:cNvSpPr txBox="1"/>
+          <p:nvPr/>
+        </p:nvSpPr>
+        <p:spPr>
+          <a:xfrm>
+            <a:off x="8330184" y="1993392"/>
+            <a:ext cx="3008376" cy="548640"/>
+          </a:xfrm>
+          <a:prstGeom prst="rect">
+            <a:avLst/>
+          </a:prstGeom>
+          <a:noFill/>
+          <a:ln/>
+        </p:spPr>
+        <p:txBody>
+          <a:bodyPr wrap="square" lIns="0" tIns="0" rIns="0" bIns="0" rtlCol="0" anchor="t"/>
+          <a:lstStyle/>
+          <a:p>
+            <a:pPr indent="0" marL="0">
+              <a:lnSpc>
+                <a:spcPct val="120000"/>
+              </a:lnSpc>
+              <a:buNone/>
+            </a:pPr>
+            <a:r>
+              <a:rPr lang="en-US" sz="1500" b="1" dirty="0">
+                <a:solidFill>
+                  <a:srgbClr val="8A9AAD"/>
+                </a:solidFill>
+                <a:latin typeface="Meiryo" pitchFamily="34" charset="0"/>
+                <a:ea typeface="Meiryo" pitchFamily="34" charset="-122"/>
+                <a:cs typeface="Meiryo" pitchFamily="34" charset="-120"/>
+              </a:rPr>
+              <a:t>（施策の名称を記入）</a:t>
+            </a:r>
+            <a:endParaRPr lang="en-US" sz="1500" dirty="0"/>
+          </a:p>
+        </p:txBody>
+      </p:sp>
+      <p:sp>
+        <p:nvSpPr>
+          <p:cNvPr id="25" name="Text 23"/>
+          <p:cNvSpPr txBox="1"/>
+          <p:nvPr/>
+        </p:nvSpPr>
+        <p:spPr>
+          <a:xfrm>
+            <a:off x="8330184" y="2670048"/>
+            <a:ext cx="3008376" cy="237744"/>
+          </a:xfrm>
+          <a:prstGeom prst="rect">
+            <a:avLst/>
+          </a:prstGeom>
+          <a:noFill/>
+          <a:ln/>
+        </p:spPr>
+        <p:txBody>
+          <a:bodyPr wrap="square" lIns="0" tIns="0" rIns="0" bIns="0" rtlCol="0" anchor="ctr"/>
+          <a:lstStyle/>
+          <a:p>
+            <a:pPr indent="0" marL="0">
+              <a:buNone/>
+            </a:pPr>
+            <a:r>
+              <a:rPr lang="en-US" sz="1100" b="1" dirty="0">
+                <a:solidFill>
+                  <a:srgbClr val="13294B"/>
+                </a:solidFill>
+                <a:latin typeface="Meiryo" pitchFamily="34" charset="0"/>
+                <a:ea typeface="Meiryo" pitchFamily="34" charset="-122"/>
+                <a:cs typeface="Meiryo" pitchFamily="34" charset="-120"/>
+              </a:rPr>
+              <a:t>内容</a:t>
+            </a:r>
+            <a:endParaRPr lang="en-US" sz="1100" dirty="0"/>
+          </a:p>
+        </p:txBody>
+      </p:sp>
+      <p:sp>
+        <p:nvSpPr>
+          <p:cNvPr id="26" name="Text 24"/>
+          <p:cNvSpPr txBox="1"/>
+          <p:nvPr/>
+        </p:nvSpPr>
+        <p:spPr>
+          <a:xfrm>
+            <a:off x="8330184" y="2907792"/>
+            <a:ext cx="3008376" cy="475488"/>
+          </a:xfrm>
+          <a:prstGeom prst="rect">
+            <a:avLst/>
+          </a:prstGeom>
+          <a:noFill/>
+          <a:ln/>
+        </p:spPr>
+        <p:txBody>
+          <a:bodyPr wrap="square" lIns="0" tIns="0" rIns="0" bIns="0" rtlCol="0" anchor="t"/>
+          <a:lstStyle/>
+          <a:p>
+            <a:pPr indent="0" marL="0">
+              <a:lnSpc>
+                <a:spcPct val="125000"/>
+              </a:lnSpc>
+              <a:buNone/>
+            </a:pPr>
+            <a:r>
+              <a:rPr lang="en-US" sz="1150" dirty="0">
+                <a:solidFill>
+                  <a:srgbClr val="8A9AAD"/>
+                </a:solidFill>
+                <a:latin typeface="Meiryo" pitchFamily="34" charset="0"/>
+                <a:ea typeface="Meiryo" pitchFamily="34" charset="-122"/>
+                <a:cs typeface="Meiryo" pitchFamily="34" charset="-120"/>
+              </a:rPr>
+              <a:t>（どのような取り組みかを記入）</a:t>
+            </a:r>
+            <a:endParaRPr lang="en-US" sz="1150" dirty="0"/>
+          </a:p>
+        </p:txBody>
+      </p:sp>
+      <p:sp>
+        <p:nvSpPr>
+          <p:cNvPr id="27" name="Text 25"/>
+          <p:cNvSpPr txBox="1"/>
+          <p:nvPr/>
+        </p:nvSpPr>
+        <p:spPr>
+          <a:xfrm>
+            <a:off x="8330184" y="3438144"/>
+            <a:ext cx="3008376" cy="237744"/>
+          </a:xfrm>
+          <a:prstGeom prst="rect">
+            <a:avLst/>
+          </a:prstGeom>
+          <a:noFill/>
+          <a:ln/>
+        </p:spPr>
+        <p:txBody>
+          <a:bodyPr wrap="square" lIns="0" tIns="0" rIns="0" bIns="0" rtlCol="0" anchor="ctr"/>
+          <a:lstStyle/>
+          <a:p>
+            <a:pPr indent="0" marL="0">
+              <a:buNone/>
+            </a:pPr>
+            <a:r>
+              <a:rPr lang="en-US" sz="1100" b="1" dirty="0">
+                <a:solidFill>
+                  <a:srgbClr val="13294B"/>
+                </a:solidFill>
+                <a:latin typeface="Meiryo" pitchFamily="34" charset="0"/>
+                <a:ea typeface="Meiryo" pitchFamily="34" charset="-122"/>
+                <a:cs typeface="Meiryo" pitchFamily="34" charset="-120"/>
+              </a:rPr>
+              <a:t>ねらい</a:t>
+            </a:r>
+            <a:endParaRPr lang="en-US" sz="1100" dirty="0"/>
+          </a:p>
+        </p:txBody>
+      </p:sp>
+      <p:sp>
+        <p:nvSpPr>
+          <p:cNvPr id="28" name="Text 26"/>
+          <p:cNvSpPr txBox="1"/>
+          <p:nvPr/>
+        </p:nvSpPr>
+        <p:spPr>
+          <a:xfrm>
+            <a:off x="8330184" y="3675888"/>
+            <a:ext cx="3008376" cy="475488"/>
+          </a:xfrm>
+          <a:prstGeom prst="rect">
+            <a:avLst/>
+          </a:prstGeom>
+          <a:noFill/>
+          <a:ln/>
+        </p:spPr>
+        <p:txBody>
+          <a:bodyPr wrap="square" lIns="0" tIns="0" rIns="0" bIns="0" rtlCol="0" anchor="t"/>
+          <a:lstStyle/>
+          <a:p>
+            <a:pPr indent="0" marL="0">
+              <a:lnSpc>
+                <a:spcPct val="125000"/>
+              </a:lnSpc>
+              <a:buNone/>
+            </a:pPr>
+            <a:r>
+              <a:rPr lang="en-US" sz="1150" dirty="0">
+                <a:solidFill>
+                  <a:srgbClr val="8A9AAD"/>
+                </a:solidFill>
+                <a:latin typeface="Meiryo" pitchFamily="34" charset="0"/>
+                <a:ea typeface="Meiryo" pitchFamily="34" charset="-122"/>
+                <a:cs typeface="Meiryo" pitchFamily="34" charset="-120"/>
+              </a:rPr>
+              <a:t>（何を増やしたいのかを記入）</a:t>
+            </a:r>
+            <a:endParaRPr lang="en-US" sz="1150" dirty="0"/>
+          </a:p>
+        </p:txBody>
+      </p:sp>
+      <p:sp>
+        <p:nvSpPr>
+          <p:cNvPr id="29" name="Text 27"/>
+          <p:cNvSpPr txBox="1"/>
+          <p:nvPr/>
+        </p:nvSpPr>
+        <p:spPr>
+          <a:xfrm>
+            <a:off x="8330184" y="4206240"/>
+            <a:ext cx="3008376" cy="237744"/>
+          </a:xfrm>
+          <a:prstGeom prst="rect">
+            <a:avLst/>
+          </a:prstGeom>
+          <a:noFill/>
+          <a:ln/>
+        </p:spPr>
+        <p:txBody>
+          <a:bodyPr wrap="square" lIns="0" tIns="0" rIns="0" bIns="0" rtlCol="0" anchor="ctr"/>
+          <a:lstStyle/>
+          <a:p>
+            <a:pPr indent="0" marL="0">
+              <a:buNone/>
+            </a:pPr>
+            <a:r>
+              <a:rPr lang="en-US" sz="1100" b="1" dirty="0">
+                <a:solidFill>
+                  <a:srgbClr val="13294B"/>
+                </a:solidFill>
+                <a:latin typeface="Meiryo" pitchFamily="34" charset="0"/>
+                <a:ea typeface="Meiryo" pitchFamily="34" charset="-122"/>
+                <a:cs typeface="Meiryo" pitchFamily="34" charset="-120"/>
+              </a:rPr>
+              <a:t>実施時期</a:t>
+            </a:r>
+            <a:endParaRPr lang="en-US" sz="1100" dirty="0"/>
+          </a:p>
+        </p:txBody>
+      </p:sp>
+      <p:sp>
+        <p:nvSpPr>
+          <p:cNvPr id="30" name="Text 28"/>
+          <p:cNvSpPr txBox="1"/>
+          <p:nvPr/>
+        </p:nvSpPr>
+        <p:spPr>
+          <a:xfrm>
+            <a:off x="8330184" y="4443984"/>
+            <a:ext cx="3008376" cy="475488"/>
+          </a:xfrm>
+          <a:prstGeom prst="rect">
+            <a:avLst/>
+          </a:prstGeom>
+          <a:noFill/>
+          <a:ln/>
+        </p:spPr>
+        <p:txBody>
+          <a:bodyPr wrap="square" lIns="0" tIns="0" rIns="0" bIns="0" rtlCol="0" anchor="t"/>
+          <a:lstStyle/>
+          <a:p>
+            <a:pPr indent="0" marL="0">
+              <a:lnSpc>
+                <a:spcPct val="125000"/>
+              </a:lnSpc>
+              <a:buNone/>
+            </a:pPr>
+            <a:r>
+              <a:rPr lang="en-US" sz="1150" dirty="0">
+                <a:solidFill>
+                  <a:srgbClr val="8A9AAD"/>
+                </a:solidFill>
+                <a:latin typeface="Meiryo" pitchFamily="34" charset="0"/>
+                <a:ea typeface="Meiryo" pitchFamily="34" charset="-122"/>
+                <a:cs typeface="Meiryo" pitchFamily="34" charset="-120"/>
+              </a:rPr>
+              <a:t>（いつ行われているかを記入）</a:t>
+            </a:r>
+            <a:endParaRPr lang="en-US" sz="1150" dirty="0"/>
+          </a:p>
+        </p:txBody>
+      </p:sp>
+      <p:sp>
+        <p:nvSpPr>
+          <p:cNvPr id="31" name="Shape 29"/>
+          <p:cNvSpPr/>
+          <p:nvPr/>
+        </p:nvSpPr>
+        <p:spPr>
+          <a:xfrm>
+            <a:off x="502920" y="5285232"/>
+            <a:ext cx="11183112" cy="603504"/>
+          </a:xfrm>
+          <a:prstGeom prst="roundRect">
+            <a:avLst>
+              <a:gd name="adj" fmla="val 9091"/>
+            </a:avLst>
           </a:prstGeom>
           <a:solidFill>
             <a:srgbClr val="13294B"/>
@@ -2674,14 +3946,14 @@
       </p:sp>
       <p:sp>
         <p:nvSpPr>
-          <p:cNvPr id="6" name="Text 4"/>
-          <p:cNvSpPr txBox="1"/>
-          <p:nvPr/>
-        </p:nvSpPr>
-        <p:spPr>
-          <a:xfrm>
-            <a:off x="740664" y="1865376"/>
-            <a:ext cx="329184" cy="329184"/>
+          <p:cNvPr id="32" name="Text 30"/>
+          <p:cNvSpPr txBox="1"/>
+          <p:nvPr/>
+        </p:nvSpPr>
+        <p:spPr>
+          <a:xfrm>
+            <a:off x="758952" y="5285232"/>
+            <a:ext cx="10671048" cy="603504"/>
           </a:xfrm>
           <a:prstGeom prst="rect">
             <a:avLst/>
@@ -2697,7 +3969,7 @@
               <a:buNone/>
             </a:pPr>
             <a:r>
-              <a:rPr lang="en-US" sz="1300" b="1" dirty="0">
+              <a:rPr lang="en-US" sz="1350" b="1" dirty="0">
                 <a:solidFill>
                   <a:srgbClr val="FFFFFF"/>
                 </a:solidFill>
@@ -2705,506 +3977,7 @@
                 <a:ea typeface="Meiryo" pitchFamily="34" charset="-122"/>
                 <a:cs typeface="Meiryo" pitchFamily="34" charset="-120"/>
               </a:rPr>
-              <a:t>1</a:t>
-            </a:r>
-            <a:endParaRPr lang="en-US" sz="1300" dirty="0"/>
-          </a:p>
-        </p:txBody>
-      </p:sp>
-      <p:sp>
-        <p:nvSpPr>
-          <p:cNvPr id="7" name="Text 5"/>
-          <p:cNvSpPr txBox="1"/>
-          <p:nvPr/>
-        </p:nvSpPr>
-        <p:spPr>
-          <a:xfrm>
-            <a:off x="1197864" y="1810512"/>
-            <a:ext cx="4526280" cy="1115568"/>
-          </a:xfrm>
-          <a:prstGeom prst="rect">
-            <a:avLst/>
-          </a:prstGeom>
-          <a:noFill/>
-          <a:ln/>
-        </p:spPr>
-        <p:txBody>
-          <a:bodyPr wrap="square" lIns="0" tIns="0" rIns="0" bIns="0" rtlCol="0" anchor="ctr"/>
-          <a:lstStyle/>
-          <a:p>
-            <a:pPr indent="0" marL="0">
-              <a:lnSpc>
-                <a:spcPct val="132000"/>
-              </a:lnSpc>
-              <a:buNone/>
-            </a:pPr>
-            <a:r>
-              <a:rPr lang="en-US" sz="1250" dirty="0">
-                <a:solidFill>
-                  <a:srgbClr val="1E2A38"/>
-                </a:solidFill>
-                <a:latin typeface="Meiryo" pitchFamily="34" charset="0"/>
-                <a:ea typeface="Meiryo" pitchFamily="34" charset="-122"/>
-                <a:cs typeface="Meiryo" pitchFamily="34" charset="-120"/>
-              </a:rPr>
-              <a:t>まず思いついたのは「IBの利用件数を数える」こと。</a:t>
-            </a:r>
-            <a:endParaRPr lang="en-US" sz="1250" dirty="0"/>
-          </a:p>
-          <a:p>
-            <a:pPr indent="0" marL="0">
-              <a:lnSpc>
-                <a:spcPct val="132000"/>
-              </a:lnSpc>
-              <a:buNone/>
-            </a:pPr>
-            <a:r>
-              <a:rPr lang="en-US" sz="1250" dirty="0">
-                <a:solidFill>
-                  <a:srgbClr val="1E2A38"/>
-                </a:solidFill>
-                <a:latin typeface="Meiryo" pitchFamily="34" charset="0"/>
-                <a:ea typeface="Meiryo" pitchFamily="34" charset="-122"/>
-                <a:cs typeface="Meiryo" pitchFamily="34" charset="-120"/>
-              </a:rPr>
-              <a:t>しかし取引全体が増えれば件数も増えるため、それだけでは「普及した」とは言い切れない。</a:t>
-            </a:r>
-            <a:endParaRPr lang="en-US" sz="1250" dirty="0"/>
-          </a:p>
-        </p:txBody>
-      </p:sp>
-      <p:sp>
-        <p:nvSpPr>
-          <p:cNvPr id="8" name="Shape 6"/>
-          <p:cNvSpPr/>
-          <p:nvPr/>
-        </p:nvSpPr>
-        <p:spPr>
-          <a:xfrm>
-            <a:off x="502920" y="3291840"/>
-            <a:ext cx="5486400" cy="1207008"/>
-          </a:xfrm>
-          <a:prstGeom prst="roundRect">
-            <a:avLst>
-              <a:gd name="adj" fmla="val 4545"/>
-            </a:avLst>
-          </a:prstGeom>
-          <a:solidFill>
-            <a:srgbClr val="EEF2F8"/>
-          </a:solidFill>
-          <a:ln w="6350">
-            <a:solidFill>
-              <a:srgbClr val="EEF2F8"/>
-            </a:solidFill>
-            <a:prstDash val="solid"/>
-          </a:ln>
-        </p:spPr>
-      </p:sp>
-      <p:sp>
-        <p:nvSpPr>
-          <p:cNvPr id="9" name="Shape 7"/>
-          <p:cNvSpPr/>
-          <p:nvPr/>
-        </p:nvSpPr>
-        <p:spPr>
-          <a:xfrm>
-            <a:off x="740664" y="3529584"/>
-            <a:ext cx="329184" cy="329184"/>
-          </a:xfrm>
-          <a:prstGeom prst="ellipse">
-            <a:avLst/>
-          </a:prstGeom>
-          <a:solidFill>
-            <a:srgbClr val="13294B"/>
-          </a:solidFill>
-          <a:ln w="6350">
-            <a:solidFill>
-              <a:srgbClr val="13294B"/>
-            </a:solidFill>
-            <a:prstDash val="solid"/>
-          </a:ln>
-        </p:spPr>
-      </p:sp>
-      <p:sp>
-        <p:nvSpPr>
-          <p:cNvPr id="10" name="Text 8"/>
-          <p:cNvSpPr txBox="1"/>
-          <p:nvPr/>
-        </p:nvSpPr>
-        <p:spPr>
-          <a:xfrm>
-            <a:off x="740664" y="3529584"/>
-            <a:ext cx="329184" cy="329184"/>
-          </a:xfrm>
-          <a:prstGeom prst="rect">
-            <a:avLst/>
-          </a:prstGeom>
-          <a:noFill/>
-          <a:ln/>
-        </p:spPr>
-        <p:txBody>
-          <a:bodyPr wrap="square" lIns="0" tIns="0" rIns="0" bIns="0" rtlCol="0" anchor="ctr"/>
-          <a:lstStyle/>
-          <a:p>
-            <a:pPr algn="ctr" indent="0" marL="0">
-              <a:buNone/>
-            </a:pPr>
-            <a:r>
-              <a:rPr lang="en-US" sz="1300" b="1" dirty="0">
-                <a:solidFill>
-                  <a:srgbClr val="FFFFFF"/>
-                </a:solidFill>
-                <a:latin typeface="Meiryo" pitchFamily="34" charset="0"/>
-                <a:ea typeface="Meiryo" pitchFamily="34" charset="-122"/>
-                <a:cs typeface="Meiryo" pitchFamily="34" charset="-120"/>
-              </a:rPr>
-              <a:t>2</a:t>
-            </a:r>
-            <a:endParaRPr lang="en-US" sz="1300" dirty="0"/>
-          </a:p>
-        </p:txBody>
-      </p:sp>
-      <p:sp>
-        <p:nvSpPr>
-          <p:cNvPr id="11" name="Text 9"/>
-          <p:cNvSpPr txBox="1"/>
-          <p:nvPr/>
-        </p:nvSpPr>
-        <p:spPr>
-          <a:xfrm>
-            <a:off x="1197864" y="3474720"/>
-            <a:ext cx="4526280" cy="841248"/>
-          </a:xfrm>
-          <a:prstGeom prst="rect">
-            <a:avLst/>
-          </a:prstGeom>
-          <a:noFill/>
-          <a:ln/>
-        </p:spPr>
-        <p:txBody>
-          <a:bodyPr wrap="square" lIns="0" tIns="0" rIns="0" bIns="0" rtlCol="0" anchor="ctr"/>
-          <a:lstStyle/>
-          <a:p>
-            <a:pPr indent="0" marL="0">
-              <a:lnSpc>
-                <a:spcPct val="132000"/>
-              </a:lnSpc>
-              <a:buNone/>
-            </a:pPr>
-            <a:r>
-              <a:rPr lang="en-US" sz="1250" dirty="0">
-                <a:solidFill>
-                  <a:srgbClr val="1E2A38"/>
-                </a:solidFill>
-                <a:latin typeface="Meiryo" pitchFamily="34" charset="0"/>
-                <a:ea typeface="Meiryo" pitchFamily="34" charset="-122"/>
-                <a:cs typeface="Meiryo" pitchFamily="34" charset="-120"/>
-              </a:rPr>
-              <a:t>IBの普及とは「IBでも行える取引が、IBで行われるようになること」ではないか。</a:t>
-            </a:r>
-            <a:endParaRPr lang="en-US" sz="1250" dirty="0"/>
-          </a:p>
-        </p:txBody>
-      </p:sp>
-      <p:sp>
-        <p:nvSpPr>
-          <p:cNvPr id="12" name="Shape 10"/>
-          <p:cNvSpPr/>
-          <p:nvPr/>
-        </p:nvSpPr>
-        <p:spPr>
-          <a:xfrm>
-            <a:off x="502920" y="4681728"/>
-            <a:ext cx="5486400" cy="1207008"/>
-          </a:xfrm>
-          <a:prstGeom prst="roundRect">
-            <a:avLst>
-              <a:gd name="adj" fmla="val 4545"/>
-            </a:avLst>
-          </a:prstGeom>
-          <a:solidFill>
-            <a:srgbClr val="FBEAE4"/>
-          </a:solidFill>
-          <a:ln w="6350">
-            <a:solidFill>
-              <a:srgbClr val="FBEAE4"/>
-            </a:solidFill>
-            <a:prstDash val="solid"/>
-          </a:ln>
-        </p:spPr>
-      </p:sp>
-      <p:sp>
-        <p:nvSpPr>
-          <p:cNvPr id="13" name="Shape 11"/>
-          <p:cNvSpPr/>
-          <p:nvPr/>
-        </p:nvSpPr>
-        <p:spPr>
-          <a:xfrm>
-            <a:off x="740664" y="4919472"/>
-            <a:ext cx="329184" cy="329184"/>
-          </a:xfrm>
-          <a:prstGeom prst="ellipse">
-            <a:avLst/>
-          </a:prstGeom>
-          <a:solidFill>
-            <a:srgbClr val="D9482F"/>
-          </a:solidFill>
-          <a:ln w="6350">
-            <a:solidFill>
-              <a:srgbClr val="D9482F"/>
-            </a:solidFill>
-            <a:prstDash val="solid"/>
-          </a:ln>
-        </p:spPr>
-      </p:sp>
-      <p:sp>
-        <p:nvSpPr>
-          <p:cNvPr id="14" name="Text 12"/>
-          <p:cNvSpPr txBox="1"/>
-          <p:nvPr/>
-        </p:nvSpPr>
-        <p:spPr>
-          <a:xfrm>
-            <a:off x="740664" y="4919472"/>
-            <a:ext cx="329184" cy="329184"/>
-          </a:xfrm>
-          <a:prstGeom prst="rect">
-            <a:avLst/>
-          </a:prstGeom>
-          <a:noFill/>
-          <a:ln/>
-        </p:spPr>
-        <p:txBody>
-          <a:bodyPr wrap="square" lIns="0" tIns="0" rIns="0" bIns="0" rtlCol="0" anchor="ctr"/>
-          <a:lstStyle/>
-          <a:p>
-            <a:pPr algn="ctr" indent="0" marL="0">
-              <a:buNone/>
-            </a:pPr>
-            <a:r>
-              <a:rPr lang="en-US" sz="1300" b="1" dirty="0">
-                <a:solidFill>
-                  <a:srgbClr val="FFFFFF"/>
-                </a:solidFill>
-                <a:latin typeface="Meiryo" pitchFamily="34" charset="0"/>
-                <a:ea typeface="Meiryo" pitchFamily="34" charset="-122"/>
-                <a:cs typeface="Meiryo" pitchFamily="34" charset="-120"/>
-              </a:rPr>
-              <a:t>3</a:t>
-            </a:r>
-            <a:endParaRPr lang="en-US" sz="1300" dirty="0"/>
-          </a:p>
-        </p:txBody>
-      </p:sp>
-      <p:sp>
-        <p:nvSpPr>
-          <p:cNvPr id="15" name="Text 13"/>
-          <p:cNvSpPr txBox="1"/>
-          <p:nvPr/>
-        </p:nvSpPr>
-        <p:spPr>
-          <a:xfrm>
-            <a:off x="1197864" y="4864608"/>
-            <a:ext cx="4526280" cy="841248"/>
-          </a:xfrm>
-          <a:prstGeom prst="rect">
-            <a:avLst/>
-          </a:prstGeom>
-          <a:noFill/>
-          <a:ln/>
-        </p:spPr>
-        <p:txBody>
-          <a:bodyPr wrap="square" lIns="0" tIns="0" rIns="0" bIns="0" rtlCol="0" anchor="ctr"/>
-          <a:lstStyle/>
-          <a:p>
-            <a:pPr indent="0" marL="0">
-              <a:lnSpc>
-                <a:spcPct val="132000"/>
-              </a:lnSpc>
-              <a:buNone/>
-            </a:pPr>
-            <a:r>
-              <a:rPr lang="en-US" sz="1250" dirty="0">
-                <a:solidFill>
-                  <a:srgbClr val="1E2A38"/>
-                </a:solidFill>
-                <a:latin typeface="Meiryo" pitchFamily="34" charset="0"/>
-                <a:ea typeface="Meiryo" pitchFamily="34" charset="-122"/>
-                <a:cs typeface="Meiryo" pitchFamily="34" charset="-120"/>
-              </a:rPr>
-              <a:t>そこで、IBで行われた取引と、ATMで行われた取引のうちIBでも代替できるもの（振込・振替など）を比較することにした。</a:t>
-            </a:r>
-            <a:endParaRPr lang="en-US" sz="1250" dirty="0"/>
-          </a:p>
-        </p:txBody>
-      </p:sp>
-      <p:sp>
-        <p:nvSpPr>
-          <p:cNvPr id="16" name="Text 14"/>
-          <p:cNvSpPr txBox="1"/>
-          <p:nvPr/>
-        </p:nvSpPr>
-        <p:spPr>
-          <a:xfrm>
-            <a:off x="6355080" y="1591056"/>
-            <a:ext cx="5330952" cy="292608"/>
-          </a:xfrm>
-          <a:prstGeom prst="rect">
-            <a:avLst/>
-          </a:prstGeom>
-          <a:noFill/>
-          <a:ln/>
-        </p:spPr>
-        <p:txBody>
-          <a:bodyPr wrap="square" lIns="0" tIns="0" rIns="0" bIns="0" rtlCol="0" anchor="ctr"/>
-          <a:lstStyle/>
-          <a:p>
-            <a:pPr indent="0" marL="0">
-              <a:buNone/>
-            </a:pPr>
-            <a:r>
-              <a:rPr lang="en-US" sz="1400" b="1" dirty="0">
-                <a:solidFill>
-                  <a:srgbClr val="13294B"/>
-                </a:solidFill>
-                <a:latin typeface="Meiryo" pitchFamily="34" charset="0"/>
-                <a:ea typeface="Meiryo" pitchFamily="34" charset="-122"/>
-                <a:cs typeface="Meiryo" pitchFamily="34" charset="-120"/>
-              </a:rPr>
-              <a:t>比較の考え方</a:t>
-            </a:r>
-            <a:endParaRPr lang="en-US" sz="1400" dirty="0"/>
-          </a:p>
-        </p:txBody>
-      </p:sp>
-      <p:sp>
-        <p:nvSpPr>
-          <p:cNvPr id="17" name="Shape 15"/>
-          <p:cNvSpPr/>
-          <p:nvPr/>
-        </p:nvSpPr>
-        <p:spPr>
-          <a:xfrm>
-            <a:off x="6355080" y="1956816"/>
-            <a:ext cx="5330952" cy="2487168"/>
-          </a:xfrm>
-          <a:prstGeom prst="roundRect">
-            <a:avLst>
-              <a:gd name="adj" fmla="val 2206"/>
-            </a:avLst>
-          </a:prstGeom>
-          <a:solidFill>
-            <a:srgbClr val="FFFFFF"/>
-          </a:solidFill>
-          <a:ln w="12700">
-            <a:solidFill>
-              <a:srgbClr val="13294B"/>
-            </a:solidFill>
-            <a:prstDash val="solid"/>
-          </a:ln>
-        </p:spPr>
-      </p:sp>
-      <p:sp>
-        <p:nvSpPr>
-          <p:cNvPr id="18" name="Text 16"/>
-          <p:cNvSpPr txBox="1"/>
-          <p:nvPr/>
-        </p:nvSpPr>
-        <p:spPr>
-          <a:xfrm>
-            <a:off x="6537960" y="2066544"/>
-            <a:ext cx="4965192" cy="329184"/>
-          </a:xfrm>
-          <a:prstGeom prst="rect">
-            <a:avLst/>
-          </a:prstGeom>
-          <a:noFill/>
-          <a:ln/>
-        </p:spPr>
-        <p:txBody>
-          <a:bodyPr wrap="square" lIns="0" tIns="0" rIns="0" bIns="0" rtlCol="0" anchor="ctr"/>
-          <a:lstStyle/>
-          <a:p>
-            <a:pPr algn="ctr" indent="0" marL="0">
-              <a:buNone/>
-            </a:pPr>
-            <a:r>
-              <a:rPr lang="en-US" sz="1250" b="1" dirty="0">
-                <a:solidFill>
-                  <a:srgbClr val="13294B"/>
-                </a:solidFill>
-                <a:latin typeface="Meiryo" pitchFamily="34" charset="0"/>
-                <a:ea typeface="Meiryo" pitchFamily="34" charset="-122"/>
-                <a:cs typeface="Meiryo" pitchFamily="34" charset="-120"/>
-              </a:rPr>
-              <a:t>IBでも行える取引（振込・振替 など）</a:t>
-            </a:r>
-            <a:endParaRPr lang="en-US" sz="1250" dirty="0"/>
-          </a:p>
-        </p:txBody>
-      </p:sp>
-      <p:sp>
-        <p:nvSpPr>
-          <p:cNvPr id="19" name="Shape 17"/>
-          <p:cNvSpPr/>
-          <p:nvPr/>
-        </p:nvSpPr>
-        <p:spPr>
-          <a:xfrm>
-            <a:off x="6611112" y="2487168"/>
-            <a:ext cx="4818888" cy="841248"/>
-          </a:xfrm>
-          <a:prstGeom prst="roundRect">
-            <a:avLst>
-              <a:gd name="adj" fmla="val 6522"/>
-            </a:avLst>
-          </a:prstGeom>
-          <a:solidFill>
-            <a:srgbClr val="D9482F"/>
-          </a:solidFill>
-          <a:ln w="6350">
-            <a:solidFill>
-              <a:srgbClr val="D9482F"/>
-            </a:solidFill>
-            <a:prstDash val="solid"/>
-          </a:ln>
-        </p:spPr>
-      </p:sp>
-      <p:sp>
-        <p:nvSpPr>
-          <p:cNvPr id="20" name="Text 18"/>
-          <p:cNvSpPr txBox="1"/>
-          <p:nvPr/>
-        </p:nvSpPr>
-        <p:spPr>
-          <a:xfrm>
-            <a:off x="6611112" y="2487168"/>
-            <a:ext cx="4818888" cy="841248"/>
-          </a:xfrm>
-          <a:prstGeom prst="rect">
-            <a:avLst/>
-          </a:prstGeom>
-          <a:noFill/>
-          <a:ln/>
-        </p:spPr>
-        <p:txBody>
-          <a:bodyPr wrap="square" lIns="0" tIns="0" rIns="0" bIns="0" rtlCol="0" anchor="ctr"/>
-          <a:lstStyle/>
-          <a:p>
-            <a:pPr algn="ctr" indent="0" marL="0">
-              <a:buNone/>
-            </a:pPr>
-            <a:r>
-              <a:rPr lang="en-US" sz="1350" b="1" dirty="0">
-                <a:solidFill>
-                  <a:srgbClr val="FFFFFF"/>
-                </a:solidFill>
-                <a:latin typeface="Meiryo" pitchFamily="34" charset="0"/>
-                <a:ea typeface="Meiryo" pitchFamily="34" charset="-122"/>
-                <a:cs typeface="Meiryo" pitchFamily="34" charset="-120"/>
-              </a:rPr>
-              <a:t>A　IBで実施された取引</a:t>
+              <a:t>では、こうした取り組みのもとで、IBの利用は実際にどう変化しているのか。</a:t>
             </a:r>
             <a:endParaRPr lang="en-US" sz="1350" dirty="0"/>
           </a:p>
@@ -3212,207 +3985,13 @@
       </p:sp>
       <p:sp>
         <p:nvSpPr>
-          <p:cNvPr id="21" name="Shape 19"/>
-          <p:cNvSpPr/>
-          <p:nvPr/>
-        </p:nvSpPr>
-        <p:spPr>
-          <a:xfrm>
-            <a:off x="6611112" y="3456432"/>
-            <a:ext cx="4818888" cy="841248"/>
-          </a:xfrm>
-          <a:prstGeom prst="roundRect">
-            <a:avLst>
-              <a:gd name="adj" fmla="val 6522"/>
-            </a:avLst>
-          </a:prstGeom>
-          <a:solidFill>
-            <a:srgbClr val="2A4A7A"/>
-          </a:solidFill>
-          <a:ln w="6350">
-            <a:solidFill>
-              <a:srgbClr val="2A4A7A"/>
-            </a:solidFill>
-            <a:prstDash val="solid"/>
-          </a:ln>
-        </p:spPr>
-      </p:sp>
-      <p:sp>
-        <p:nvSpPr>
-          <p:cNvPr id="22" name="Text 20"/>
-          <p:cNvSpPr txBox="1"/>
-          <p:nvPr/>
-        </p:nvSpPr>
-        <p:spPr>
-          <a:xfrm>
-            <a:off x="6611112" y="3456432"/>
-            <a:ext cx="4818888" cy="841248"/>
-          </a:xfrm>
-          <a:prstGeom prst="rect">
-            <a:avLst/>
-          </a:prstGeom>
-          <a:noFill/>
-          <a:ln/>
-        </p:spPr>
-        <p:txBody>
-          <a:bodyPr wrap="square" lIns="0" tIns="0" rIns="0" bIns="0" rtlCol="0" anchor="ctr"/>
-          <a:lstStyle/>
-          <a:p>
-            <a:pPr algn="ctr" indent="0" marL="0">
-              <a:lnSpc>
-                <a:spcPct val="115000"/>
-              </a:lnSpc>
-              <a:buNone/>
-            </a:pPr>
-            <a:r>
-              <a:rPr lang="en-US" sz="1350" b="1" dirty="0">
-                <a:solidFill>
-                  <a:srgbClr val="FFFFFF"/>
-                </a:solidFill>
-                <a:latin typeface="Meiryo" pitchFamily="34" charset="0"/>
-                <a:ea typeface="Meiryo" pitchFamily="34" charset="-122"/>
-                <a:cs typeface="Meiryo" pitchFamily="34" charset="-120"/>
-              </a:rPr>
-              <a:t>B　ATMで実施された取引</a:t>
-            </a:r>
-            <a:endParaRPr lang="en-US" sz="1350" dirty="0"/>
-          </a:p>
-          <a:p>
-            <a:pPr algn="ctr" indent="0" marL="0">
-              <a:lnSpc>
-                <a:spcPct val="115000"/>
-              </a:lnSpc>
-              <a:buNone/>
-            </a:pPr>
-            <a:r>
-              <a:rPr lang="en-US" sz="1350" b="1" dirty="0">
-                <a:solidFill>
-                  <a:srgbClr val="FFFFFF"/>
-                </a:solidFill>
-                <a:latin typeface="Meiryo" pitchFamily="34" charset="0"/>
-                <a:ea typeface="Meiryo" pitchFamily="34" charset="-122"/>
-                <a:cs typeface="Meiryo" pitchFamily="34" charset="-120"/>
-              </a:rPr>
-              <a:t>（IBに移りうる部分）</a:t>
-            </a:r>
-            <a:endParaRPr lang="en-US" sz="1350" dirty="0"/>
-          </a:p>
-        </p:txBody>
-      </p:sp>
-      <p:sp>
-        <p:nvSpPr>
-          <p:cNvPr id="23" name="Shape 21"/>
-          <p:cNvSpPr/>
-          <p:nvPr/>
-        </p:nvSpPr>
-        <p:spPr>
-          <a:xfrm>
-            <a:off x="6355080" y="4572000"/>
-            <a:ext cx="5330952" cy="658368"/>
-          </a:xfrm>
-          <a:prstGeom prst="roundRect">
-            <a:avLst>
-              <a:gd name="adj" fmla="val 8333"/>
-            </a:avLst>
-          </a:prstGeom>
-          <a:solidFill>
-            <a:srgbClr val="F0F2F5"/>
-          </a:solidFill>
-          <a:ln w="12700">
-            <a:solidFill>
-              <a:srgbClr val="D3DCE8"/>
-            </a:solidFill>
-            <a:prstDash val="solid"/>
-          </a:ln>
-        </p:spPr>
-      </p:sp>
-      <p:sp>
-        <p:nvSpPr>
-          <p:cNvPr id="24" name="Text 22"/>
-          <p:cNvSpPr txBox="1"/>
-          <p:nvPr/>
-        </p:nvSpPr>
-        <p:spPr>
-          <a:xfrm>
-            <a:off x="6537960" y="4572000"/>
-            <a:ext cx="4965192" cy="658368"/>
-          </a:xfrm>
-          <a:prstGeom prst="rect">
-            <a:avLst/>
-          </a:prstGeom>
-          <a:noFill/>
-          <a:ln/>
-        </p:spPr>
-        <p:txBody>
-          <a:bodyPr wrap="square" lIns="0" tIns="0" rIns="0" bIns="0" rtlCol="0" anchor="ctr"/>
-          <a:lstStyle/>
-          <a:p>
-            <a:pPr algn="ctr" indent="0" marL="0">
-              <a:buNone/>
-            </a:pPr>
-            <a:r>
-              <a:rPr lang="en-US" sz="1150" dirty="0">
-                <a:solidFill>
-                  <a:srgbClr val="5D6E82"/>
-                </a:solidFill>
-                <a:latin typeface="Meiryo" pitchFamily="34" charset="0"/>
-                <a:ea typeface="Meiryo" pitchFamily="34" charset="-122"/>
-                <a:cs typeface="Meiryo" pitchFamily="34" charset="-120"/>
-              </a:rPr>
-              <a:t>ATMでしか行えない取引（現金の入出金 など）　→　今回は対象外</a:t>
-            </a:r>
-            <a:endParaRPr lang="en-US" sz="1150" dirty="0"/>
-          </a:p>
-        </p:txBody>
-      </p:sp>
-      <p:sp>
-        <p:nvSpPr>
-          <p:cNvPr id="25" name="Text 23"/>
-          <p:cNvSpPr txBox="1"/>
-          <p:nvPr/>
-        </p:nvSpPr>
-        <p:spPr>
-          <a:xfrm>
-            <a:off x="6355080" y="5376672"/>
-            <a:ext cx="5330952" cy="365760"/>
-          </a:xfrm>
-          <a:prstGeom prst="rect">
-            <a:avLst/>
-          </a:prstGeom>
-          <a:noFill/>
-          <a:ln/>
-        </p:spPr>
-        <p:txBody>
-          <a:bodyPr wrap="square" lIns="0" tIns="0" rIns="0" bIns="0" rtlCol="0" anchor="ctr"/>
-          <a:lstStyle/>
-          <a:p>
-            <a:pPr indent="0" marL="0">
-              <a:buNone/>
-            </a:pPr>
-            <a:r>
-              <a:rPr lang="en-US" sz="1150" dirty="0">
-                <a:solidFill>
-                  <a:srgbClr val="5D6E82"/>
-                </a:solidFill>
-                <a:latin typeface="Meiryo" pitchFamily="34" charset="0"/>
-                <a:ea typeface="Meiryo" pitchFamily="34" charset="-122"/>
-                <a:cs typeface="Meiryo" pitchFamily="34" charset="-120"/>
-              </a:rPr>
-              <a:t>対象期間：2025年4〜6月／2026年4〜6月（利用できたデータの範囲、計6か月）</a:t>
-            </a:r>
-            <a:endParaRPr lang="en-US" sz="1150" dirty="0"/>
-          </a:p>
-        </p:txBody>
-      </p:sp>
-      <p:sp>
-        <p:nvSpPr>
-          <p:cNvPr id="27" name="Text 24"/>
-          <p:cNvSpPr txBox="1"/>
-          <p:nvPr/>
-        </p:nvSpPr>
-        <p:spPr>
-          <a:xfrm>
-            <a:off x="11411712" y="6382512"/>
+          <p:cNvPr id="34" name="Text 31"/>
+          <p:cNvSpPr txBox="1"/>
+          <p:nvPr/>
+        </p:nvSpPr>
+        <p:spPr>
+          <a:xfrm>
+            <a:off x="11411712" y="6419088"/>
             <a:ext cx="365760" cy="274320"/>
           </a:xfrm>
           <a:prstGeom prst="rect">
@@ -3496,7 +4075,7 @@
           <a:bodyPr wrap="square" lIns="0" tIns="0" rIns="0" bIns="0" rtlCol="0" anchor="ctr"/>
           <a:lstStyle/>
           <a:p>
-            <a:pPr algn="l" indent="0" marL="0">
+            <a:pPr indent="0" marL="0">
               <a:buNone/>
             </a:pPr>
             <a:r>
@@ -3508,7 +4087,7 @@
                 <a:ea typeface="Meiryo" pitchFamily="34" charset="-122"/>
                 <a:cs typeface="Meiryo" pitchFamily="34" charset="-120"/>
               </a:rPr>
-              <a:t>条件を指定して集計しただけ ── IB利用件数は2026年に増加</a:t>
+              <a:t>IBの件数を数えるだけでは、普及は測れない</a:t>
             </a:r>
             <a:endParaRPr lang="en-US" sz="2600" dirty="0"/>
           </a:p>
@@ -3535,7 +4114,7 @@
           <a:bodyPr wrap="square" lIns="0" tIns="0" rIns="0" bIns="0" rtlCol="0" anchor="ctr"/>
           <a:lstStyle/>
           <a:p>
-            <a:pPr algn="l" indent="0" marL="0">
+            <a:pPr indent="0" marL="0">
               <a:buNone/>
             </a:pPr>
             <a:r>
@@ -3547,7 +4126,7 @@
                 <a:ea typeface="Meiryo" pitchFamily="34" charset="-122"/>
                 <a:cs typeface="Meiryo" pitchFamily="34" charset="-120"/>
               </a:rPr>
-              <a:t>統計モデルや機械学習は使っていない。見たい条件を指定して数え、並べただけ。</a:t>
+              <a:t>「IBでも行える取引が、どれだけIBで行われているか」という見方に置き換えた。</a:t>
             </a:r>
             <a:endParaRPr lang="en-US" sz="1350" dirty="0"/>
           </a:p>
@@ -3555,57 +4134,18 @@
       </p:sp>
       <p:sp>
         <p:nvSpPr>
-          <p:cNvPr id="4" name="Text 2"/>
-          <p:cNvSpPr txBox="1"/>
-          <p:nvPr/>
-        </p:nvSpPr>
-        <p:spPr>
-          <a:xfrm>
-            <a:off x="502920" y="1591056"/>
-            <a:ext cx="4160520" cy="292608"/>
-          </a:xfrm>
-          <a:prstGeom prst="rect">
-            <a:avLst/>
-          </a:prstGeom>
-          <a:noFill/>
-          <a:ln/>
-        </p:spPr>
-        <p:txBody>
-          <a:bodyPr wrap="square" lIns="0" tIns="0" rIns="0" bIns="0" rtlCol="0" anchor="ctr"/>
-          <a:lstStyle/>
-          <a:p>
-            <a:pPr indent="0" marL="0">
-              <a:buNone/>
-            </a:pPr>
-            <a:r>
-              <a:rPr lang="en-US" sz="1400" b="1" dirty="0">
-                <a:solidFill>
-                  <a:srgbClr val="13294B"/>
-                </a:solidFill>
-                <a:latin typeface="Meiryo" pitchFamily="34" charset="0"/>
-                <a:ea typeface="Meiryo" pitchFamily="34" charset="-122"/>
-                <a:cs typeface="Meiryo" pitchFamily="34" charset="-120"/>
-              </a:rPr>
-              <a:t>DYNATREKで行ったこと</a:t>
-            </a:r>
-            <a:endParaRPr lang="en-US" sz="1400" dirty="0"/>
-          </a:p>
-        </p:txBody>
-      </p:sp>
-      <p:sp>
-        <p:nvSpPr>
-          <p:cNvPr id="5" name="Shape 3"/>
+          <p:cNvPr id="4" name="Shape 2"/>
           <p:cNvSpPr/>
           <p:nvPr/>
         </p:nvSpPr>
         <p:spPr>
           <a:xfrm>
-            <a:off x="502920" y="1975104"/>
-            <a:ext cx="4160520" cy="804672"/>
+            <a:off x="502920" y="1627632"/>
+            <a:ext cx="5486400" cy="1481328"/>
           </a:xfrm>
           <a:prstGeom prst="roundRect">
             <a:avLst>
-              <a:gd name="adj" fmla="val 6818"/>
+              <a:gd name="adj" fmla="val 3704"/>
             </a:avLst>
           </a:prstGeom>
           <a:solidFill>
@@ -3621,13 +4161,13 @@
       </p:sp>
       <p:sp>
         <p:nvSpPr>
-          <p:cNvPr id="6" name="Shape 4"/>
+          <p:cNvPr id="5" name="Shape 3"/>
           <p:cNvSpPr/>
           <p:nvPr/>
         </p:nvSpPr>
         <p:spPr>
           <a:xfrm>
-            <a:off x="704088" y="2212848"/>
+            <a:off x="740664" y="1865376"/>
             <a:ext cx="329184" cy="329184"/>
           </a:xfrm>
           <a:prstGeom prst="ellipse">
@@ -3646,53 +4186,53 @@
       </p:sp>
       <p:sp>
         <p:nvSpPr>
+          <p:cNvPr id="6" name="Text 4"/>
+          <p:cNvSpPr txBox="1"/>
+          <p:nvPr/>
+        </p:nvSpPr>
+        <p:spPr>
+          <a:xfrm>
+            <a:off x="740664" y="1865376"/>
+            <a:ext cx="329184" cy="329184"/>
+          </a:xfrm>
+          <a:prstGeom prst="rect">
+            <a:avLst/>
+          </a:prstGeom>
+          <a:noFill/>
+          <a:ln/>
+        </p:spPr>
+        <p:txBody>
+          <a:bodyPr wrap="square" lIns="0" tIns="0" rIns="0" bIns="0" rtlCol="0" anchor="ctr"/>
+          <a:lstStyle/>
+          <a:p>
+            <a:pPr algn="ctr" indent="0" marL="0">
+              <a:buNone/>
+            </a:pPr>
+            <a:r>
+              <a:rPr lang="en-US" sz="1300" b="1" dirty="0">
+                <a:solidFill>
+                  <a:srgbClr val="FFFFFF"/>
+                </a:solidFill>
+                <a:latin typeface="Meiryo" pitchFamily="34" charset="0"/>
+                <a:ea typeface="Meiryo" pitchFamily="34" charset="-122"/>
+                <a:cs typeface="Meiryo" pitchFamily="34" charset="-120"/>
+              </a:rPr>
+              <a:t>1</a:t>
+            </a:r>
+            <a:endParaRPr lang="en-US" sz="1300" dirty="0"/>
+          </a:p>
+        </p:txBody>
+      </p:sp>
+      <p:sp>
+        <p:nvSpPr>
           <p:cNvPr id="7" name="Text 5"/>
           <p:cNvSpPr txBox="1"/>
           <p:nvPr/>
         </p:nvSpPr>
         <p:spPr>
           <a:xfrm>
-            <a:off x="704088" y="2212848"/>
-            <a:ext cx="329184" cy="329184"/>
-          </a:xfrm>
-          <a:prstGeom prst="rect">
-            <a:avLst/>
-          </a:prstGeom>
-          <a:noFill/>
-          <a:ln/>
-        </p:spPr>
-        <p:txBody>
-          <a:bodyPr wrap="square" lIns="0" tIns="0" rIns="0" bIns="0" rtlCol="0" anchor="ctr"/>
-          <a:lstStyle/>
-          <a:p>
-            <a:pPr algn="ctr" indent="0" marL="0">
-              <a:buNone/>
-            </a:pPr>
-            <a:r>
-              <a:rPr lang="en-US" sz="1300" b="1" dirty="0">
-                <a:solidFill>
-                  <a:srgbClr val="FFFFFF"/>
-                </a:solidFill>
-                <a:latin typeface="Meiryo" pitchFamily="34" charset="0"/>
-                <a:ea typeface="Meiryo" pitchFamily="34" charset="-122"/>
-                <a:cs typeface="Meiryo" pitchFamily="34" charset="-120"/>
-              </a:rPr>
-              <a:t>1</a:t>
-            </a:r>
-            <a:endParaRPr lang="en-US" sz="1300" dirty="0"/>
-          </a:p>
-        </p:txBody>
-      </p:sp>
-      <p:sp>
-        <p:nvSpPr>
-          <p:cNvPr id="8" name="Text 6"/>
-          <p:cNvSpPr txBox="1"/>
-          <p:nvPr/>
-        </p:nvSpPr>
-        <p:spPr>
-          <a:xfrm>
-            <a:off x="1143000" y="2048256"/>
-            <a:ext cx="3319272" cy="658368"/>
+            <a:off x="1197864" y="1810512"/>
+            <a:ext cx="4526280" cy="1115568"/>
           </a:xfrm>
           <a:prstGeom prst="rect">
             <a:avLst/>
@@ -3706,12 +4246,12 @@
           <a:p>
             <a:pPr indent="0" marL="0">
               <a:lnSpc>
-                <a:spcPct val="125000"/>
+                <a:spcPct val="132000"/>
               </a:lnSpc>
               <a:buNone/>
             </a:pPr>
             <a:r>
-              <a:rPr lang="en-US" sz="1150" dirty="0">
+              <a:rPr lang="en-US" sz="1250" dirty="0">
                 <a:solidFill>
                   <a:srgbClr val="1E2A38"/>
                 </a:solidFill>
@@ -3719,19 +4259,19 @@
                 <a:ea typeface="Meiryo" pitchFamily="34" charset="-122"/>
                 <a:cs typeface="Meiryo" pitchFamily="34" charset="-120"/>
               </a:rPr>
-              <a:t>期間を指定する</a:t>
-            </a:r>
-            <a:endParaRPr lang="en-US" sz="1150" dirty="0"/>
+              <a:t>まず思いついたのは「IBの利用件数を数える」こと。</a:t>
+            </a:r>
+            <a:endParaRPr lang="en-US" sz="1250" dirty="0"/>
           </a:p>
           <a:p>
             <a:pPr indent="0" marL="0">
               <a:lnSpc>
-                <a:spcPct val="125000"/>
+                <a:spcPct val="132000"/>
               </a:lnSpc>
               <a:buNone/>
             </a:pPr>
             <a:r>
-              <a:rPr lang="en-US" sz="1150" dirty="0">
+              <a:rPr lang="en-US" sz="1250" dirty="0">
                 <a:solidFill>
                   <a:srgbClr val="1E2A38"/>
                 </a:solidFill>
@@ -3739,26 +4279,26 @@
                 <a:ea typeface="Meiryo" pitchFamily="34" charset="-122"/>
                 <a:cs typeface="Meiryo" pitchFamily="34" charset="-120"/>
               </a:rPr>
-              <a:t>2025年4〜6月／2026年4〜6月</a:t>
-            </a:r>
-            <a:endParaRPr lang="en-US" sz="1150" dirty="0"/>
-          </a:p>
-        </p:txBody>
-      </p:sp>
-      <p:sp>
-        <p:nvSpPr>
-          <p:cNvPr id="9" name="Shape 7"/>
+              <a:t>しかし取引全体が増えれば件数も増えるため、それだけでは「普及した」とは言い切れない。</a:t>
+            </a:r>
+            <a:endParaRPr lang="en-US" sz="1250" dirty="0"/>
+          </a:p>
+        </p:txBody>
+      </p:sp>
+      <p:sp>
+        <p:nvSpPr>
+          <p:cNvPr id="8" name="Shape 6"/>
           <p:cNvSpPr/>
           <p:nvPr/>
         </p:nvSpPr>
         <p:spPr>
           <a:xfrm>
-            <a:off x="502920" y="2907792"/>
-            <a:ext cx="4160520" cy="804672"/>
+            <a:off x="502920" y="3291840"/>
+            <a:ext cx="5486400" cy="1207008"/>
           </a:xfrm>
           <a:prstGeom prst="roundRect">
             <a:avLst>
-              <a:gd name="adj" fmla="val 6818"/>
+              <a:gd name="adj" fmla="val 4545"/>
             </a:avLst>
           </a:prstGeom>
           <a:solidFill>
@@ -3774,13 +4314,13 @@
       </p:sp>
       <p:sp>
         <p:nvSpPr>
-          <p:cNvPr id="10" name="Shape 8"/>
+          <p:cNvPr id="9" name="Shape 7"/>
           <p:cNvSpPr/>
           <p:nvPr/>
         </p:nvSpPr>
         <p:spPr>
           <a:xfrm>
-            <a:off x="704088" y="3145536"/>
+            <a:off x="740664" y="3529584"/>
             <a:ext cx="329184" cy="329184"/>
           </a:xfrm>
           <a:prstGeom prst="ellipse">
@@ -3799,53 +4339,53 @@
       </p:sp>
       <p:sp>
         <p:nvSpPr>
+          <p:cNvPr id="10" name="Text 8"/>
+          <p:cNvSpPr txBox="1"/>
+          <p:nvPr/>
+        </p:nvSpPr>
+        <p:spPr>
+          <a:xfrm>
+            <a:off x="740664" y="3529584"/>
+            <a:ext cx="329184" cy="329184"/>
+          </a:xfrm>
+          <a:prstGeom prst="rect">
+            <a:avLst/>
+          </a:prstGeom>
+          <a:noFill/>
+          <a:ln/>
+        </p:spPr>
+        <p:txBody>
+          <a:bodyPr wrap="square" lIns="0" tIns="0" rIns="0" bIns="0" rtlCol="0" anchor="ctr"/>
+          <a:lstStyle/>
+          <a:p>
+            <a:pPr algn="ctr" indent="0" marL="0">
+              <a:buNone/>
+            </a:pPr>
+            <a:r>
+              <a:rPr lang="en-US" sz="1300" b="1" dirty="0">
+                <a:solidFill>
+                  <a:srgbClr val="FFFFFF"/>
+                </a:solidFill>
+                <a:latin typeface="Meiryo" pitchFamily="34" charset="0"/>
+                <a:ea typeface="Meiryo" pitchFamily="34" charset="-122"/>
+                <a:cs typeface="Meiryo" pitchFamily="34" charset="-120"/>
+              </a:rPr>
+              <a:t>2</a:t>
+            </a:r>
+            <a:endParaRPr lang="en-US" sz="1300" dirty="0"/>
+          </a:p>
+        </p:txBody>
+      </p:sp>
+      <p:sp>
+        <p:nvSpPr>
           <p:cNvPr id="11" name="Text 9"/>
           <p:cNvSpPr txBox="1"/>
           <p:nvPr/>
         </p:nvSpPr>
         <p:spPr>
           <a:xfrm>
-            <a:off x="704088" y="3145536"/>
-            <a:ext cx="329184" cy="329184"/>
-          </a:xfrm>
-          <a:prstGeom prst="rect">
-            <a:avLst/>
-          </a:prstGeom>
-          <a:noFill/>
-          <a:ln/>
-        </p:spPr>
-        <p:txBody>
-          <a:bodyPr wrap="square" lIns="0" tIns="0" rIns="0" bIns="0" rtlCol="0" anchor="ctr"/>
-          <a:lstStyle/>
-          <a:p>
-            <a:pPr algn="ctr" indent="0" marL="0">
-              <a:buNone/>
-            </a:pPr>
-            <a:r>
-              <a:rPr lang="en-US" sz="1300" b="1" dirty="0">
-                <a:solidFill>
-                  <a:srgbClr val="FFFFFF"/>
-                </a:solidFill>
-                <a:latin typeface="Meiryo" pitchFamily="34" charset="0"/>
-                <a:ea typeface="Meiryo" pitchFamily="34" charset="-122"/>
-                <a:cs typeface="Meiryo" pitchFamily="34" charset="-120"/>
-              </a:rPr>
-              <a:t>2</a:t>
-            </a:r>
-            <a:endParaRPr lang="en-US" sz="1300" dirty="0"/>
-          </a:p>
-        </p:txBody>
-      </p:sp>
-      <p:sp>
-        <p:nvSpPr>
-          <p:cNvPr id="12" name="Text 10"/>
-          <p:cNvSpPr txBox="1"/>
-          <p:nvPr/>
-        </p:nvSpPr>
-        <p:spPr>
-          <a:xfrm>
-            <a:off x="1143000" y="2980944"/>
-            <a:ext cx="3319272" cy="658368"/>
+            <a:off x="1197864" y="3474720"/>
+            <a:ext cx="4526280" cy="841248"/>
           </a:xfrm>
           <a:prstGeom prst="rect">
             <a:avLst/>
@@ -3859,12 +4399,12 @@
           <a:p>
             <a:pPr indent="0" marL="0">
               <a:lnSpc>
-                <a:spcPct val="125000"/>
+                <a:spcPct val="132000"/>
               </a:lnSpc>
               <a:buNone/>
             </a:pPr>
             <a:r>
-              <a:rPr lang="en-US" sz="1150" dirty="0">
+              <a:rPr lang="en-US" sz="1250" dirty="0">
                 <a:solidFill>
                   <a:srgbClr val="1E2A38"/>
                 </a:solidFill>
@@ -3872,54 +4412,34 @@
                 <a:ea typeface="Meiryo" pitchFamily="34" charset="-122"/>
                 <a:cs typeface="Meiryo" pitchFamily="34" charset="-120"/>
               </a:rPr>
-              <a:t>取引の種類を指定する</a:t>
-            </a:r>
-            <a:endParaRPr lang="en-US" sz="1150" dirty="0"/>
-          </a:p>
-          <a:p>
-            <a:pPr indent="0" marL="0">
-              <a:lnSpc>
-                <a:spcPct val="125000"/>
-              </a:lnSpc>
-              <a:buNone/>
-            </a:pPr>
-            <a:r>
-              <a:rPr lang="en-US" sz="1150" dirty="0">
-                <a:solidFill>
-                  <a:srgbClr val="1E2A38"/>
-                </a:solidFill>
-                <a:latin typeface="Meiryo" pitchFamily="34" charset="0"/>
-                <a:ea typeface="Meiryo" pitchFamily="34" charset="-122"/>
-                <a:cs typeface="Meiryo" pitchFamily="34" charset="-120"/>
-              </a:rPr>
-              <a:t>振込・振替など、IBでも行える取引</a:t>
-            </a:r>
-            <a:endParaRPr lang="en-US" sz="1150" dirty="0"/>
-          </a:p>
-        </p:txBody>
-      </p:sp>
-      <p:sp>
-        <p:nvSpPr>
-          <p:cNvPr id="13" name="Shape 11"/>
+              <a:t>IBの普及とは「IBでも行える取引が、IBで行われるようになること」ではないか。</a:t>
+            </a:r>
+            <a:endParaRPr lang="en-US" sz="1250" dirty="0"/>
+          </a:p>
+        </p:txBody>
+      </p:sp>
+      <p:sp>
+        <p:nvSpPr>
+          <p:cNvPr id="12" name="Shape 10"/>
           <p:cNvSpPr/>
           <p:nvPr/>
         </p:nvSpPr>
         <p:spPr>
           <a:xfrm>
-            <a:off x="502920" y="3840480"/>
-            <a:ext cx="4160520" cy="804672"/>
+            <a:off x="502920" y="4681728"/>
+            <a:ext cx="5486400" cy="1207008"/>
           </a:xfrm>
           <a:prstGeom prst="roundRect">
             <a:avLst>
-              <a:gd name="adj" fmla="val 6818"/>
+              <a:gd name="adj" fmla="val 4545"/>
             </a:avLst>
           </a:prstGeom>
           <a:solidFill>
-            <a:srgbClr val="EEF2F8"/>
+            <a:srgbClr val="FBEAE4"/>
           </a:solidFill>
           <a:ln w="6350">
             <a:solidFill>
-              <a:srgbClr val="EEF2F8"/>
+              <a:srgbClr val="FBEAE4"/>
             </a:solidFill>
             <a:prstDash val="solid"/>
           </a:ln>
@@ -3927,22 +4447,169 @@
       </p:sp>
       <p:sp>
         <p:nvSpPr>
-          <p:cNvPr id="14" name="Shape 12"/>
+          <p:cNvPr id="13" name="Shape 11"/>
           <p:cNvSpPr/>
           <p:nvPr/>
         </p:nvSpPr>
         <p:spPr>
           <a:xfrm>
-            <a:off x="704088" y="4078224"/>
+            <a:off x="740664" y="4919472"/>
             <a:ext cx="329184" cy="329184"/>
           </a:xfrm>
           <a:prstGeom prst="ellipse">
             <a:avLst/>
           </a:prstGeom>
           <a:solidFill>
-            <a:srgbClr val="13294B"/>
+            <a:srgbClr val="D9482F"/>
           </a:solidFill>
           <a:ln w="6350">
+            <a:solidFill>
+              <a:srgbClr val="D9482F"/>
+            </a:solidFill>
+            <a:prstDash val="solid"/>
+          </a:ln>
+        </p:spPr>
+      </p:sp>
+      <p:sp>
+        <p:nvSpPr>
+          <p:cNvPr id="14" name="Text 12"/>
+          <p:cNvSpPr txBox="1"/>
+          <p:nvPr/>
+        </p:nvSpPr>
+        <p:spPr>
+          <a:xfrm>
+            <a:off x="740664" y="4919472"/>
+            <a:ext cx="329184" cy="329184"/>
+          </a:xfrm>
+          <a:prstGeom prst="rect">
+            <a:avLst/>
+          </a:prstGeom>
+          <a:noFill/>
+          <a:ln/>
+        </p:spPr>
+        <p:txBody>
+          <a:bodyPr wrap="square" lIns="0" tIns="0" rIns="0" bIns="0" rtlCol="0" anchor="ctr"/>
+          <a:lstStyle/>
+          <a:p>
+            <a:pPr algn="ctr" indent="0" marL="0">
+              <a:buNone/>
+            </a:pPr>
+            <a:r>
+              <a:rPr lang="en-US" sz="1300" b="1" dirty="0">
+                <a:solidFill>
+                  <a:srgbClr val="FFFFFF"/>
+                </a:solidFill>
+                <a:latin typeface="Meiryo" pitchFamily="34" charset="0"/>
+                <a:ea typeface="Meiryo" pitchFamily="34" charset="-122"/>
+                <a:cs typeface="Meiryo" pitchFamily="34" charset="-120"/>
+              </a:rPr>
+              <a:t>3</a:t>
+            </a:r>
+            <a:endParaRPr lang="en-US" sz="1300" dirty="0"/>
+          </a:p>
+        </p:txBody>
+      </p:sp>
+      <p:sp>
+        <p:nvSpPr>
+          <p:cNvPr id="15" name="Text 13"/>
+          <p:cNvSpPr txBox="1"/>
+          <p:nvPr/>
+        </p:nvSpPr>
+        <p:spPr>
+          <a:xfrm>
+            <a:off x="1197864" y="4864608"/>
+            <a:ext cx="4526280" cy="841248"/>
+          </a:xfrm>
+          <a:prstGeom prst="rect">
+            <a:avLst/>
+          </a:prstGeom>
+          <a:noFill/>
+          <a:ln/>
+        </p:spPr>
+        <p:txBody>
+          <a:bodyPr wrap="square" lIns="0" tIns="0" rIns="0" bIns="0" rtlCol="0" anchor="ctr"/>
+          <a:lstStyle/>
+          <a:p>
+            <a:pPr indent="0" marL="0">
+              <a:lnSpc>
+                <a:spcPct val="132000"/>
+              </a:lnSpc>
+              <a:buNone/>
+            </a:pPr>
+            <a:r>
+              <a:rPr lang="en-US" sz="1250" dirty="0">
+                <a:solidFill>
+                  <a:srgbClr val="1E2A38"/>
+                </a:solidFill>
+                <a:latin typeface="Meiryo" pitchFamily="34" charset="0"/>
+                <a:ea typeface="Meiryo" pitchFamily="34" charset="-122"/>
+                <a:cs typeface="Meiryo" pitchFamily="34" charset="-120"/>
+              </a:rPr>
+              <a:t>そこで、IBで行われた取引と、ATMで行われた取引のうちIBでも代替できるもの（振込・振替など）を比較することにした。</a:t>
+            </a:r>
+            <a:endParaRPr lang="en-US" sz="1250" dirty="0"/>
+          </a:p>
+        </p:txBody>
+      </p:sp>
+      <p:sp>
+        <p:nvSpPr>
+          <p:cNvPr id="16" name="Text 14"/>
+          <p:cNvSpPr txBox="1"/>
+          <p:nvPr/>
+        </p:nvSpPr>
+        <p:spPr>
+          <a:xfrm>
+            <a:off x="6355080" y="1591056"/>
+            <a:ext cx="5330952" cy="292608"/>
+          </a:xfrm>
+          <a:prstGeom prst="rect">
+            <a:avLst/>
+          </a:prstGeom>
+          <a:noFill/>
+          <a:ln/>
+        </p:spPr>
+        <p:txBody>
+          <a:bodyPr wrap="square" lIns="0" tIns="0" rIns="0" bIns="0" rtlCol="0" anchor="ctr"/>
+          <a:lstStyle/>
+          <a:p>
+            <a:pPr indent="0" marL="0">
+              <a:buNone/>
+            </a:pPr>
+            <a:r>
+              <a:rPr lang="en-US" sz="1400" b="1" dirty="0">
+                <a:solidFill>
+                  <a:srgbClr val="13294B"/>
+                </a:solidFill>
+                <a:latin typeface="Meiryo" pitchFamily="34" charset="0"/>
+                <a:ea typeface="Meiryo" pitchFamily="34" charset="-122"/>
+                <a:cs typeface="Meiryo" pitchFamily="34" charset="-120"/>
+              </a:rPr>
+              <a:t>比較の考え方</a:t>
+            </a:r>
+            <a:endParaRPr lang="en-US" sz="1400" dirty="0"/>
+          </a:p>
+        </p:txBody>
+      </p:sp>
+      <p:sp>
+        <p:nvSpPr>
+          <p:cNvPr id="17" name="Shape 15"/>
+          <p:cNvSpPr/>
+          <p:nvPr/>
+        </p:nvSpPr>
+        <p:spPr>
+          <a:xfrm>
+            <a:off x="6355080" y="1956816"/>
+            <a:ext cx="5330952" cy="2487168"/>
+          </a:xfrm>
+          <a:prstGeom prst="roundRect">
+            <a:avLst>
+              <a:gd name="adj" fmla="val 2206"/>
+            </a:avLst>
+          </a:prstGeom>
+          <a:solidFill>
+            <a:srgbClr val="FFFFFF"/>
+          </a:solidFill>
+          <a:ln w="12700">
             <a:solidFill>
               <a:srgbClr val="13294B"/>
             </a:solidFill>
@@ -3952,14 +4619,14 @@
       </p:sp>
       <p:sp>
         <p:nvSpPr>
-          <p:cNvPr id="15" name="Text 13"/>
-          <p:cNvSpPr txBox="1"/>
-          <p:nvPr/>
-        </p:nvSpPr>
-        <p:spPr>
-          <a:xfrm>
-            <a:off x="704088" y="4078224"/>
-            <a:ext cx="329184" cy="329184"/>
+          <p:cNvPr id="18" name="Text 16"/>
+          <p:cNvSpPr txBox="1"/>
+          <p:nvPr/>
+        </p:nvSpPr>
+        <p:spPr>
+          <a:xfrm>
+            <a:off x="6537960" y="2066544"/>
+            <a:ext cx="4965192" cy="329184"/>
           </a:xfrm>
           <a:prstGeom prst="rect">
             <a:avLst/>
@@ -3975,104 +4642,42 @@
               <a:buNone/>
             </a:pPr>
             <a:r>
-              <a:rPr lang="en-US" sz="1300" b="1" dirty="0">
-                <a:solidFill>
-                  <a:srgbClr val="FFFFFF"/>
-                </a:solidFill>
-                <a:latin typeface="Meiryo" pitchFamily="34" charset="0"/>
-                <a:ea typeface="Meiryo" pitchFamily="34" charset="-122"/>
-                <a:cs typeface="Meiryo" pitchFamily="34" charset="-120"/>
-              </a:rPr>
-              <a:t>3</a:t>
-            </a:r>
-            <a:endParaRPr lang="en-US" sz="1300" dirty="0"/>
-          </a:p>
-        </p:txBody>
-      </p:sp>
-      <p:sp>
-        <p:nvSpPr>
-          <p:cNvPr id="16" name="Text 14"/>
-          <p:cNvSpPr txBox="1"/>
-          <p:nvPr/>
-        </p:nvSpPr>
-        <p:spPr>
-          <a:xfrm>
-            <a:off x="1143000" y="3913632"/>
-            <a:ext cx="3319272" cy="658368"/>
-          </a:xfrm>
-          <a:prstGeom prst="rect">
-            <a:avLst/>
-          </a:prstGeom>
-          <a:noFill/>
-          <a:ln/>
-        </p:spPr>
-        <p:txBody>
-          <a:bodyPr wrap="square" lIns="0" tIns="0" rIns="0" bIns="0" rtlCol="0" anchor="ctr"/>
-          <a:lstStyle/>
-          <a:p>
-            <a:pPr indent="0" marL="0">
-              <a:lnSpc>
-                <a:spcPct val="125000"/>
-              </a:lnSpc>
-              <a:buNone/>
-            </a:pPr>
-            <a:r>
-              <a:rPr lang="en-US" sz="1150" dirty="0">
-                <a:solidFill>
-                  <a:srgbClr val="1E2A38"/>
-                </a:solidFill>
-                <a:latin typeface="Meiryo" pitchFamily="34" charset="0"/>
-                <a:ea typeface="Meiryo" pitchFamily="34" charset="-122"/>
-                <a:cs typeface="Meiryo" pitchFamily="34" charset="-120"/>
-              </a:rPr>
-              <a:t>チャネル別（IB／ATM）に</a:t>
-            </a:r>
-            <a:endParaRPr lang="en-US" sz="1150" dirty="0"/>
-          </a:p>
-          <a:p>
-            <a:pPr indent="0" marL="0">
-              <a:lnSpc>
-                <a:spcPct val="125000"/>
-              </a:lnSpc>
-              <a:buNone/>
-            </a:pPr>
-            <a:r>
-              <a:rPr lang="en-US" sz="1150" dirty="0">
-                <a:solidFill>
-                  <a:srgbClr val="1E2A38"/>
-                </a:solidFill>
-                <a:latin typeface="Meiryo" pitchFamily="34" charset="0"/>
-                <a:ea typeface="Meiryo" pitchFamily="34" charset="-122"/>
-                <a:cs typeface="Meiryo" pitchFamily="34" charset="-120"/>
-              </a:rPr>
-              <a:t>件数を集計して並べる</a:t>
-            </a:r>
-            <a:endParaRPr lang="en-US" sz="1150" dirty="0"/>
-          </a:p>
-        </p:txBody>
-      </p:sp>
-      <p:sp>
-        <p:nvSpPr>
-          <p:cNvPr id="17" name="Shape 15"/>
+              <a:rPr lang="en-US" sz="1250" b="1" dirty="0">
+                <a:solidFill>
+                  <a:srgbClr val="13294B"/>
+                </a:solidFill>
+                <a:latin typeface="Meiryo" pitchFamily="34" charset="0"/>
+                <a:ea typeface="Meiryo" pitchFamily="34" charset="-122"/>
+                <a:cs typeface="Meiryo" pitchFamily="34" charset="-120"/>
+              </a:rPr>
+              <a:t>IBでも行える取引（振込・振替 など）</a:t>
+            </a:r>
+            <a:endParaRPr lang="en-US" sz="1250" dirty="0"/>
+          </a:p>
+        </p:txBody>
+      </p:sp>
+      <p:sp>
+        <p:nvSpPr>
+          <p:cNvPr id="19" name="Shape 17"/>
           <p:cNvSpPr/>
           <p:nvPr/>
         </p:nvSpPr>
         <p:spPr>
           <a:xfrm>
-            <a:off x="502920" y="4937760"/>
-            <a:ext cx="4160520" cy="1417320"/>
+            <a:off x="6611112" y="2487168"/>
+            <a:ext cx="4818888" cy="841248"/>
           </a:xfrm>
           <a:prstGeom prst="roundRect">
             <a:avLst>
-              <a:gd name="adj" fmla="val 3871"/>
+              <a:gd name="adj" fmla="val 6522"/>
             </a:avLst>
           </a:prstGeom>
           <a:solidFill>
-            <a:srgbClr val="13294B"/>
+            <a:srgbClr val="D9482F"/>
           </a:solidFill>
           <a:ln w="6350">
             <a:solidFill>
-              <a:srgbClr val="13294B"/>
+              <a:srgbClr val="D9482F"/>
             </a:solidFill>
             <a:prstDash val="solid"/>
           </a:ln>
@@ -4080,83 +4685,30 @@
       </p:sp>
       <p:sp>
         <p:nvSpPr>
-          <p:cNvPr id="18" name="Text 16"/>
-          <p:cNvSpPr txBox="1"/>
-          <p:nvPr/>
-        </p:nvSpPr>
-        <p:spPr>
-          <a:xfrm>
-            <a:off x="722376" y="5047488"/>
-            <a:ext cx="3721608" cy="256032"/>
-          </a:xfrm>
-          <a:prstGeom prst="rect">
-            <a:avLst/>
-          </a:prstGeom>
-          <a:noFill/>
-          <a:ln/>
-        </p:spPr>
-        <p:txBody>
-          <a:bodyPr wrap="square" lIns="0" tIns="0" rIns="0" bIns="0" rtlCol="0" anchor="ctr"/>
-          <a:lstStyle/>
-          <a:p>
-            <a:pPr indent="0" marL="0">
-              <a:buNone/>
-            </a:pPr>
-            <a:r>
-              <a:rPr lang="en-US" sz="1100" dirty="0">
-                <a:solidFill>
-                  <a:srgbClr val="CADCFC"/>
-                </a:solidFill>
-                <a:latin typeface="Meiryo" pitchFamily="34" charset="0"/>
-                <a:ea typeface="Meiryo" pitchFamily="34" charset="-122"/>
-                <a:cs typeface="Meiryo" pitchFamily="34" charset="-120"/>
-              </a:rPr>
-              <a:t>IB利用件数（1か月あたり）</a:t>
-            </a:r>
-            <a:endParaRPr lang="en-US" sz="1100" dirty="0"/>
-          </a:p>
-        </p:txBody>
-      </p:sp>
-      <p:sp>
-        <p:nvSpPr>
-          <p:cNvPr id="19" name="Text 17"/>
-          <p:cNvSpPr txBox="1"/>
-          <p:nvPr/>
-        </p:nvSpPr>
-        <p:spPr>
-          <a:xfrm>
-            <a:off x="722376" y="5358384"/>
-            <a:ext cx="3721608" cy="402336"/>
-          </a:xfrm>
-          <a:prstGeom prst="rect">
-            <a:avLst/>
-          </a:prstGeom>
-          <a:noFill/>
-          <a:ln/>
-        </p:spPr>
-        <p:txBody>
-          <a:bodyPr wrap="square" lIns="0" tIns="0" rIns="0" bIns="0" rtlCol="0" anchor="ctr"/>
-          <a:lstStyle/>
-          <a:p>
-            <a:pPr indent="0" marL="0">
-              <a:buNone/>
-            </a:pPr>
-            <a:r>
-              <a:rPr lang="en-US" sz="1100" dirty="0">
-                <a:solidFill>
-                  <a:srgbClr val="CADCFC"/>
-                </a:solidFill>
-                <a:latin typeface="Meiryo" pitchFamily="34" charset="0"/>
-                <a:ea typeface="Meiryo" pitchFamily="34" charset="-122"/>
-                <a:cs typeface="Meiryo" pitchFamily="34" charset="-120"/>
-              </a:rPr>
-              <a:t>2025年 4〜6月　</a:t>
-            </a:r>
-            <a:pPr indent="0" marL="0">
-              <a:buNone/>
-            </a:pPr>
-            <a:r>
-              <a:rPr lang="en-US" sz="1900" b="1" dirty="0">
+          <p:cNvPr id="20" name="Text 18"/>
+          <p:cNvSpPr txBox="1"/>
+          <p:nvPr/>
+        </p:nvSpPr>
+        <p:spPr>
+          <a:xfrm>
+            <a:off x="6611112" y="2487168"/>
+            <a:ext cx="4818888" cy="841248"/>
+          </a:xfrm>
+          <a:prstGeom prst="rect">
+            <a:avLst/>
+          </a:prstGeom>
+          <a:noFill/>
+          <a:ln/>
+        </p:spPr>
+        <p:txBody>
+          <a:bodyPr wrap="square" lIns="0" tIns="0" rIns="0" bIns="0" rtlCol="0" anchor="ctr"/>
+          <a:lstStyle/>
+          <a:p>
+            <a:pPr algn="ctr" indent="0" marL="0">
+              <a:buNone/>
+            </a:pPr>
+            <a:r>
+              <a:rPr lang="en-US" sz="1350" b="1" dirty="0">
                 <a:solidFill>
                   <a:srgbClr val="FFFFFF"/>
                 </a:solidFill>
@@ -4164,90 +4716,9 @@
                 <a:ea typeface="Meiryo" pitchFamily="34" charset="-122"/>
                 <a:cs typeface="Meiryo" pitchFamily="34" charset="-120"/>
               </a:rPr>
-              <a:t>約15〜16</a:t>
-            </a:r>
-            <a:pPr indent="0" marL="0">
-              <a:buNone/>
-            </a:pPr>
-            <a:r>
-              <a:rPr lang="en-US" sz="1200" dirty="0">
-                <a:solidFill>
-                  <a:srgbClr val="CADCFC"/>
-                </a:solidFill>
-                <a:latin typeface="Meiryo" pitchFamily="34" charset="0"/>
-                <a:ea typeface="Meiryo" pitchFamily="34" charset="-122"/>
-                <a:cs typeface="Meiryo" pitchFamily="34" charset="-120"/>
-              </a:rPr>
-              <a:t>万件</a:t>
-            </a:r>
-            <a:endParaRPr lang="en-US" sz="1100" dirty="0"/>
-          </a:p>
-        </p:txBody>
-      </p:sp>
-      <p:sp>
-        <p:nvSpPr>
-          <p:cNvPr id="20" name="Text 18"/>
-          <p:cNvSpPr txBox="1"/>
-          <p:nvPr/>
-        </p:nvSpPr>
-        <p:spPr>
-          <a:xfrm>
-            <a:off x="722376" y="5797296"/>
-            <a:ext cx="3721608" cy="438912"/>
-          </a:xfrm>
-          <a:prstGeom prst="rect">
-            <a:avLst/>
-          </a:prstGeom>
-          <a:noFill/>
-          <a:ln/>
-        </p:spPr>
-        <p:txBody>
-          <a:bodyPr wrap="square" lIns="0" tIns="0" rIns="0" bIns="0" rtlCol="0" anchor="ctr"/>
-          <a:lstStyle/>
-          <a:p>
-            <a:pPr indent="0" marL="0">
-              <a:buNone/>
-            </a:pPr>
-            <a:r>
-              <a:rPr lang="en-US" sz="1100" dirty="0">
-                <a:solidFill>
-                  <a:srgbClr val="CADCFC"/>
-                </a:solidFill>
-                <a:latin typeface="Meiryo" pitchFamily="34" charset="0"/>
-                <a:ea typeface="Meiryo" pitchFamily="34" charset="-122"/>
-                <a:cs typeface="Meiryo" pitchFamily="34" charset="-120"/>
-              </a:rPr>
-              <a:t>2026年 4〜6月　</a:t>
-            </a:r>
-            <a:pPr indent="0" marL="0">
-              <a:buNone/>
-            </a:pPr>
-            <a:r>
-              <a:rPr lang="en-US" sz="2100" b="1" dirty="0">
-                <a:solidFill>
-                  <a:srgbClr val="FFC9BC"/>
-                </a:solidFill>
-                <a:latin typeface="Meiryo" pitchFamily="34" charset="0"/>
-                <a:ea typeface="Meiryo" pitchFamily="34" charset="-122"/>
-                <a:cs typeface="Meiryo" pitchFamily="34" charset="-120"/>
-              </a:rPr>
-              <a:t>約18〜20</a:t>
-            </a:r>
-            <a:pPr indent="0" marL="0">
-              <a:buNone/>
-            </a:pPr>
-            <a:r>
-              <a:rPr lang="en-US" sz="1200" dirty="0">
-                <a:solidFill>
-                  <a:srgbClr val="CADCFC"/>
-                </a:solidFill>
-                <a:latin typeface="Meiryo" pitchFamily="34" charset="0"/>
-                <a:ea typeface="Meiryo" pitchFamily="34" charset="-122"/>
-                <a:cs typeface="Meiryo" pitchFamily="34" charset="-120"/>
-              </a:rPr>
-              <a:t>万件</a:t>
-            </a:r>
-            <a:endParaRPr lang="en-US" sz="1100" dirty="0"/>
+              <a:t>A　IBで実施された取引</a:t>
+            </a:r>
+            <a:endParaRPr lang="en-US" sz="1350" dirty="0"/>
           </a:p>
         </p:txBody>
       </p:sp>
@@ -4259,22 +4730,22 @@
         </p:nvSpPr>
         <p:spPr>
           <a:xfrm>
-            <a:off x="5029200" y="1591056"/>
-            <a:ext cx="6656832" cy="2148840"/>
+            <a:off x="6611112" y="3456432"/>
+            <a:ext cx="4818888" cy="841248"/>
           </a:xfrm>
           <a:prstGeom prst="roundRect">
             <a:avLst>
-              <a:gd name="adj" fmla="val 2128"/>
+              <a:gd name="adj" fmla="val 6522"/>
             </a:avLst>
           </a:prstGeom>
           <a:solidFill>
-            <a:srgbClr val="FAFBFD"/>
+            <a:srgbClr val="2A4A7A"/>
           </a:solidFill>
-          <a:ln w="15875">
+          <a:ln w="6350">
             <a:solidFill>
               <a:srgbClr val="2A4A7A"/>
             </a:solidFill>
-            <a:prstDash val="dash"/>
+            <a:prstDash val="solid"/>
           </a:ln>
         </p:spPr>
       </p:sp>
@@ -4286,198 +4757,148 @@
         </p:nvSpPr>
         <p:spPr>
           <a:xfrm>
-            <a:off x="5303520" y="2194560"/>
-            <a:ext cx="6108192" cy="365760"/>
-          </a:xfrm>
-          <a:prstGeom prst="rect">
-            <a:avLst/>
-          </a:prstGeom>
-          <a:noFill/>
-          <a:ln/>
-        </p:spPr>
-        <p:txBody>
-          <a:bodyPr wrap="square" lIns="0" tIns="0" rIns="0" bIns="0" rtlCol="0" anchor="ctr"/>
-          <a:lstStyle/>
-          <a:p>
-            <a:pPr algn="ctr" indent="0" marL="0">
-              <a:buNone/>
-            </a:pPr>
-            <a:r>
-              <a:rPr lang="en-US" sz="1200" b="1" dirty="0">
-                <a:solidFill>
-                  <a:srgbClr val="D9482F"/>
-                </a:solidFill>
-                <a:latin typeface="Meiryo" pitchFamily="34" charset="0"/>
-                <a:ea typeface="Meiryo" pitchFamily="34" charset="-122"/>
-                <a:cs typeface="Meiryo" pitchFamily="34" charset="-120"/>
-              </a:rPr>
-              <a:t>グラフ①　</a:t>
-            </a:r>
-            <a:pPr algn="ctr" indent="0" marL="0">
-              <a:buNone/>
-            </a:pPr>
-            <a:r>
-              <a:rPr lang="en-US" sz="1300" b="1" dirty="0">
-                <a:solidFill>
-                  <a:srgbClr val="13294B"/>
-                </a:solidFill>
-                <a:latin typeface="Meiryo" pitchFamily="34" charset="0"/>
-                <a:ea typeface="Meiryo" pitchFamily="34" charset="-122"/>
-                <a:cs typeface="Meiryo" pitchFamily="34" charset="-120"/>
-              </a:rPr>
-              <a:t>IB利用件数の月次推移</a:t>
-            </a:r>
-            <a:endParaRPr lang="en-US" sz="1200" dirty="0"/>
-          </a:p>
-        </p:txBody>
-      </p:sp>
-      <p:sp>
-        <p:nvSpPr>
-          <p:cNvPr id="23" name="Text 21"/>
-          <p:cNvSpPr txBox="1"/>
-          <p:nvPr/>
-        </p:nvSpPr>
-        <p:spPr>
-          <a:xfrm>
-            <a:off x="5486400" y="2596896"/>
-            <a:ext cx="5742432" cy="548640"/>
-          </a:xfrm>
-          <a:prstGeom prst="rect">
-            <a:avLst/>
-          </a:prstGeom>
-          <a:noFill/>
-          <a:ln/>
-        </p:spPr>
-        <p:txBody>
-          <a:bodyPr wrap="square" lIns="0" tIns="0" rIns="0" bIns="0" rtlCol="0" anchor="t"/>
+            <a:off x="6611112" y="3456432"/>
+            <a:ext cx="4818888" cy="841248"/>
+          </a:xfrm>
+          <a:prstGeom prst="rect">
+            <a:avLst/>
+          </a:prstGeom>
+          <a:noFill/>
+          <a:ln/>
+        </p:spPr>
+        <p:txBody>
+          <a:bodyPr wrap="square" lIns="0" tIns="0" rIns="0" bIns="0" rtlCol="0" anchor="ctr"/>
           <a:lstStyle/>
           <a:p>
             <a:pPr algn="ctr" indent="0" marL="0">
               <a:lnSpc>
-                <a:spcPct val="125000"/>
+                <a:spcPct val="115000"/>
               </a:lnSpc>
               <a:buNone/>
             </a:pPr>
             <a:r>
-              <a:rPr lang="en-US" sz="1150" dirty="0">
-                <a:solidFill>
-                  <a:srgbClr val="5D6E82"/>
-                </a:solidFill>
-                <a:latin typeface="Meiryo" pitchFamily="34" charset="0"/>
-                <a:ea typeface="Meiryo" pitchFamily="34" charset="-122"/>
-                <a:cs typeface="Meiryo" pitchFamily="34" charset="-120"/>
-              </a:rPr>
-              <a:t>2025年4・5・6月 と 2026年4・5・6月 を並べた棒グラフ（縦軸：件数）</a:t>
-            </a:r>
-            <a:endParaRPr lang="en-US" sz="1150" dirty="0"/>
-          </a:p>
-        </p:txBody>
-      </p:sp>
-      <p:sp>
-        <p:nvSpPr>
-          <p:cNvPr id="24" name="Shape 22"/>
+              <a:rPr lang="en-US" sz="1350" b="1" dirty="0">
+                <a:solidFill>
+                  <a:srgbClr val="FFFFFF"/>
+                </a:solidFill>
+                <a:latin typeface="Meiryo" pitchFamily="34" charset="0"/>
+                <a:ea typeface="Meiryo" pitchFamily="34" charset="-122"/>
+                <a:cs typeface="Meiryo" pitchFamily="34" charset="-120"/>
+              </a:rPr>
+              <a:t>B　ATMで実施された取引</a:t>
+            </a:r>
+            <a:endParaRPr lang="en-US" sz="1350" dirty="0"/>
+          </a:p>
+          <a:p>
+            <a:pPr algn="ctr" indent="0" marL="0">
+              <a:lnSpc>
+                <a:spcPct val="115000"/>
+              </a:lnSpc>
+              <a:buNone/>
+            </a:pPr>
+            <a:r>
+              <a:rPr lang="en-US" sz="1350" b="1" dirty="0">
+                <a:solidFill>
+                  <a:srgbClr val="FFFFFF"/>
+                </a:solidFill>
+                <a:latin typeface="Meiryo" pitchFamily="34" charset="0"/>
+                <a:ea typeface="Meiryo" pitchFamily="34" charset="-122"/>
+                <a:cs typeface="Meiryo" pitchFamily="34" charset="-120"/>
+              </a:rPr>
+              <a:t>（IBに移りうる部分）</a:t>
+            </a:r>
+            <a:endParaRPr lang="en-US" sz="1350" dirty="0"/>
+          </a:p>
+        </p:txBody>
+      </p:sp>
+      <p:sp>
+        <p:nvSpPr>
+          <p:cNvPr id="23" name="Shape 21"/>
           <p:cNvSpPr/>
           <p:nvPr/>
         </p:nvSpPr>
         <p:spPr>
           <a:xfrm>
-            <a:off x="5029200" y="3977640"/>
-            <a:ext cx="6656832" cy="2148840"/>
+            <a:off x="6355080" y="4572000"/>
+            <a:ext cx="5330952" cy="658368"/>
           </a:xfrm>
           <a:prstGeom prst="roundRect">
             <a:avLst>
-              <a:gd name="adj" fmla="val 2128"/>
+              <a:gd name="adj" fmla="val 8333"/>
             </a:avLst>
           </a:prstGeom>
           <a:solidFill>
-            <a:srgbClr val="FAFBFD"/>
+            <a:srgbClr val="F0F2F5"/>
           </a:solidFill>
-          <a:ln w="15875">
+          <a:ln w="12700">
             <a:solidFill>
-              <a:srgbClr val="2A4A7A"/>
+              <a:srgbClr val="D3DCE8"/>
             </a:solidFill>
-            <a:prstDash val="dash"/>
+            <a:prstDash val="solid"/>
           </a:ln>
         </p:spPr>
       </p:sp>
       <p:sp>
         <p:nvSpPr>
+          <p:cNvPr id="24" name="Text 22"/>
+          <p:cNvSpPr txBox="1"/>
+          <p:nvPr/>
+        </p:nvSpPr>
+        <p:spPr>
+          <a:xfrm>
+            <a:off x="6537960" y="4572000"/>
+            <a:ext cx="4965192" cy="658368"/>
+          </a:xfrm>
+          <a:prstGeom prst="rect">
+            <a:avLst/>
+          </a:prstGeom>
+          <a:noFill/>
+          <a:ln/>
+        </p:spPr>
+        <p:txBody>
+          <a:bodyPr wrap="square" lIns="0" tIns="0" rIns="0" bIns="0" rtlCol="0" anchor="ctr"/>
+          <a:lstStyle/>
+          <a:p>
+            <a:pPr algn="ctr" indent="0" marL="0">
+              <a:buNone/>
+            </a:pPr>
+            <a:r>
+              <a:rPr lang="en-US" sz="1150" dirty="0">
+                <a:solidFill>
+                  <a:srgbClr val="5D6E82"/>
+                </a:solidFill>
+                <a:latin typeface="Meiryo" pitchFamily="34" charset="0"/>
+                <a:ea typeface="Meiryo" pitchFamily="34" charset="-122"/>
+                <a:cs typeface="Meiryo" pitchFamily="34" charset="-120"/>
+              </a:rPr>
+              <a:t>ATMでしか行えない取引（現金の入出金 など）　→　今回は対象外</a:t>
+            </a:r>
+            <a:endParaRPr lang="en-US" sz="1150" dirty="0"/>
+          </a:p>
+        </p:txBody>
+      </p:sp>
+      <p:sp>
+        <p:nvSpPr>
           <p:cNvPr id="25" name="Text 23"/>
           <p:cNvSpPr txBox="1"/>
           <p:nvPr/>
         </p:nvSpPr>
         <p:spPr>
           <a:xfrm>
-            <a:off x="5303520" y="4581144"/>
-            <a:ext cx="6108192" cy="365760"/>
-          </a:xfrm>
-          <a:prstGeom prst="rect">
-            <a:avLst/>
-          </a:prstGeom>
-          <a:noFill/>
-          <a:ln/>
-        </p:spPr>
-        <p:txBody>
-          <a:bodyPr wrap="square" lIns="0" tIns="0" rIns="0" bIns="0" rtlCol="0" anchor="ctr"/>
-          <a:lstStyle/>
-          <a:p>
-            <a:pPr algn="ctr" indent="0" marL="0">
-              <a:buNone/>
-            </a:pPr>
-            <a:r>
-              <a:rPr lang="en-US" sz="1200" b="1" dirty="0">
-                <a:solidFill>
-                  <a:srgbClr val="D9482F"/>
-                </a:solidFill>
-                <a:latin typeface="Meiryo" pitchFamily="34" charset="0"/>
-                <a:ea typeface="Meiryo" pitchFamily="34" charset="-122"/>
-                <a:cs typeface="Meiryo" pitchFamily="34" charset="-120"/>
-              </a:rPr>
-              <a:t>グラフ②　</a:t>
-            </a:r>
-            <a:pPr algn="ctr" indent="0" marL="0">
-              <a:buNone/>
-            </a:pPr>
-            <a:r>
-              <a:rPr lang="en-US" sz="1300" b="1" dirty="0">
-                <a:solidFill>
-                  <a:srgbClr val="13294B"/>
-                </a:solidFill>
-                <a:latin typeface="Meiryo" pitchFamily="34" charset="0"/>
-                <a:ea typeface="Meiryo" pitchFamily="34" charset="-122"/>
-                <a:cs typeface="Meiryo" pitchFamily="34" charset="-120"/>
-              </a:rPr>
-              <a:t>IB と ATM（IB代替可能取引）の比較</a:t>
-            </a:r>
-            <a:endParaRPr lang="en-US" sz="1200" dirty="0"/>
-          </a:p>
-        </p:txBody>
-      </p:sp>
-      <p:sp>
-        <p:nvSpPr>
-          <p:cNvPr id="26" name="Text 24"/>
-          <p:cNvSpPr txBox="1"/>
-          <p:nvPr/>
-        </p:nvSpPr>
-        <p:spPr>
-          <a:xfrm>
-            <a:off x="5486400" y="4983480"/>
-            <a:ext cx="5742432" cy="548640"/>
-          </a:xfrm>
-          <a:prstGeom prst="rect">
-            <a:avLst/>
-          </a:prstGeom>
-          <a:noFill/>
-          <a:ln/>
-        </p:spPr>
-        <p:txBody>
-          <a:bodyPr wrap="square" lIns="0" tIns="0" rIns="0" bIns="0" rtlCol="0" anchor="t"/>
-          <a:lstStyle/>
-          <a:p>
-            <a:pPr algn="ctr" indent="0" marL="0">
-              <a:lnSpc>
-                <a:spcPct val="125000"/>
-              </a:lnSpc>
+            <a:off x="6355080" y="5376672"/>
+            <a:ext cx="5330952" cy="365760"/>
+          </a:xfrm>
+          <a:prstGeom prst="rect">
+            <a:avLst/>
+          </a:prstGeom>
+          <a:noFill/>
+          <a:ln/>
+        </p:spPr>
+        <p:txBody>
+          <a:bodyPr wrap="square" lIns="0" tIns="0" rIns="0" bIns="0" rtlCol="0" anchor="ctr"/>
+          <a:lstStyle/>
+          <a:p>
+            <a:pPr indent="0" marL="0">
               <a:buNone/>
             </a:pPr>
             <a:r>
@@ -4489,7 +4910,7 @@
                 <a:ea typeface="Meiryo" pitchFamily="34" charset="-122"/>
                 <a:cs typeface="Meiryo" pitchFamily="34" charset="-120"/>
               </a:rPr>
-              <a:t>同じ月について、IBで行われた件数とATMで行われたIB代替可能取引の件数を横並びにした棒グラフ</a:t>
+              <a:t>対象期間：2025年4〜6月／2026年4〜6月（利用できたデータの範囲、計6か月）</a:t>
             </a:r>
             <a:endParaRPr lang="en-US" sz="1150" dirty="0"/>
           </a:p>
@@ -4497,52 +4918,13 @@
       </p:sp>
       <p:sp>
         <p:nvSpPr>
-          <p:cNvPr id="27" name="Text 25"/>
-          <p:cNvSpPr txBox="1"/>
-          <p:nvPr/>
-        </p:nvSpPr>
-        <p:spPr>
-          <a:xfrm>
-            <a:off x="5029200" y="6199632"/>
-            <a:ext cx="5760720" cy="256032"/>
-          </a:xfrm>
-          <a:prstGeom prst="rect">
-            <a:avLst/>
-          </a:prstGeom>
-          <a:noFill/>
-          <a:ln/>
-        </p:spPr>
-        <p:txBody>
-          <a:bodyPr wrap="square" lIns="0" tIns="0" rIns="0" bIns="0" rtlCol="0" anchor="ctr"/>
-          <a:lstStyle/>
-          <a:p>
-            <a:pPr indent="0" marL="0">
-              <a:buNone/>
-            </a:pPr>
-            <a:r>
-              <a:rPr lang="en-US" sz="1000" dirty="0">
-                <a:solidFill>
-                  <a:srgbClr val="9AA9BA"/>
-                </a:solidFill>
-                <a:latin typeface="Meiryo" pitchFamily="34" charset="0"/>
-                <a:ea typeface="Meiryo" pitchFamily="34" charset="-122"/>
-                <a:cs typeface="Meiryo" pitchFamily="34" charset="-120"/>
-              </a:rPr>
-              <a:t>※ グラフはDYNATREKの集計結果を貼り付ける（上の枠内）</a:t>
-            </a:r>
-            <a:endParaRPr lang="en-US" sz="1000" dirty="0"/>
-          </a:p>
-        </p:txBody>
-      </p:sp>
-      <p:sp>
-        <p:nvSpPr>
-          <p:cNvPr id="29" name="Text 26"/>
-          <p:cNvSpPr txBox="1"/>
-          <p:nvPr/>
-        </p:nvSpPr>
-        <p:spPr>
-          <a:xfrm>
-            <a:off x="11411712" y="6382512"/>
+          <p:cNvPr id="27" name="Text 24"/>
+          <p:cNvSpPr txBox="1"/>
+          <p:nvPr/>
+        </p:nvSpPr>
+        <p:spPr>
+          <a:xfrm>
+            <a:off x="11411712" y="6419088"/>
             <a:ext cx="365760" cy="274320"/>
           </a:xfrm>
           <a:prstGeom prst="rect">
@@ -4626,7 +5008,7 @@
           <a:bodyPr wrap="square" lIns="0" tIns="0" rIns="0" bIns="0" rtlCol="0" anchor="ctr"/>
           <a:lstStyle/>
           <a:p>
-            <a:pPr algn="l" indent="0" marL="0">
+            <a:pPr indent="0" marL="0">
               <a:buNone/>
             </a:pPr>
             <a:r>
@@ -4638,7 +5020,7 @@
                 <a:ea typeface="Meiryo" pitchFamily="34" charset="-122"/>
                 <a:cs typeface="Meiryo" pitchFamily="34" charset="-120"/>
               </a:rPr>
-              <a:t>「増えた」とは言えるが、「施策の効果」とは言い切れない</a:t>
+              <a:t>やったことは、画面で条件を指定して集計しただけ</a:t>
             </a:r>
             <a:endParaRPr lang="en-US" sz="2600" dirty="0"/>
           </a:p>
@@ -4665,7 +5047,7 @@
           <a:bodyPr wrap="square" lIns="0" tIns="0" rIns="0" bIns="0" rtlCol="0" anchor="ctr"/>
           <a:lstStyle/>
           <a:p>
-            <a:pPr algn="l" indent="0" marL="0">
+            <a:pPr indent="0" marL="0">
               <a:buNone/>
             </a:pPr>
             <a:r>
@@ -4677,7 +5059,7 @@
                 <a:ea typeface="Meiryo" pitchFamily="34" charset="-122"/>
                 <a:cs typeface="Meiryo" pitchFamily="34" charset="-120"/>
               </a:rPr>
-              <a:t>数字から言えることと言えないことを分けることも、分析の一部だと考えた。</a:t>
+              <a:t>統計モデルや機械学習は使っていない。特別な操作も必要なかった。</a:t>
             </a:r>
             <a:endParaRPr lang="en-US" sz="1350" dirty="0"/>
           </a:p>
@@ -4685,18 +5067,57 @@
       </p:sp>
       <p:sp>
         <p:nvSpPr>
-          <p:cNvPr id="4" name="Shape 2"/>
+          <p:cNvPr id="4" name="Text 2"/>
+          <p:cNvSpPr txBox="1"/>
+          <p:nvPr/>
+        </p:nvSpPr>
+        <p:spPr>
+          <a:xfrm>
+            <a:off x="502920" y="1536192"/>
+            <a:ext cx="3291840" cy="292608"/>
+          </a:xfrm>
+          <a:prstGeom prst="rect">
+            <a:avLst/>
+          </a:prstGeom>
+          <a:noFill/>
+          <a:ln/>
+        </p:spPr>
+        <p:txBody>
+          <a:bodyPr wrap="square" lIns="0" tIns="0" rIns="0" bIns="0" rtlCol="0" anchor="ctr"/>
+          <a:lstStyle/>
+          <a:p>
+            <a:pPr indent="0" marL="0">
+              <a:buNone/>
+            </a:pPr>
+            <a:r>
+              <a:rPr lang="en-US" sz="1400" b="1" dirty="0">
+                <a:solidFill>
+                  <a:srgbClr val="13294B"/>
+                </a:solidFill>
+                <a:latin typeface="Meiryo" pitchFamily="34" charset="0"/>
+                <a:ea typeface="Meiryo" pitchFamily="34" charset="-122"/>
+                <a:cs typeface="Meiryo" pitchFamily="34" charset="-120"/>
+              </a:rPr>
+              <a:t>指定した条件</a:t>
+            </a:r>
+            <a:endParaRPr lang="en-US" sz="1400" dirty="0"/>
+          </a:p>
+        </p:txBody>
+      </p:sp>
+      <p:sp>
+        <p:nvSpPr>
+          <p:cNvPr id="5" name="Shape 3"/>
           <p:cNvSpPr/>
           <p:nvPr/>
         </p:nvSpPr>
         <p:spPr>
           <a:xfrm>
-            <a:off x="502920" y="1536192"/>
-            <a:ext cx="3520440" cy="4114800"/>
+            <a:off x="502920" y="1901952"/>
+            <a:ext cx="3291840" cy="804672"/>
           </a:xfrm>
           <a:prstGeom prst="roundRect">
             <a:avLst>
-              <a:gd name="adj" fmla="val 1558"/>
+              <a:gd name="adj" fmla="val 6818"/>
             </a:avLst>
           </a:prstGeom>
           <a:solidFill>
@@ -4712,14 +5133,14 @@
       </p:sp>
       <p:sp>
         <p:nvSpPr>
-          <p:cNvPr id="5" name="Shape 3"/>
+          <p:cNvPr id="6" name="Shape 4"/>
           <p:cNvSpPr/>
           <p:nvPr/>
         </p:nvSpPr>
         <p:spPr>
           <a:xfrm>
-            <a:off x="722376" y="1755648"/>
-            <a:ext cx="365760" cy="365760"/>
+            <a:off x="685800" y="2139696"/>
+            <a:ext cx="329184" cy="329184"/>
           </a:xfrm>
           <a:prstGeom prst="ellipse">
             <a:avLst/>
@@ -4737,14 +5158,14 @@
       </p:sp>
       <p:sp>
         <p:nvSpPr>
-          <p:cNvPr id="6" name="Text 4"/>
-          <p:cNvSpPr txBox="1"/>
-          <p:nvPr/>
-        </p:nvSpPr>
-        <p:spPr>
-          <a:xfrm>
-            <a:off x="722376" y="1755648"/>
-            <a:ext cx="365760" cy="365760"/>
+          <p:cNvPr id="7" name="Text 5"/>
+          <p:cNvSpPr txBox="1"/>
+          <p:nvPr/>
+        </p:nvSpPr>
+        <p:spPr>
+          <a:xfrm>
+            <a:off x="685800" y="2139696"/>
+            <a:ext cx="329184" cy="329184"/>
           </a:xfrm>
           <a:prstGeom prst="rect">
             <a:avLst/>
@@ -4768,7 +5189,7 @@
                 <a:ea typeface="Meiryo" pitchFamily="34" charset="-122"/>
                 <a:cs typeface="Meiryo" pitchFamily="34" charset="-120"/>
               </a:rPr>
-              <a:t>○</a:t>
+              <a:t>1</a:t>
             </a:r>
             <a:endParaRPr lang="en-US" sz="1300" dirty="0"/>
           </a:p>
@@ -4776,14 +5197,14 @@
       </p:sp>
       <p:sp>
         <p:nvSpPr>
-          <p:cNvPr id="7" name="Text 5"/>
-          <p:cNvSpPr txBox="1"/>
-          <p:nvPr/>
-        </p:nvSpPr>
-        <p:spPr>
-          <a:xfrm>
-            <a:off x="1197864" y="1719072"/>
-            <a:ext cx="2606040" cy="457200"/>
+          <p:cNvPr id="8" name="Text 6"/>
+          <p:cNvSpPr txBox="1"/>
+          <p:nvPr/>
+        </p:nvSpPr>
+        <p:spPr>
+          <a:xfrm>
+            <a:off x="1106424" y="1975104"/>
+            <a:ext cx="2487168" cy="658368"/>
           </a:xfrm>
           <a:prstGeom prst="rect">
             <a:avLst/>
@@ -4796,56 +5217,13 @@
           <a:lstStyle/>
           <a:p>
             <a:pPr indent="0" marL="0">
-              <a:buNone/>
-            </a:pPr>
-            <a:r>
-              <a:rPr lang="en-US" sz="1350" b="1" dirty="0">
-                <a:solidFill>
-                  <a:srgbClr val="13294B"/>
-                </a:solidFill>
-                <a:latin typeface="Meiryo" pitchFamily="34" charset="0"/>
-                <a:ea typeface="Meiryo" pitchFamily="34" charset="-122"/>
-                <a:cs typeface="Meiryo" pitchFamily="34" charset="-120"/>
-              </a:rPr>
-              <a:t>このデータから言えること</a:t>
-            </a:r>
-            <a:endParaRPr lang="en-US" sz="1350" dirty="0"/>
-          </a:p>
-        </p:txBody>
-      </p:sp>
-      <p:sp>
-        <p:nvSpPr>
-          <p:cNvPr id="8" name="Text 6"/>
-          <p:cNvSpPr txBox="1"/>
-          <p:nvPr/>
-        </p:nvSpPr>
-        <p:spPr>
-          <a:xfrm>
-            <a:off x="758952" y="2322576"/>
-            <a:ext cx="3008376" cy="3218688"/>
-          </a:xfrm>
-          <a:prstGeom prst="rect">
-            <a:avLst/>
-          </a:prstGeom>
-          <a:noFill/>
-          <a:ln/>
-        </p:spPr>
-        <p:txBody>
-          <a:bodyPr wrap="square" lIns="0" tIns="0" rIns="0" bIns="0" rtlCol="0" anchor="t"/>
-          <a:lstStyle/>
-          <a:p>
-            <a:pPr marL="342900" indent="-342900">
               <a:lnSpc>
-                <a:spcPct val="132000"/>
+                <a:spcPct val="125000"/>
               </a:lnSpc>
-              <a:spcAft>
-                <a:spcPts val="1000"/>
-              </a:spcAft>
-              <a:buSzPct val="100000"/>
-              <a:buChar char="▪"/>
-            </a:pPr>
-            <a:r>
-              <a:rPr lang="en-US" sz="1200" dirty="0">
+              <a:buNone/>
+            </a:pPr>
+            <a:r>
+              <a:rPr lang="en-US" sz="1100" dirty="0">
                 <a:solidFill>
                   <a:srgbClr val="1E2A38"/>
                 </a:solidFill>
@@ -4853,23 +5231,19 @@
                 <a:ea typeface="Meiryo" pitchFamily="34" charset="-122"/>
                 <a:cs typeface="Meiryo" pitchFamily="34" charset="-120"/>
               </a:rPr>
-              <a:t>前年の同時期（4〜6月）と比べて、2026年のIB利用件数は増えている。</a:t>
-            </a:r>
-            <a:endParaRPr lang="en-US" sz="1200" dirty="0"/>
-          </a:p>
-          <a:p>
-            <a:pPr marL="342900" indent="-342900">
+              <a:t>期間</a:t>
+            </a:r>
+            <a:endParaRPr lang="en-US" sz="1100" dirty="0"/>
+          </a:p>
+          <a:p>
+            <a:pPr indent="0" marL="0">
               <a:lnSpc>
-                <a:spcPct val="132000"/>
+                <a:spcPct val="125000"/>
               </a:lnSpc>
-              <a:spcAft>
-                <a:spcPts val="1000"/>
-              </a:spcAft>
-              <a:buSzPct val="100000"/>
-              <a:buChar char="▪"/>
-            </a:pPr>
-            <a:r>
-              <a:rPr lang="en-US" sz="1200" dirty="0">
+              <a:buNone/>
+            </a:pPr>
+            <a:r>
+              <a:rPr lang="en-US" sz="1100" dirty="0">
                 <a:solidFill>
                   <a:srgbClr val="1E2A38"/>
                 </a:solidFill>
@@ -4877,9 +5251,9 @@
                 <a:ea typeface="Meiryo" pitchFamily="34" charset="-122"/>
                 <a:cs typeface="Meiryo" pitchFamily="34" charset="-120"/>
               </a:rPr>
-              <a:t>1か月あたり 約15〜16万件 → 約18〜20万件。</a:t>
-            </a:r>
-            <a:endParaRPr lang="en-US" sz="1200" dirty="0"/>
+              <a:t>2025年4〜6月／2026年4〜6月</a:t>
+            </a:r>
+            <a:endParaRPr lang="en-US" sz="1100" dirty="0"/>
           </a:p>
         </p:txBody>
       </p:sp>
@@ -4891,20 +5265,20 @@
         </p:nvSpPr>
         <p:spPr>
           <a:xfrm>
-            <a:off x="4288536" y="1536192"/>
-            <a:ext cx="3520440" cy="4114800"/>
+            <a:off x="502920" y="2816352"/>
+            <a:ext cx="3291840" cy="804672"/>
           </a:xfrm>
           <a:prstGeom prst="roundRect">
             <a:avLst>
-              <a:gd name="adj" fmla="val 1558"/>
+              <a:gd name="adj" fmla="val 6818"/>
             </a:avLst>
           </a:prstGeom>
           <a:solidFill>
-            <a:srgbClr val="FBEAE4"/>
+            <a:srgbClr val="EEF2F8"/>
           </a:solidFill>
           <a:ln w="6350">
             <a:solidFill>
-              <a:srgbClr val="FBEAE4"/>
+              <a:srgbClr val="EEF2F8"/>
             </a:solidFill>
             <a:prstDash val="solid"/>
           </a:ln>
@@ -4918,10 +5292,500 @@
         </p:nvSpPr>
         <p:spPr>
           <a:xfrm>
-            <a:off x="4507992" y="1755648"/>
-            <a:ext cx="365760" cy="365760"/>
+            <a:off x="685800" y="3054096"/>
+            <a:ext cx="329184" cy="329184"/>
           </a:xfrm>
           <a:prstGeom prst="ellipse">
+            <a:avLst/>
+          </a:prstGeom>
+          <a:solidFill>
+            <a:srgbClr val="13294B"/>
+          </a:solidFill>
+          <a:ln w="6350">
+            <a:solidFill>
+              <a:srgbClr val="13294B"/>
+            </a:solidFill>
+            <a:prstDash val="solid"/>
+          </a:ln>
+        </p:spPr>
+      </p:sp>
+      <p:sp>
+        <p:nvSpPr>
+          <p:cNvPr id="11" name="Text 9"/>
+          <p:cNvSpPr txBox="1"/>
+          <p:nvPr/>
+        </p:nvSpPr>
+        <p:spPr>
+          <a:xfrm>
+            <a:off x="685800" y="3054096"/>
+            <a:ext cx="329184" cy="329184"/>
+          </a:xfrm>
+          <a:prstGeom prst="rect">
+            <a:avLst/>
+          </a:prstGeom>
+          <a:noFill/>
+          <a:ln/>
+        </p:spPr>
+        <p:txBody>
+          <a:bodyPr wrap="square" lIns="0" tIns="0" rIns="0" bIns="0" rtlCol="0" anchor="ctr"/>
+          <a:lstStyle/>
+          <a:p>
+            <a:pPr algn="ctr" indent="0" marL="0">
+              <a:buNone/>
+            </a:pPr>
+            <a:r>
+              <a:rPr lang="en-US" sz="1300" b="1" dirty="0">
+                <a:solidFill>
+                  <a:srgbClr val="FFFFFF"/>
+                </a:solidFill>
+                <a:latin typeface="Meiryo" pitchFamily="34" charset="0"/>
+                <a:ea typeface="Meiryo" pitchFamily="34" charset="-122"/>
+                <a:cs typeface="Meiryo" pitchFamily="34" charset="-120"/>
+              </a:rPr>
+              <a:t>2</a:t>
+            </a:r>
+            <a:endParaRPr lang="en-US" sz="1300" dirty="0"/>
+          </a:p>
+        </p:txBody>
+      </p:sp>
+      <p:sp>
+        <p:nvSpPr>
+          <p:cNvPr id="12" name="Text 10"/>
+          <p:cNvSpPr txBox="1"/>
+          <p:nvPr/>
+        </p:nvSpPr>
+        <p:spPr>
+          <a:xfrm>
+            <a:off x="1106424" y="2889504"/>
+            <a:ext cx="2487168" cy="658368"/>
+          </a:xfrm>
+          <a:prstGeom prst="rect">
+            <a:avLst/>
+          </a:prstGeom>
+          <a:noFill/>
+          <a:ln/>
+        </p:spPr>
+        <p:txBody>
+          <a:bodyPr wrap="square" lIns="0" tIns="0" rIns="0" bIns="0" rtlCol="0" anchor="ctr"/>
+          <a:lstStyle/>
+          <a:p>
+            <a:pPr indent="0" marL="0">
+              <a:lnSpc>
+                <a:spcPct val="125000"/>
+              </a:lnSpc>
+              <a:buNone/>
+            </a:pPr>
+            <a:r>
+              <a:rPr lang="en-US" sz="1100" dirty="0">
+                <a:solidFill>
+                  <a:srgbClr val="1E2A38"/>
+                </a:solidFill>
+                <a:latin typeface="Meiryo" pitchFamily="34" charset="0"/>
+                <a:ea typeface="Meiryo" pitchFamily="34" charset="-122"/>
+                <a:cs typeface="Meiryo" pitchFamily="34" charset="-120"/>
+              </a:rPr>
+              <a:t>取引の種類</a:t>
+            </a:r>
+            <a:endParaRPr lang="en-US" sz="1100" dirty="0"/>
+          </a:p>
+          <a:p>
+            <a:pPr indent="0" marL="0">
+              <a:lnSpc>
+                <a:spcPct val="125000"/>
+              </a:lnSpc>
+              <a:buNone/>
+            </a:pPr>
+            <a:r>
+              <a:rPr lang="en-US" sz="1100" dirty="0">
+                <a:solidFill>
+                  <a:srgbClr val="1E2A38"/>
+                </a:solidFill>
+                <a:latin typeface="Meiryo" pitchFamily="34" charset="0"/>
+                <a:ea typeface="Meiryo" pitchFamily="34" charset="-122"/>
+                <a:cs typeface="Meiryo" pitchFamily="34" charset="-120"/>
+              </a:rPr>
+              <a:t>振込・振替など、IBでも行える取引</a:t>
+            </a:r>
+            <a:endParaRPr lang="en-US" sz="1100" dirty="0"/>
+          </a:p>
+        </p:txBody>
+      </p:sp>
+      <p:sp>
+        <p:nvSpPr>
+          <p:cNvPr id="13" name="Shape 11"/>
+          <p:cNvSpPr/>
+          <p:nvPr/>
+        </p:nvSpPr>
+        <p:spPr>
+          <a:xfrm>
+            <a:off x="502920" y="3730752"/>
+            <a:ext cx="3291840" cy="804672"/>
+          </a:xfrm>
+          <a:prstGeom prst="roundRect">
+            <a:avLst>
+              <a:gd name="adj" fmla="val 6818"/>
+            </a:avLst>
+          </a:prstGeom>
+          <a:solidFill>
+            <a:srgbClr val="EEF2F8"/>
+          </a:solidFill>
+          <a:ln w="6350">
+            <a:solidFill>
+              <a:srgbClr val="EEF2F8"/>
+            </a:solidFill>
+            <a:prstDash val="solid"/>
+          </a:ln>
+        </p:spPr>
+      </p:sp>
+      <p:sp>
+        <p:nvSpPr>
+          <p:cNvPr id="14" name="Shape 12"/>
+          <p:cNvSpPr/>
+          <p:nvPr/>
+        </p:nvSpPr>
+        <p:spPr>
+          <a:xfrm>
+            <a:off x="685800" y="3968496"/>
+            <a:ext cx="329184" cy="329184"/>
+          </a:xfrm>
+          <a:prstGeom prst="ellipse">
+            <a:avLst/>
+          </a:prstGeom>
+          <a:solidFill>
+            <a:srgbClr val="13294B"/>
+          </a:solidFill>
+          <a:ln w="6350">
+            <a:solidFill>
+              <a:srgbClr val="13294B"/>
+            </a:solidFill>
+            <a:prstDash val="solid"/>
+          </a:ln>
+        </p:spPr>
+      </p:sp>
+      <p:sp>
+        <p:nvSpPr>
+          <p:cNvPr id="15" name="Text 13"/>
+          <p:cNvSpPr txBox="1"/>
+          <p:nvPr/>
+        </p:nvSpPr>
+        <p:spPr>
+          <a:xfrm>
+            <a:off x="685800" y="3968496"/>
+            <a:ext cx="329184" cy="329184"/>
+          </a:xfrm>
+          <a:prstGeom prst="rect">
+            <a:avLst/>
+          </a:prstGeom>
+          <a:noFill/>
+          <a:ln/>
+        </p:spPr>
+        <p:txBody>
+          <a:bodyPr wrap="square" lIns="0" tIns="0" rIns="0" bIns="0" rtlCol="0" anchor="ctr"/>
+          <a:lstStyle/>
+          <a:p>
+            <a:pPr algn="ctr" indent="0" marL="0">
+              <a:buNone/>
+            </a:pPr>
+            <a:r>
+              <a:rPr lang="en-US" sz="1300" b="1" dirty="0">
+                <a:solidFill>
+                  <a:srgbClr val="FFFFFF"/>
+                </a:solidFill>
+                <a:latin typeface="Meiryo" pitchFamily="34" charset="0"/>
+                <a:ea typeface="Meiryo" pitchFamily="34" charset="-122"/>
+                <a:cs typeface="Meiryo" pitchFamily="34" charset="-120"/>
+              </a:rPr>
+              <a:t>3</a:t>
+            </a:r>
+            <a:endParaRPr lang="en-US" sz="1300" dirty="0"/>
+          </a:p>
+        </p:txBody>
+      </p:sp>
+      <p:sp>
+        <p:nvSpPr>
+          <p:cNvPr id="16" name="Text 14"/>
+          <p:cNvSpPr txBox="1"/>
+          <p:nvPr/>
+        </p:nvSpPr>
+        <p:spPr>
+          <a:xfrm>
+            <a:off x="1106424" y="3803904"/>
+            <a:ext cx="2487168" cy="658368"/>
+          </a:xfrm>
+          <a:prstGeom prst="rect">
+            <a:avLst/>
+          </a:prstGeom>
+          <a:noFill/>
+          <a:ln/>
+        </p:spPr>
+        <p:txBody>
+          <a:bodyPr wrap="square" lIns="0" tIns="0" rIns="0" bIns="0" rtlCol="0" anchor="ctr"/>
+          <a:lstStyle/>
+          <a:p>
+            <a:pPr indent="0" marL="0">
+              <a:lnSpc>
+                <a:spcPct val="125000"/>
+              </a:lnSpc>
+              <a:buNone/>
+            </a:pPr>
+            <a:r>
+              <a:rPr lang="en-US" sz="1100" dirty="0">
+                <a:solidFill>
+                  <a:srgbClr val="1E2A38"/>
+                </a:solidFill>
+                <a:latin typeface="Meiryo" pitchFamily="34" charset="0"/>
+                <a:ea typeface="Meiryo" pitchFamily="34" charset="-122"/>
+                <a:cs typeface="Meiryo" pitchFamily="34" charset="-120"/>
+              </a:rPr>
+              <a:t>チャネル</a:t>
+            </a:r>
+            <a:endParaRPr lang="en-US" sz="1100" dirty="0"/>
+          </a:p>
+          <a:p>
+            <a:pPr indent="0" marL="0">
+              <a:lnSpc>
+                <a:spcPct val="125000"/>
+              </a:lnSpc>
+              <a:buNone/>
+            </a:pPr>
+            <a:r>
+              <a:rPr lang="en-US" sz="1100" dirty="0">
+                <a:solidFill>
+                  <a:srgbClr val="1E2A38"/>
+                </a:solidFill>
+                <a:latin typeface="Meiryo" pitchFamily="34" charset="0"/>
+                <a:ea typeface="Meiryo" pitchFamily="34" charset="-122"/>
+                <a:cs typeface="Meiryo" pitchFamily="34" charset="-120"/>
+              </a:rPr>
+              <a:t>IB／ATM 別に集計</a:t>
+            </a:r>
+            <a:endParaRPr lang="en-US" sz="1100" dirty="0"/>
+          </a:p>
+        </p:txBody>
+      </p:sp>
+      <p:sp>
+        <p:nvSpPr>
+          <p:cNvPr id="17" name="Shape 15"/>
+          <p:cNvSpPr/>
+          <p:nvPr/>
+        </p:nvSpPr>
+        <p:spPr>
+          <a:xfrm>
+            <a:off x="502920" y="4754880"/>
+            <a:ext cx="3291840" cy="1097280"/>
+          </a:xfrm>
+          <a:prstGeom prst="roundRect">
+            <a:avLst>
+              <a:gd name="adj" fmla="val 5000"/>
+            </a:avLst>
+          </a:prstGeom>
+          <a:solidFill>
+            <a:srgbClr val="13294B"/>
+          </a:solidFill>
+          <a:ln w="6350">
+            <a:solidFill>
+              <a:srgbClr val="13294B"/>
+            </a:solidFill>
+            <a:prstDash val="solid"/>
+          </a:ln>
+        </p:spPr>
+      </p:sp>
+      <p:sp>
+        <p:nvSpPr>
+          <p:cNvPr id="18" name="Text 16"/>
+          <p:cNvSpPr txBox="1"/>
+          <p:nvPr/>
+        </p:nvSpPr>
+        <p:spPr>
+          <a:xfrm>
+            <a:off x="722376" y="4754880"/>
+            <a:ext cx="2852928" cy="1097280"/>
+          </a:xfrm>
+          <a:prstGeom prst="rect">
+            <a:avLst/>
+          </a:prstGeom>
+          <a:noFill/>
+          <a:ln/>
+        </p:spPr>
+        <p:txBody>
+          <a:bodyPr wrap="square" lIns="0" tIns="0" rIns="0" bIns="0" rtlCol="0" anchor="ctr"/>
+          <a:lstStyle/>
+          <a:p>
+            <a:pPr algn="ctr" indent="0" marL="0">
+              <a:lnSpc>
+                <a:spcPct val="130000"/>
+              </a:lnSpc>
+              <a:buNone/>
+            </a:pPr>
+            <a:r>
+              <a:rPr lang="en-US" sz="1300" b="1" dirty="0">
+                <a:solidFill>
+                  <a:srgbClr val="FFFFFF"/>
+                </a:solidFill>
+                <a:latin typeface="Meiryo" pitchFamily="34" charset="0"/>
+                <a:ea typeface="Meiryo" pitchFamily="34" charset="-122"/>
+                <a:cs typeface="Meiryo" pitchFamily="34" charset="-120"/>
+              </a:rPr>
+              <a:t>この2画面だけで、</a:t>
+            </a:r>
+            <a:endParaRPr lang="en-US" sz="1300" dirty="0"/>
+          </a:p>
+          <a:p>
+            <a:pPr algn="ctr" indent="0" marL="0">
+              <a:lnSpc>
+                <a:spcPct val="130000"/>
+              </a:lnSpc>
+              <a:buNone/>
+            </a:pPr>
+            <a:r>
+              <a:rPr lang="en-US" sz="1300" b="1" dirty="0">
+                <a:solidFill>
+                  <a:srgbClr val="FFFFFF"/>
+                </a:solidFill>
+                <a:latin typeface="Meiryo" pitchFamily="34" charset="0"/>
+                <a:ea typeface="Meiryo" pitchFamily="34" charset="-122"/>
+                <a:cs typeface="Meiryo" pitchFamily="34" charset="-120"/>
+              </a:rPr>
+              <a:t>比べたい数字が出せた。</a:t>
+            </a:r>
+            <a:endParaRPr lang="en-US" sz="1300" dirty="0"/>
+          </a:p>
+        </p:txBody>
+      </p:sp>
+      <p:sp>
+        <p:nvSpPr>
+          <p:cNvPr id="19" name="Shape 17"/>
+          <p:cNvSpPr/>
+          <p:nvPr/>
+        </p:nvSpPr>
+        <p:spPr>
+          <a:xfrm>
+            <a:off x="3977640" y="1536192"/>
+            <a:ext cx="7708392" cy="2103120"/>
+          </a:xfrm>
+          <a:prstGeom prst="roundRect">
+            <a:avLst>
+              <a:gd name="adj" fmla="val 2174"/>
+            </a:avLst>
+          </a:prstGeom>
+          <a:solidFill>
+            <a:srgbClr val="FAFBFD"/>
+          </a:solidFill>
+          <a:ln w="15875">
+            <a:solidFill>
+              <a:srgbClr val="2A4A7A"/>
+            </a:solidFill>
+            <a:prstDash val="dash"/>
+          </a:ln>
+        </p:spPr>
+      </p:sp>
+      <p:sp>
+        <p:nvSpPr>
+          <p:cNvPr id="20" name="Text 18"/>
+          <p:cNvSpPr txBox="1"/>
+          <p:nvPr/>
+        </p:nvSpPr>
+        <p:spPr>
+          <a:xfrm>
+            <a:off x="4251960" y="2203704"/>
+            <a:ext cx="7159752" cy="365760"/>
+          </a:xfrm>
+          <a:prstGeom prst="rect">
+            <a:avLst/>
+          </a:prstGeom>
+          <a:noFill/>
+          <a:ln/>
+        </p:spPr>
+        <p:txBody>
+          <a:bodyPr wrap="square" lIns="0" tIns="0" rIns="0" bIns="0" rtlCol="0" anchor="ctr"/>
+          <a:lstStyle/>
+          <a:p>
+            <a:pPr algn="ctr" indent="0" marL="0">
+              <a:buNone/>
+            </a:pPr>
+            <a:r>
+              <a:rPr lang="en-US" sz="1200" b="1" dirty="0">
+                <a:solidFill>
+                  <a:srgbClr val="D9482F"/>
+                </a:solidFill>
+                <a:latin typeface="Meiryo" pitchFamily="34" charset="0"/>
+                <a:ea typeface="Meiryo" pitchFamily="34" charset="-122"/>
+                <a:cs typeface="Meiryo" pitchFamily="34" charset="-120"/>
+              </a:rPr>
+              <a:t>画面①　</a:t>
+            </a:r>
+            <a:pPr algn="ctr" indent="0" marL="0">
+              <a:buNone/>
+            </a:pPr>
+            <a:r>
+              <a:rPr lang="en-US" sz="1300" b="1" dirty="0">
+                <a:solidFill>
+                  <a:srgbClr val="13294B"/>
+                </a:solidFill>
+                <a:latin typeface="Meiryo" pitchFamily="34" charset="0"/>
+                <a:ea typeface="Meiryo" pitchFamily="34" charset="-122"/>
+                <a:cs typeface="Meiryo" pitchFamily="34" charset="-120"/>
+              </a:rPr>
+              <a:t>条件を指定する画面</a:t>
+            </a:r>
+            <a:endParaRPr lang="en-US" sz="1200" dirty="0"/>
+          </a:p>
+        </p:txBody>
+      </p:sp>
+      <p:sp>
+        <p:nvSpPr>
+          <p:cNvPr id="21" name="Text 19"/>
+          <p:cNvSpPr txBox="1"/>
+          <p:nvPr/>
+        </p:nvSpPr>
+        <p:spPr>
+          <a:xfrm>
+            <a:off x="4434840" y="2587752"/>
+            <a:ext cx="6793992" cy="566928"/>
+          </a:xfrm>
+          <a:prstGeom prst="rect">
+            <a:avLst/>
+          </a:prstGeom>
+          <a:noFill/>
+          <a:ln/>
+        </p:spPr>
+        <p:txBody>
+          <a:bodyPr wrap="square" lIns="0" tIns="0" rIns="0" bIns="0" rtlCol="0" anchor="t"/>
+          <a:lstStyle/>
+          <a:p>
+            <a:pPr algn="ctr" indent="0" marL="0">
+              <a:lnSpc>
+                <a:spcPct val="125000"/>
+              </a:lnSpc>
+              <a:buNone/>
+            </a:pPr>
+            <a:r>
+              <a:rPr lang="en-US" sz="1150" dirty="0">
+                <a:solidFill>
+                  <a:srgbClr val="5D6E82"/>
+                </a:solidFill>
+                <a:latin typeface="Meiryo" pitchFamily="34" charset="0"/>
+                <a:ea typeface="Meiryo" pitchFamily="34" charset="-122"/>
+                <a:cs typeface="Meiryo" pitchFamily="34" charset="-120"/>
+              </a:rPr>
+              <a:t>期間・取引の種類・チャネルを指定しているところのスクリーンショット</a:t>
+            </a:r>
+            <a:endParaRPr lang="en-US" sz="1150" dirty="0"/>
+          </a:p>
+        </p:txBody>
+      </p:sp>
+      <p:sp>
+        <p:nvSpPr>
+          <p:cNvPr id="22" name="Shape 20"/>
+          <p:cNvSpPr/>
+          <p:nvPr/>
+        </p:nvSpPr>
+        <p:spPr>
+          <a:xfrm>
+            <a:off x="7685532" y="3694176"/>
+            <a:ext cx="292608" cy="219456"/>
+          </a:xfrm>
+          <a:prstGeom prst="downArrow">
             <a:avLst/>
           </a:prstGeom>
           <a:solidFill>
@@ -4937,238 +5801,41 @@
       </p:sp>
       <p:sp>
         <p:nvSpPr>
-          <p:cNvPr id="11" name="Text 9"/>
-          <p:cNvSpPr txBox="1"/>
-          <p:nvPr/>
-        </p:nvSpPr>
-        <p:spPr>
-          <a:xfrm>
-            <a:off x="4507992" y="1755648"/>
-            <a:ext cx="365760" cy="365760"/>
-          </a:xfrm>
-          <a:prstGeom prst="rect">
-            <a:avLst/>
-          </a:prstGeom>
-          <a:noFill/>
-          <a:ln/>
-        </p:spPr>
-        <p:txBody>
-          <a:bodyPr wrap="square" lIns="0" tIns="0" rIns="0" bIns="0" rtlCol="0" anchor="ctr"/>
-          <a:lstStyle/>
-          <a:p>
-            <a:pPr algn="ctr" indent="0" marL="0">
-              <a:buNone/>
-            </a:pPr>
-            <a:r>
-              <a:rPr lang="en-US" sz="1300" b="1" dirty="0">
-                <a:solidFill>
-                  <a:srgbClr val="FFFFFF"/>
-                </a:solidFill>
-                <a:latin typeface="Meiryo" pitchFamily="34" charset="0"/>
-                <a:ea typeface="Meiryo" pitchFamily="34" charset="-122"/>
-                <a:cs typeface="Meiryo" pitchFamily="34" charset="-120"/>
-              </a:rPr>
-              <a:t>△</a:t>
-            </a:r>
-            <a:endParaRPr lang="en-US" sz="1300" dirty="0"/>
-          </a:p>
-        </p:txBody>
-      </p:sp>
-      <p:sp>
-        <p:nvSpPr>
-          <p:cNvPr id="12" name="Text 10"/>
-          <p:cNvSpPr txBox="1"/>
-          <p:nvPr/>
-        </p:nvSpPr>
-        <p:spPr>
-          <a:xfrm>
-            <a:off x="4983480" y="1719072"/>
-            <a:ext cx="2606040" cy="457200"/>
-          </a:xfrm>
-          <a:prstGeom prst="rect">
-            <a:avLst/>
-          </a:prstGeom>
-          <a:noFill/>
-          <a:ln/>
-        </p:spPr>
-        <p:txBody>
-          <a:bodyPr wrap="square" lIns="0" tIns="0" rIns="0" bIns="0" rtlCol="0" anchor="ctr"/>
-          <a:lstStyle/>
-          <a:p>
-            <a:pPr indent="0" marL="0">
-              <a:buNone/>
-            </a:pPr>
-            <a:r>
-              <a:rPr lang="en-US" sz="1350" b="1" dirty="0">
-                <a:solidFill>
-                  <a:srgbClr val="D9482F"/>
-                </a:solidFill>
-                <a:latin typeface="Meiryo" pitchFamily="34" charset="0"/>
-                <a:ea typeface="Meiryo" pitchFamily="34" charset="-122"/>
-                <a:cs typeface="Meiryo" pitchFamily="34" charset="-120"/>
-              </a:rPr>
-              <a:t>このデータからは言えないこと</a:t>
-            </a:r>
-            <a:endParaRPr lang="en-US" sz="1350" dirty="0"/>
-          </a:p>
-        </p:txBody>
-      </p:sp>
-      <p:sp>
-        <p:nvSpPr>
-          <p:cNvPr id="13" name="Text 11"/>
-          <p:cNvSpPr txBox="1"/>
-          <p:nvPr/>
-        </p:nvSpPr>
-        <p:spPr>
-          <a:xfrm>
-            <a:off x="4544568" y="2322576"/>
-            <a:ext cx="3008376" cy="3218688"/>
-          </a:xfrm>
-          <a:prstGeom prst="rect">
-            <a:avLst/>
-          </a:prstGeom>
-          <a:noFill/>
-          <a:ln/>
-        </p:spPr>
-        <p:txBody>
-          <a:bodyPr wrap="square" lIns="0" tIns="0" rIns="0" bIns="0" rtlCol="0" anchor="t"/>
-          <a:lstStyle/>
-          <a:p>
-            <a:pPr marL="342900" indent="-342900">
-              <a:lnSpc>
-                <a:spcPct val="132000"/>
-              </a:lnSpc>
-              <a:spcAft>
-                <a:spcPts val="1000"/>
-              </a:spcAft>
-              <a:buSzPct val="100000"/>
-              <a:buChar char="▪"/>
-            </a:pPr>
-            <a:r>
-              <a:rPr lang="en-US" sz="1200" dirty="0">
-                <a:solidFill>
-                  <a:srgbClr val="1E2A38"/>
-                </a:solidFill>
-                <a:latin typeface="Meiryo" pitchFamily="34" charset="0"/>
-                <a:ea typeface="Meiryo" pitchFamily="34" charset="-122"/>
-                <a:cs typeface="Meiryo" pitchFamily="34" charset="-120"/>
-              </a:rPr>
-              <a:t>比較できるのは4〜6月の3か月分×2年のみで、連続した推移が追えない。</a:t>
-            </a:r>
-            <a:endParaRPr lang="en-US" sz="1200" dirty="0"/>
-          </a:p>
-          <a:p>
-            <a:pPr marL="342900" indent="-342900">
-              <a:lnSpc>
-                <a:spcPct val="132000"/>
-              </a:lnSpc>
-              <a:spcAft>
-                <a:spcPts val="1000"/>
-              </a:spcAft>
-              <a:buSzPct val="100000"/>
-              <a:buChar char="▪"/>
-            </a:pPr>
-            <a:r>
-              <a:rPr lang="en-US" sz="1200" dirty="0">
-                <a:solidFill>
-                  <a:srgbClr val="1E2A38"/>
-                </a:solidFill>
-                <a:latin typeface="Meiryo" pitchFamily="34" charset="0"/>
-                <a:ea typeface="Meiryo" pitchFamily="34" charset="-122"/>
-                <a:cs typeface="Meiryo" pitchFamily="34" charset="-120"/>
-              </a:rPr>
-              <a:t>口座数の変化、取引全体の増減、季節性、社会全体でのIB利用の広がりなど、施策以外の要因を切り分けられない。</a:t>
-            </a:r>
-            <a:endParaRPr lang="en-US" sz="1200" dirty="0"/>
-          </a:p>
-          <a:p>
-            <a:pPr marL="342900" indent="-342900">
-              <a:lnSpc>
-                <a:spcPct val="132000"/>
-              </a:lnSpc>
-              <a:spcAft>
-                <a:spcPts val="1000"/>
-              </a:spcAft>
-              <a:buSzPct val="100000"/>
-              <a:buChar char="▪"/>
-            </a:pPr>
-            <a:r>
-              <a:rPr lang="en-US" sz="1200" dirty="0">
-                <a:solidFill>
-                  <a:srgbClr val="1E2A38"/>
-                </a:solidFill>
-                <a:latin typeface="Meiryo" pitchFamily="34" charset="0"/>
-                <a:ea typeface="Meiryo" pitchFamily="34" charset="-122"/>
-                <a:cs typeface="Meiryo" pitchFamily="34" charset="-120"/>
-              </a:rPr>
-              <a:t>→「IB普及施策によって増えた」という因果関係は、このデータだけでは判断できない。</a:t>
-            </a:r>
-            <a:endParaRPr lang="en-US" sz="1200" dirty="0"/>
-          </a:p>
-        </p:txBody>
-      </p:sp>
-      <p:sp>
-        <p:nvSpPr>
-          <p:cNvPr id="14" name="Shape 12"/>
+          <p:cNvPr id="23" name="Shape 21"/>
           <p:cNvSpPr/>
           <p:nvPr/>
         </p:nvSpPr>
         <p:spPr>
           <a:xfrm>
-            <a:off x="8074152" y="1536192"/>
-            <a:ext cx="3520440" cy="4114800"/>
+            <a:off x="3977640" y="3968496"/>
+            <a:ext cx="7708392" cy="2103120"/>
           </a:xfrm>
           <a:prstGeom prst="roundRect">
             <a:avLst>
-              <a:gd name="adj" fmla="val 1558"/>
+              <a:gd name="adj" fmla="val 2174"/>
             </a:avLst>
           </a:prstGeom>
           <a:solidFill>
-            <a:srgbClr val="EEF2F8"/>
+            <a:srgbClr val="FAFBFD"/>
           </a:solidFill>
-          <a:ln w="6350">
-            <a:solidFill>
-              <a:srgbClr val="EEF2F8"/>
-            </a:solidFill>
-            <a:prstDash val="solid"/>
-          </a:ln>
-        </p:spPr>
-      </p:sp>
-      <p:sp>
-        <p:nvSpPr>
-          <p:cNvPr id="15" name="Shape 13"/>
-          <p:cNvSpPr/>
-          <p:nvPr/>
-        </p:nvSpPr>
-        <p:spPr>
-          <a:xfrm>
-            <a:off x="8293608" y="1755648"/>
-            <a:ext cx="365760" cy="365760"/>
-          </a:xfrm>
-          <a:prstGeom prst="ellipse">
-            <a:avLst/>
-          </a:prstGeom>
-          <a:solidFill>
-            <a:srgbClr val="2A4A7A"/>
-          </a:solidFill>
-          <a:ln w="6350">
+          <a:ln w="15875">
             <a:solidFill>
               <a:srgbClr val="2A4A7A"/>
             </a:solidFill>
-            <a:prstDash val="solid"/>
+            <a:prstDash val="dash"/>
           </a:ln>
         </p:spPr>
       </p:sp>
       <p:sp>
         <p:nvSpPr>
-          <p:cNvPr id="16" name="Text 14"/>
-          <p:cNvSpPr txBox="1"/>
-          <p:nvPr/>
-        </p:nvSpPr>
-        <p:spPr>
-          <a:xfrm>
-            <a:off x="8293608" y="1755648"/>
-            <a:ext cx="365760" cy="365760"/>
+          <p:cNvPr id="24" name="Text 22"/>
+          <p:cNvSpPr txBox="1"/>
+          <p:nvPr/>
+        </p:nvSpPr>
+        <p:spPr>
+          <a:xfrm>
+            <a:off x="4251960" y="4636008"/>
+            <a:ext cx="7159752" cy="365760"/>
           </a:xfrm>
           <a:prstGeom prst="rect">
             <a:avLst/>
@@ -5184,69 +5851,44 @@
               <a:buNone/>
             </a:pPr>
             <a:r>
+              <a:rPr lang="en-US" sz="1200" b="1" dirty="0">
+                <a:solidFill>
+                  <a:srgbClr val="D9482F"/>
+                </a:solidFill>
+                <a:latin typeface="Meiryo" pitchFamily="34" charset="0"/>
+                <a:ea typeface="Meiryo" pitchFamily="34" charset="-122"/>
+                <a:cs typeface="Meiryo" pitchFamily="34" charset="-120"/>
+              </a:rPr>
+              <a:t>画面②　</a:t>
+            </a:r>
+            <a:pPr algn="ctr" indent="0" marL="0">
+              <a:buNone/>
+            </a:pPr>
+            <a:r>
               <a:rPr lang="en-US" sz="1300" b="1" dirty="0">
                 <a:solidFill>
-                  <a:srgbClr val="FFFFFF"/>
-                </a:solidFill>
-                <a:latin typeface="Meiryo" pitchFamily="34" charset="0"/>
-                <a:ea typeface="Meiryo" pitchFamily="34" charset="-122"/>
-                <a:cs typeface="Meiryo" pitchFamily="34" charset="-120"/>
-              </a:rPr>
-              <a:t>▶</a:t>
-            </a:r>
-            <a:endParaRPr lang="en-US" sz="1300" dirty="0"/>
-          </a:p>
-        </p:txBody>
-      </p:sp>
-      <p:sp>
-        <p:nvSpPr>
-          <p:cNvPr id="17" name="Text 15"/>
-          <p:cNvSpPr txBox="1"/>
-          <p:nvPr/>
-        </p:nvSpPr>
-        <p:spPr>
-          <a:xfrm>
-            <a:off x="8769096" y="1719072"/>
-            <a:ext cx="2606040" cy="457200"/>
-          </a:xfrm>
-          <a:prstGeom prst="rect">
-            <a:avLst/>
-          </a:prstGeom>
-          <a:noFill/>
-          <a:ln/>
-        </p:spPr>
-        <p:txBody>
-          <a:bodyPr wrap="square" lIns="0" tIns="0" rIns="0" bIns="0" rtlCol="0" anchor="ctr"/>
-          <a:lstStyle/>
-          <a:p>
-            <a:pPr indent="0" marL="0">
-              <a:buNone/>
-            </a:pPr>
-            <a:r>
-              <a:rPr lang="en-US" sz="1350" b="1" dirty="0">
-                <a:solidFill>
-                  <a:srgbClr val="2A4A7A"/>
-                </a:solidFill>
-                <a:latin typeface="Meiryo" pitchFamily="34" charset="0"/>
-                <a:ea typeface="Meiryo" pitchFamily="34" charset="-122"/>
-                <a:cs typeface="Meiryo" pitchFamily="34" charset="-120"/>
-              </a:rPr>
-              <a:t>データが蓄積されれば確かめられること</a:t>
-            </a:r>
-            <a:endParaRPr lang="en-US" sz="1350" dirty="0"/>
-          </a:p>
-        </p:txBody>
-      </p:sp>
-      <p:sp>
-        <p:nvSpPr>
-          <p:cNvPr id="18" name="Text 16"/>
-          <p:cNvSpPr txBox="1"/>
-          <p:nvPr/>
-        </p:nvSpPr>
-        <p:spPr>
-          <a:xfrm>
-            <a:off x="8330184" y="2322576"/>
-            <a:ext cx="3008376" cy="3218688"/>
+                  <a:srgbClr val="13294B"/>
+                </a:solidFill>
+                <a:latin typeface="Meiryo" pitchFamily="34" charset="0"/>
+                <a:ea typeface="Meiryo" pitchFamily="34" charset="-122"/>
+                <a:cs typeface="Meiryo" pitchFamily="34" charset="-120"/>
+              </a:rPr>
+              <a:t>出力された集計結果</a:t>
+            </a:r>
+            <a:endParaRPr lang="en-US" sz="1200" dirty="0"/>
+          </a:p>
+        </p:txBody>
+      </p:sp>
+      <p:sp>
+        <p:nvSpPr>
+          <p:cNvPr id="25" name="Text 23"/>
+          <p:cNvSpPr txBox="1"/>
+          <p:nvPr/>
+        </p:nvSpPr>
+        <p:spPr>
+          <a:xfrm>
+            <a:off x="4434840" y="5020056"/>
+            <a:ext cx="6793992" cy="566928"/>
           </a:xfrm>
           <a:prstGeom prst="rect">
             <a:avLst/>
@@ -5258,154 +5900,36 @@
           <a:bodyPr wrap="square" lIns="0" tIns="0" rIns="0" bIns="0" rtlCol="0" anchor="t"/>
           <a:lstStyle/>
           <a:p>
-            <a:pPr marL="342900" indent="-342900">
+            <a:pPr algn="ctr" indent="0" marL="0">
               <a:lnSpc>
-                <a:spcPct val="132000"/>
+                <a:spcPct val="125000"/>
               </a:lnSpc>
-              <a:spcAft>
-                <a:spcPts val="1000"/>
-              </a:spcAft>
-              <a:buSzPct val="100000"/>
-              <a:buChar char="▪"/>
-            </a:pPr>
-            <a:r>
-              <a:rPr lang="en-US" sz="1200" dirty="0">
-                <a:solidFill>
-                  <a:srgbClr val="1E2A38"/>
-                </a:solidFill>
-                <a:latin typeface="Meiryo" pitchFamily="34" charset="0"/>
-                <a:ea typeface="Meiryo" pitchFamily="34" charset="-122"/>
-                <a:cs typeface="Meiryo" pitchFamily="34" charset="-120"/>
-              </a:rPr>
-              <a:t>連続した月次の推移を見て、施策の前後で変化しているかを確かめる。</a:t>
-            </a:r>
-            <a:endParaRPr lang="en-US" sz="1200" dirty="0"/>
-          </a:p>
-          <a:p>
-            <a:pPr marL="342900" indent="-342900">
-              <a:lnSpc>
-                <a:spcPct val="132000"/>
-              </a:lnSpc>
-              <a:spcAft>
-                <a:spcPts val="1000"/>
-              </a:spcAft>
-              <a:buSzPct val="100000"/>
-              <a:buChar char="▪"/>
-            </a:pPr>
-            <a:r>
-              <a:rPr lang="en-US" sz="1200" dirty="0">
-                <a:solidFill>
-                  <a:srgbClr val="1E2A38"/>
-                </a:solidFill>
-                <a:latin typeface="Meiryo" pitchFamily="34" charset="0"/>
-                <a:ea typeface="Meiryo" pitchFamily="34" charset="-122"/>
-                <a:cs typeface="Meiryo" pitchFamily="34" charset="-120"/>
-              </a:rPr>
-              <a:t>ATMのIB代替可能取引が減っているかを、IBの増加と対応させて見る。</a:t>
-            </a:r>
-            <a:endParaRPr lang="en-US" sz="1200" dirty="0"/>
-          </a:p>
-          <a:p>
-            <a:pPr marL="342900" indent="-342900">
-              <a:lnSpc>
-                <a:spcPct val="132000"/>
-              </a:lnSpc>
-              <a:spcAft>
-                <a:spcPts val="1000"/>
-              </a:spcAft>
-              <a:buSzPct val="100000"/>
-              <a:buChar char="▪"/>
-            </a:pPr>
-            <a:r>
-              <a:rPr lang="en-US" sz="1200" dirty="0">
-                <a:solidFill>
-                  <a:srgbClr val="1E2A38"/>
-                </a:solidFill>
-                <a:latin typeface="Meiryo" pitchFamily="34" charset="0"/>
-                <a:ea typeface="Meiryo" pitchFamily="34" charset="-122"/>
-                <a:cs typeface="Meiryo" pitchFamily="34" charset="-120"/>
-              </a:rPr>
-              <a:t>支店や年代などの属性別に、普及の進み方の違いを見る。</a:t>
-            </a:r>
-            <a:endParaRPr lang="en-US" sz="1200" dirty="0"/>
-          </a:p>
-        </p:txBody>
-      </p:sp>
-      <p:sp>
-        <p:nvSpPr>
-          <p:cNvPr id="19" name="Shape 17"/>
-          <p:cNvSpPr/>
-          <p:nvPr/>
-        </p:nvSpPr>
-        <p:spPr>
-          <a:xfrm>
-            <a:off x="502920" y="5797296"/>
-            <a:ext cx="11183112" cy="548640"/>
-          </a:xfrm>
-          <a:prstGeom prst="roundRect">
-            <a:avLst>
-              <a:gd name="adj" fmla="val 10000"/>
-            </a:avLst>
-          </a:prstGeom>
-          <a:solidFill>
-            <a:srgbClr val="13294B"/>
-          </a:solidFill>
-          <a:ln w="6350">
-            <a:solidFill>
-              <a:srgbClr val="13294B"/>
-            </a:solidFill>
-            <a:prstDash val="solid"/>
-          </a:ln>
-        </p:spPr>
-      </p:sp>
-      <p:sp>
-        <p:nvSpPr>
-          <p:cNvPr id="20" name="Text 18"/>
-          <p:cNvSpPr txBox="1"/>
-          <p:nvPr/>
-        </p:nvSpPr>
-        <p:spPr>
-          <a:xfrm>
-            <a:off x="758952" y="5797296"/>
-            <a:ext cx="10671048" cy="548640"/>
-          </a:xfrm>
-          <a:prstGeom prst="rect">
-            <a:avLst/>
-          </a:prstGeom>
-          <a:noFill/>
-          <a:ln/>
-        </p:spPr>
-        <p:txBody>
-          <a:bodyPr wrap="square" lIns="0" tIns="0" rIns="0" bIns="0" rtlCol="0" anchor="ctr"/>
-          <a:lstStyle/>
-          <a:p>
-            <a:pPr algn="ctr" indent="0" marL="0">
-              <a:buNone/>
-            </a:pPr>
-            <a:r>
-              <a:rPr lang="en-US" sz="1350" b="1" dirty="0">
-                <a:solidFill>
-                  <a:srgbClr val="FFFFFF"/>
-                </a:solidFill>
-                <a:latin typeface="Meiryo" pitchFamily="34" charset="0"/>
-                <a:ea typeface="Meiryo" pitchFamily="34" charset="-122"/>
-                <a:cs typeface="Meiryo" pitchFamily="34" charset="-120"/>
-              </a:rPr>
-              <a:t>「増えている」という事実は確認できた。同時に、次に何を確かめればよいかがはっきりした。</a:t>
-            </a:r>
-            <a:endParaRPr lang="en-US" sz="1350" dirty="0"/>
-          </a:p>
-        </p:txBody>
-      </p:sp>
-      <p:sp>
-        <p:nvSpPr>
-          <p:cNvPr id="22" name="Text 19"/>
-          <p:cNvSpPr txBox="1"/>
-          <p:nvPr/>
-        </p:nvSpPr>
-        <p:spPr>
-          <a:xfrm>
-            <a:off x="11411712" y="6382512"/>
+              <a:buNone/>
+            </a:pPr>
+            <a:r>
+              <a:rPr lang="en-US" sz="1150" dirty="0">
+                <a:solidFill>
+                  <a:srgbClr val="5D6E82"/>
+                </a:solidFill>
+                <a:latin typeface="Meiryo" pitchFamily="34" charset="0"/>
+                <a:ea typeface="Meiryo" pitchFamily="34" charset="-122"/>
+                <a:cs typeface="Meiryo" pitchFamily="34" charset="-120"/>
+              </a:rPr>
+              <a:t>指定した条件で集計された件数が表示されているところのスクリーンショット</a:t>
+            </a:r>
+            <a:endParaRPr lang="en-US" sz="1150" dirty="0"/>
+          </a:p>
+        </p:txBody>
+      </p:sp>
+      <p:sp>
+        <p:nvSpPr>
+          <p:cNvPr id="27" name="Text 24"/>
+          <p:cNvSpPr txBox="1"/>
+          <p:nvPr/>
+        </p:nvSpPr>
+        <p:spPr>
+          <a:xfrm>
+            <a:off x="11411712" y="6419088"/>
             <a:ext cx="365760" cy="274320"/>
           </a:xfrm>
           <a:prstGeom prst="rect">
@@ -5447,6 +5971,1637 @@
 <file path=ppt/slides/slide6.xml><?xml version="1.0" encoding="utf-8"?>
 <p:sld xmlns:a="http://schemas.openxmlformats.org/drawingml/2006/main" xmlns:r="http://schemas.openxmlformats.org/officeDocument/2006/relationships" xmlns:p="http://schemas.openxmlformats.org/presentationml/2006/main">
   <p:cSld name="Slide 6">
+    <p:bg>
+      <p:bgPr>
+        <a:solidFill>
+          <a:srgbClr val="FFFFFF"/>
+        </a:solidFill>
+      </p:bgPr>
+    </p:bg>
+    <p:spTree>
+      <p:nvGrpSpPr>
+        <p:cNvPr id="1" name=""/>
+        <p:cNvGrpSpPr/>
+        <p:nvPr/>
+      </p:nvGrpSpPr>
+      <p:grpSpPr>
+        <a:xfrm>
+          <a:off x="0" y="0"/>
+          <a:ext cx="0" cy="0"/>
+          <a:chOff x="0" y="0"/>
+          <a:chExt cx="0" cy="0"/>
+        </a:xfrm>
+      </p:grpSpPr>
+      <p:sp>
+        <p:nvSpPr>
+          <p:cNvPr id="2" name="Text 0"/>
+          <p:cNvSpPr txBox="1"/>
+          <p:nvPr/>
+        </p:nvSpPr>
+        <p:spPr>
+          <a:xfrm>
+            <a:off x="502920" y="347472"/>
+            <a:ext cx="11183112" cy="566928"/>
+          </a:xfrm>
+          <a:prstGeom prst="rect">
+            <a:avLst/>
+          </a:prstGeom>
+          <a:noFill/>
+          <a:ln/>
+        </p:spPr>
+        <p:txBody>
+          <a:bodyPr wrap="square" lIns="0" tIns="0" rIns="0" bIns="0" rtlCol="0" anchor="ctr"/>
+          <a:lstStyle/>
+          <a:p>
+            <a:pPr indent="0" marL="0">
+              <a:buNone/>
+            </a:pPr>
+            <a:r>
+              <a:rPr lang="en-US" sz="2600" b="1" dirty="0">
+                <a:solidFill>
+                  <a:srgbClr val="13294B"/>
+                </a:solidFill>
+                <a:latin typeface="Meiryo" pitchFamily="34" charset="0"/>
+                <a:ea typeface="Meiryo" pitchFamily="34" charset="-122"/>
+                <a:cs typeface="Meiryo" pitchFamily="34" charset="-120"/>
+              </a:rPr>
+              <a:t>IB利用件数は、2025年より2026年のほうが多い</a:t>
+            </a:r>
+            <a:endParaRPr lang="en-US" sz="2600" dirty="0"/>
+          </a:p>
+        </p:txBody>
+      </p:sp>
+      <p:sp>
+        <p:nvSpPr>
+          <p:cNvPr id="3" name="Text 1"/>
+          <p:cNvSpPr txBox="1"/>
+          <p:nvPr/>
+        </p:nvSpPr>
+        <p:spPr>
+          <a:xfrm>
+            <a:off x="502920" y="950976"/>
+            <a:ext cx="11183112" cy="384048"/>
+          </a:xfrm>
+          <a:prstGeom prst="rect">
+            <a:avLst/>
+          </a:prstGeom>
+          <a:noFill/>
+          <a:ln/>
+        </p:spPr>
+        <p:txBody>
+          <a:bodyPr wrap="square" lIns="0" tIns="0" rIns="0" bIns="0" rtlCol="0" anchor="ctr"/>
+          <a:lstStyle/>
+          <a:p>
+            <a:pPr indent="0" marL="0">
+              <a:buNone/>
+            </a:pPr>
+            <a:r>
+              <a:rPr lang="en-US" sz="1350" b="1" dirty="0">
+                <a:solidFill>
+                  <a:srgbClr val="D9482F"/>
+                </a:solidFill>
+                <a:latin typeface="Meiryo" pitchFamily="34" charset="0"/>
+                <a:ea typeface="Meiryo" pitchFamily="34" charset="-122"/>
+                <a:cs typeface="Meiryo" pitchFamily="34" charset="-120"/>
+              </a:rPr>
+              <a:t>出てきた数字を、月ごとに並べて比べた。</a:t>
+            </a:r>
+            <a:endParaRPr lang="en-US" sz="1350" dirty="0"/>
+          </a:p>
+        </p:txBody>
+      </p:sp>
+      <p:sp>
+        <p:nvSpPr>
+          <p:cNvPr id="4" name="Shape 2"/>
+          <p:cNvSpPr/>
+          <p:nvPr/>
+        </p:nvSpPr>
+        <p:spPr>
+          <a:xfrm>
+            <a:off x="502920" y="1536192"/>
+            <a:ext cx="3931920" cy="1783080"/>
+          </a:xfrm>
+          <a:prstGeom prst="roundRect">
+            <a:avLst>
+              <a:gd name="adj" fmla="val 3077"/>
+            </a:avLst>
+          </a:prstGeom>
+          <a:solidFill>
+            <a:srgbClr val="13294B"/>
+          </a:solidFill>
+          <a:ln w="6350">
+            <a:solidFill>
+              <a:srgbClr val="13294B"/>
+            </a:solidFill>
+            <a:prstDash val="solid"/>
+          </a:ln>
+        </p:spPr>
+      </p:sp>
+      <p:sp>
+        <p:nvSpPr>
+          <p:cNvPr id="5" name="Text 3"/>
+          <p:cNvSpPr txBox="1"/>
+          <p:nvPr/>
+        </p:nvSpPr>
+        <p:spPr>
+          <a:xfrm>
+            <a:off x="722376" y="1664208"/>
+            <a:ext cx="3493008" cy="274320"/>
+          </a:xfrm>
+          <a:prstGeom prst="rect">
+            <a:avLst/>
+          </a:prstGeom>
+          <a:noFill/>
+          <a:ln/>
+        </p:spPr>
+        <p:txBody>
+          <a:bodyPr wrap="square" lIns="0" tIns="0" rIns="0" bIns="0" rtlCol="0" anchor="ctr"/>
+          <a:lstStyle/>
+          <a:p>
+            <a:pPr indent="0" marL="0">
+              <a:buNone/>
+            </a:pPr>
+            <a:r>
+              <a:rPr lang="en-US" sz="1100" dirty="0">
+                <a:solidFill>
+                  <a:srgbClr val="CADCFC"/>
+                </a:solidFill>
+                <a:latin typeface="Meiryo" pitchFamily="34" charset="0"/>
+                <a:ea typeface="Meiryo" pitchFamily="34" charset="-122"/>
+                <a:cs typeface="Meiryo" pitchFamily="34" charset="-120"/>
+              </a:rPr>
+              <a:t>IB利用件数（1か月あたり）</a:t>
+            </a:r>
+            <a:endParaRPr lang="en-US" sz="1100" dirty="0"/>
+          </a:p>
+        </p:txBody>
+      </p:sp>
+      <p:sp>
+        <p:nvSpPr>
+          <p:cNvPr id="6" name="Text 4"/>
+          <p:cNvSpPr txBox="1"/>
+          <p:nvPr/>
+        </p:nvSpPr>
+        <p:spPr>
+          <a:xfrm>
+            <a:off x="722376" y="2011680"/>
+            <a:ext cx="3493008" cy="457200"/>
+          </a:xfrm>
+          <a:prstGeom prst="rect">
+            <a:avLst/>
+          </a:prstGeom>
+          <a:noFill/>
+          <a:ln/>
+        </p:spPr>
+        <p:txBody>
+          <a:bodyPr wrap="square" lIns="0" tIns="0" rIns="0" bIns="0" rtlCol="0" anchor="ctr"/>
+          <a:lstStyle/>
+          <a:p>
+            <a:pPr indent="0" marL="0">
+              <a:buNone/>
+            </a:pPr>
+            <a:r>
+              <a:rPr lang="en-US" sz="1100" dirty="0">
+                <a:solidFill>
+                  <a:srgbClr val="CADCFC"/>
+                </a:solidFill>
+                <a:latin typeface="Meiryo" pitchFamily="34" charset="0"/>
+                <a:ea typeface="Meiryo" pitchFamily="34" charset="-122"/>
+                <a:cs typeface="Meiryo" pitchFamily="34" charset="-120"/>
+              </a:rPr>
+              <a:t>2025年 4〜6月　</a:t>
+            </a:r>
+            <a:pPr indent="0" marL="0">
+              <a:buNone/>
+            </a:pPr>
+            <a:r>
+              <a:rPr lang="en-US" sz="1900" b="1" dirty="0">
+                <a:solidFill>
+                  <a:srgbClr val="FFFFFF"/>
+                </a:solidFill>
+                <a:latin typeface="Meiryo" pitchFamily="34" charset="0"/>
+                <a:ea typeface="Meiryo" pitchFamily="34" charset="-122"/>
+                <a:cs typeface="Meiryo" pitchFamily="34" charset="-120"/>
+              </a:rPr>
+              <a:t>約15〜16</a:t>
+            </a:r>
+            <a:pPr indent="0" marL="0">
+              <a:buNone/>
+            </a:pPr>
+            <a:r>
+              <a:rPr lang="en-US" sz="1200" dirty="0">
+                <a:solidFill>
+                  <a:srgbClr val="CADCFC"/>
+                </a:solidFill>
+                <a:latin typeface="Meiryo" pitchFamily="34" charset="0"/>
+                <a:ea typeface="Meiryo" pitchFamily="34" charset="-122"/>
+                <a:cs typeface="Meiryo" pitchFamily="34" charset="-120"/>
+              </a:rPr>
+              <a:t>万件</a:t>
+            </a:r>
+            <a:endParaRPr lang="en-US" sz="1100" dirty="0"/>
+          </a:p>
+        </p:txBody>
+      </p:sp>
+      <p:sp>
+        <p:nvSpPr>
+          <p:cNvPr id="7" name="Text 5"/>
+          <p:cNvSpPr txBox="1"/>
+          <p:nvPr/>
+        </p:nvSpPr>
+        <p:spPr>
+          <a:xfrm>
+            <a:off x="722376" y="2542032"/>
+            <a:ext cx="3493008" cy="502920"/>
+          </a:xfrm>
+          <a:prstGeom prst="rect">
+            <a:avLst/>
+          </a:prstGeom>
+          <a:noFill/>
+          <a:ln/>
+        </p:spPr>
+        <p:txBody>
+          <a:bodyPr wrap="square" lIns="0" tIns="0" rIns="0" bIns="0" rtlCol="0" anchor="ctr"/>
+          <a:lstStyle/>
+          <a:p>
+            <a:pPr indent="0" marL="0">
+              <a:buNone/>
+            </a:pPr>
+            <a:r>
+              <a:rPr lang="en-US" sz="1100" dirty="0">
+                <a:solidFill>
+                  <a:srgbClr val="CADCFC"/>
+                </a:solidFill>
+                <a:latin typeface="Meiryo" pitchFamily="34" charset="0"/>
+                <a:ea typeface="Meiryo" pitchFamily="34" charset="-122"/>
+                <a:cs typeface="Meiryo" pitchFamily="34" charset="-120"/>
+              </a:rPr>
+              <a:t>2026年 4〜6月　</a:t>
+            </a:r>
+            <a:pPr indent="0" marL="0">
+              <a:buNone/>
+            </a:pPr>
+            <a:r>
+              <a:rPr lang="en-US" sz="2100" b="1" dirty="0">
+                <a:solidFill>
+                  <a:srgbClr val="FFC9BC"/>
+                </a:solidFill>
+                <a:latin typeface="Meiryo" pitchFamily="34" charset="0"/>
+                <a:ea typeface="Meiryo" pitchFamily="34" charset="-122"/>
+                <a:cs typeface="Meiryo" pitchFamily="34" charset="-120"/>
+              </a:rPr>
+              <a:t>約18〜20</a:t>
+            </a:r>
+            <a:pPr indent="0" marL="0">
+              <a:buNone/>
+            </a:pPr>
+            <a:r>
+              <a:rPr lang="en-US" sz="1200" dirty="0">
+                <a:solidFill>
+                  <a:srgbClr val="CADCFC"/>
+                </a:solidFill>
+                <a:latin typeface="Meiryo" pitchFamily="34" charset="0"/>
+                <a:ea typeface="Meiryo" pitchFamily="34" charset="-122"/>
+                <a:cs typeface="Meiryo" pitchFamily="34" charset="-120"/>
+              </a:rPr>
+              <a:t>万件</a:t>
+            </a:r>
+            <a:endParaRPr lang="en-US" sz="1100" dirty="0"/>
+          </a:p>
+        </p:txBody>
+      </p:sp>
+      <p:sp>
+        <p:nvSpPr>
+          <p:cNvPr id="8" name="Shape 6"/>
+          <p:cNvSpPr/>
+          <p:nvPr/>
+        </p:nvSpPr>
+        <p:spPr>
+          <a:xfrm>
+            <a:off x="502920" y="3529584"/>
+            <a:ext cx="3931920" cy="1920240"/>
+          </a:xfrm>
+          <a:prstGeom prst="roundRect">
+            <a:avLst>
+              <a:gd name="adj" fmla="val 2857"/>
+            </a:avLst>
+          </a:prstGeom>
+          <a:solidFill>
+            <a:srgbClr val="EEF2F8"/>
+          </a:solidFill>
+          <a:ln w="6350">
+            <a:solidFill>
+              <a:srgbClr val="EEF2F8"/>
+            </a:solidFill>
+            <a:prstDash val="solid"/>
+          </a:ln>
+        </p:spPr>
+      </p:sp>
+      <p:sp>
+        <p:nvSpPr>
+          <p:cNvPr id="9" name="Text 7"/>
+          <p:cNvSpPr txBox="1"/>
+          <p:nvPr/>
+        </p:nvSpPr>
+        <p:spPr>
+          <a:xfrm>
+            <a:off x="740664" y="3675888"/>
+            <a:ext cx="3456432" cy="274320"/>
+          </a:xfrm>
+          <a:prstGeom prst="rect">
+            <a:avLst/>
+          </a:prstGeom>
+          <a:noFill/>
+          <a:ln/>
+        </p:spPr>
+        <p:txBody>
+          <a:bodyPr wrap="square" lIns="0" tIns="0" rIns="0" bIns="0" rtlCol="0" anchor="ctr"/>
+          <a:lstStyle/>
+          <a:p>
+            <a:pPr indent="0" marL="0">
+              <a:buNone/>
+            </a:pPr>
+            <a:r>
+              <a:rPr lang="en-US" sz="1250" b="1" dirty="0">
+                <a:solidFill>
+                  <a:srgbClr val="13294B"/>
+                </a:solidFill>
+                <a:latin typeface="Meiryo" pitchFamily="34" charset="0"/>
+                <a:ea typeface="Meiryo" pitchFamily="34" charset="-122"/>
+                <a:cs typeface="Meiryo" pitchFamily="34" charset="-120"/>
+              </a:rPr>
+              <a:t>あわせて確認したこと</a:t>
+            </a:r>
+            <a:endParaRPr lang="en-US" sz="1250" dirty="0"/>
+          </a:p>
+        </p:txBody>
+      </p:sp>
+      <p:sp>
+        <p:nvSpPr>
+          <p:cNvPr id="10" name="Text 8"/>
+          <p:cNvSpPr txBox="1"/>
+          <p:nvPr/>
+        </p:nvSpPr>
+        <p:spPr>
+          <a:xfrm>
+            <a:off x="740664" y="4005072"/>
+            <a:ext cx="3456432" cy="1325880"/>
+          </a:xfrm>
+          <a:prstGeom prst="rect">
+            <a:avLst/>
+          </a:prstGeom>
+          <a:noFill/>
+          <a:ln/>
+        </p:spPr>
+        <p:txBody>
+          <a:bodyPr wrap="square" lIns="0" tIns="0" rIns="0" bIns="0" rtlCol="0" anchor="t"/>
+          <a:lstStyle/>
+          <a:p>
+            <a:pPr marL="342900" indent="-342900">
+              <a:lnSpc>
+                <a:spcPct val="130000"/>
+              </a:lnSpc>
+              <a:spcAft>
+                <a:spcPts val="900"/>
+              </a:spcAft>
+              <a:buSzPct val="100000"/>
+              <a:buChar char="▪"/>
+            </a:pPr>
+            <a:r>
+              <a:rPr lang="en-US" sz="1150" dirty="0">
+                <a:solidFill>
+                  <a:srgbClr val="1E2A38"/>
+                </a:solidFill>
+                <a:latin typeface="Meiryo" pitchFamily="34" charset="0"/>
+                <a:ea typeface="Meiryo" pitchFamily="34" charset="-122"/>
+                <a:cs typeface="Meiryo" pitchFamily="34" charset="-120"/>
+              </a:rPr>
+              <a:t>ATMで行われた取引のうちIBでも代替できるものも、同じ条件で集計した。</a:t>
+            </a:r>
+            <a:endParaRPr lang="en-US" sz="1150" dirty="0"/>
+          </a:p>
+          <a:p>
+            <a:pPr marL="342900" indent="-342900">
+              <a:lnSpc>
+                <a:spcPct val="130000"/>
+              </a:lnSpc>
+              <a:spcAft>
+                <a:spcPts val="900"/>
+              </a:spcAft>
+              <a:buSzPct val="100000"/>
+              <a:buChar char="▪"/>
+            </a:pPr>
+            <a:r>
+              <a:rPr lang="en-US" sz="1150" dirty="0">
+                <a:solidFill>
+                  <a:srgbClr val="1E2A38"/>
+                </a:solidFill>
+                <a:latin typeface="Meiryo" pitchFamily="34" charset="0"/>
+                <a:ea typeface="Meiryo" pitchFamily="34" charset="-122"/>
+                <a:cs typeface="Meiryo" pitchFamily="34" charset="-120"/>
+              </a:rPr>
+              <a:t>同じ月どうしで並べ、IBとATMの両方から利用状況を見た。</a:t>
+            </a:r>
+            <a:endParaRPr lang="en-US" sz="1150" dirty="0"/>
+          </a:p>
+        </p:txBody>
+      </p:sp>
+      <p:sp>
+        <p:nvSpPr>
+          <p:cNvPr id="11" name="Shape 9"/>
+          <p:cNvSpPr/>
+          <p:nvPr/>
+        </p:nvSpPr>
+        <p:spPr>
+          <a:xfrm>
+            <a:off x="4754880" y="1536192"/>
+            <a:ext cx="6931152" cy="2148840"/>
+          </a:xfrm>
+          <a:prstGeom prst="roundRect">
+            <a:avLst>
+              <a:gd name="adj" fmla="val 2128"/>
+            </a:avLst>
+          </a:prstGeom>
+          <a:solidFill>
+            <a:srgbClr val="FAFBFD"/>
+          </a:solidFill>
+          <a:ln w="15875">
+            <a:solidFill>
+              <a:srgbClr val="2A4A7A"/>
+            </a:solidFill>
+            <a:prstDash val="dash"/>
+          </a:ln>
+        </p:spPr>
+      </p:sp>
+      <p:sp>
+        <p:nvSpPr>
+          <p:cNvPr id="12" name="Text 10"/>
+          <p:cNvSpPr txBox="1"/>
+          <p:nvPr/>
+        </p:nvSpPr>
+        <p:spPr>
+          <a:xfrm>
+            <a:off x="5029200" y="2226564"/>
+            <a:ext cx="6382512" cy="365760"/>
+          </a:xfrm>
+          <a:prstGeom prst="rect">
+            <a:avLst/>
+          </a:prstGeom>
+          <a:noFill/>
+          <a:ln/>
+        </p:spPr>
+        <p:txBody>
+          <a:bodyPr wrap="square" lIns="0" tIns="0" rIns="0" bIns="0" rtlCol="0" anchor="ctr"/>
+          <a:lstStyle/>
+          <a:p>
+            <a:pPr algn="ctr" indent="0" marL="0">
+              <a:buNone/>
+            </a:pPr>
+            <a:r>
+              <a:rPr lang="en-US" sz="1200" b="1" dirty="0">
+                <a:solidFill>
+                  <a:srgbClr val="D9482F"/>
+                </a:solidFill>
+                <a:latin typeface="Meiryo" pitchFamily="34" charset="0"/>
+                <a:ea typeface="Meiryo" pitchFamily="34" charset="-122"/>
+                <a:cs typeface="Meiryo" pitchFamily="34" charset="-120"/>
+              </a:rPr>
+              <a:t>グラフ①　</a:t>
+            </a:r>
+            <a:pPr algn="ctr" indent="0" marL="0">
+              <a:buNone/>
+            </a:pPr>
+            <a:r>
+              <a:rPr lang="en-US" sz="1300" b="1" dirty="0">
+                <a:solidFill>
+                  <a:srgbClr val="13294B"/>
+                </a:solidFill>
+                <a:latin typeface="Meiryo" pitchFamily="34" charset="0"/>
+                <a:ea typeface="Meiryo" pitchFamily="34" charset="-122"/>
+                <a:cs typeface="Meiryo" pitchFamily="34" charset="-120"/>
+              </a:rPr>
+              <a:t>IB利用件数の月次推移</a:t>
+            </a:r>
+            <a:endParaRPr lang="en-US" sz="1200" dirty="0"/>
+          </a:p>
+        </p:txBody>
+      </p:sp>
+      <p:sp>
+        <p:nvSpPr>
+          <p:cNvPr id="13" name="Text 11"/>
+          <p:cNvSpPr txBox="1"/>
+          <p:nvPr/>
+        </p:nvSpPr>
+        <p:spPr>
+          <a:xfrm>
+            <a:off x="5212080" y="2610612"/>
+            <a:ext cx="6016752" cy="566928"/>
+          </a:xfrm>
+          <a:prstGeom prst="rect">
+            <a:avLst/>
+          </a:prstGeom>
+          <a:noFill/>
+          <a:ln/>
+        </p:spPr>
+        <p:txBody>
+          <a:bodyPr wrap="square" lIns="0" tIns="0" rIns="0" bIns="0" rtlCol="0" anchor="t"/>
+          <a:lstStyle/>
+          <a:p>
+            <a:pPr algn="ctr" indent="0" marL="0">
+              <a:lnSpc>
+                <a:spcPct val="125000"/>
+              </a:lnSpc>
+              <a:buNone/>
+            </a:pPr>
+            <a:r>
+              <a:rPr lang="en-US" sz="1150" dirty="0">
+                <a:solidFill>
+                  <a:srgbClr val="5D6E82"/>
+                </a:solidFill>
+                <a:latin typeface="Meiryo" pitchFamily="34" charset="0"/>
+                <a:ea typeface="Meiryo" pitchFamily="34" charset="-122"/>
+                <a:cs typeface="Meiryo" pitchFamily="34" charset="-120"/>
+              </a:rPr>
+              <a:t>2025年4・5・6月 と 2026年4・5・6月 を並べた棒グラフ（縦軸：件数）</a:t>
+            </a:r>
+            <a:endParaRPr lang="en-US" sz="1150" dirty="0"/>
+          </a:p>
+        </p:txBody>
+      </p:sp>
+      <p:sp>
+        <p:nvSpPr>
+          <p:cNvPr id="14" name="Shape 12"/>
+          <p:cNvSpPr/>
+          <p:nvPr/>
+        </p:nvSpPr>
+        <p:spPr>
+          <a:xfrm>
+            <a:off x="4754880" y="3913632"/>
+            <a:ext cx="6931152" cy="2148840"/>
+          </a:xfrm>
+          <a:prstGeom prst="roundRect">
+            <a:avLst>
+              <a:gd name="adj" fmla="val 2128"/>
+            </a:avLst>
+          </a:prstGeom>
+          <a:solidFill>
+            <a:srgbClr val="FAFBFD"/>
+          </a:solidFill>
+          <a:ln w="15875">
+            <a:solidFill>
+              <a:srgbClr val="2A4A7A"/>
+            </a:solidFill>
+            <a:prstDash val="dash"/>
+          </a:ln>
+        </p:spPr>
+      </p:sp>
+      <p:sp>
+        <p:nvSpPr>
+          <p:cNvPr id="15" name="Text 13"/>
+          <p:cNvSpPr txBox="1"/>
+          <p:nvPr/>
+        </p:nvSpPr>
+        <p:spPr>
+          <a:xfrm>
+            <a:off x="5029200" y="4604004"/>
+            <a:ext cx="6382512" cy="365760"/>
+          </a:xfrm>
+          <a:prstGeom prst="rect">
+            <a:avLst/>
+          </a:prstGeom>
+          <a:noFill/>
+          <a:ln/>
+        </p:spPr>
+        <p:txBody>
+          <a:bodyPr wrap="square" lIns="0" tIns="0" rIns="0" bIns="0" rtlCol="0" anchor="ctr"/>
+          <a:lstStyle/>
+          <a:p>
+            <a:pPr algn="ctr" indent="0" marL="0">
+              <a:buNone/>
+            </a:pPr>
+            <a:r>
+              <a:rPr lang="en-US" sz="1200" b="1" dirty="0">
+                <a:solidFill>
+                  <a:srgbClr val="D9482F"/>
+                </a:solidFill>
+                <a:latin typeface="Meiryo" pitchFamily="34" charset="0"/>
+                <a:ea typeface="Meiryo" pitchFamily="34" charset="-122"/>
+                <a:cs typeface="Meiryo" pitchFamily="34" charset="-120"/>
+              </a:rPr>
+              <a:t>グラフ②　</a:t>
+            </a:r>
+            <a:pPr algn="ctr" indent="0" marL="0">
+              <a:buNone/>
+            </a:pPr>
+            <a:r>
+              <a:rPr lang="en-US" sz="1300" b="1" dirty="0">
+                <a:solidFill>
+                  <a:srgbClr val="13294B"/>
+                </a:solidFill>
+                <a:latin typeface="Meiryo" pitchFamily="34" charset="0"/>
+                <a:ea typeface="Meiryo" pitchFamily="34" charset="-122"/>
+                <a:cs typeface="Meiryo" pitchFamily="34" charset="-120"/>
+              </a:rPr>
+              <a:t>IB と ATM（IB代替可能取引）の比較</a:t>
+            </a:r>
+            <a:endParaRPr lang="en-US" sz="1200" dirty="0"/>
+          </a:p>
+        </p:txBody>
+      </p:sp>
+      <p:sp>
+        <p:nvSpPr>
+          <p:cNvPr id="16" name="Text 14"/>
+          <p:cNvSpPr txBox="1"/>
+          <p:nvPr/>
+        </p:nvSpPr>
+        <p:spPr>
+          <a:xfrm>
+            <a:off x="5212080" y="4988052"/>
+            <a:ext cx="6016752" cy="566928"/>
+          </a:xfrm>
+          <a:prstGeom prst="rect">
+            <a:avLst/>
+          </a:prstGeom>
+          <a:noFill/>
+          <a:ln/>
+        </p:spPr>
+        <p:txBody>
+          <a:bodyPr wrap="square" lIns="0" tIns="0" rIns="0" bIns="0" rtlCol="0" anchor="t"/>
+          <a:lstStyle/>
+          <a:p>
+            <a:pPr algn="ctr" indent="0" marL="0">
+              <a:lnSpc>
+                <a:spcPct val="125000"/>
+              </a:lnSpc>
+              <a:buNone/>
+            </a:pPr>
+            <a:r>
+              <a:rPr lang="en-US" sz="1150" dirty="0">
+                <a:solidFill>
+                  <a:srgbClr val="5D6E82"/>
+                </a:solidFill>
+                <a:latin typeface="Meiryo" pitchFamily="34" charset="0"/>
+                <a:ea typeface="Meiryo" pitchFamily="34" charset="-122"/>
+                <a:cs typeface="Meiryo" pitchFamily="34" charset="-120"/>
+              </a:rPr>
+              <a:t>同じ月について、IBの件数とATMのIB代替可能取引の件数を横並びにした棒グラフ</a:t>
+            </a:r>
+            <a:endParaRPr lang="en-US" sz="1150" dirty="0"/>
+          </a:p>
+        </p:txBody>
+      </p:sp>
+      <p:sp>
+        <p:nvSpPr>
+          <p:cNvPr id="17" name="Text 15"/>
+          <p:cNvSpPr txBox="1"/>
+          <p:nvPr/>
+        </p:nvSpPr>
+        <p:spPr>
+          <a:xfrm>
+            <a:off x="4754880" y="6126480"/>
+            <a:ext cx="5486400" cy="256032"/>
+          </a:xfrm>
+          <a:prstGeom prst="rect">
+            <a:avLst/>
+          </a:prstGeom>
+          <a:noFill/>
+          <a:ln/>
+        </p:spPr>
+        <p:txBody>
+          <a:bodyPr wrap="square" lIns="0" tIns="0" rIns="0" bIns="0" rtlCol="0" anchor="ctr"/>
+          <a:lstStyle/>
+          <a:p>
+            <a:pPr indent="0" marL="0">
+              <a:buNone/>
+            </a:pPr>
+            <a:r>
+              <a:rPr lang="en-US" sz="1000" dirty="0">
+                <a:solidFill>
+                  <a:srgbClr val="9AA9BA"/>
+                </a:solidFill>
+                <a:latin typeface="Meiryo" pitchFamily="34" charset="0"/>
+                <a:ea typeface="Meiryo" pitchFamily="34" charset="-122"/>
+                <a:cs typeface="Meiryo" pitchFamily="34" charset="-120"/>
+              </a:rPr>
+              <a:t>※ グラフは上の枠内に貼り付ける</a:t>
+            </a:r>
+            <a:endParaRPr lang="en-US" sz="1000" dirty="0"/>
+          </a:p>
+        </p:txBody>
+      </p:sp>
+      <p:sp>
+        <p:nvSpPr>
+          <p:cNvPr id="19" name="Text 16"/>
+          <p:cNvSpPr txBox="1"/>
+          <p:nvPr/>
+        </p:nvSpPr>
+        <p:spPr>
+          <a:xfrm>
+            <a:off x="11411712" y="6419088"/>
+            <a:ext cx="365760" cy="274320"/>
+          </a:xfrm>
+          <a:prstGeom prst="rect">
+            <a:avLst/>
+          </a:prstGeom>
+          <a:noFill/>
+          <a:ln/>
+        </p:spPr>
+        <p:txBody>
+          <a:bodyPr wrap="square" lIns="0" tIns="0" rIns="0" bIns="0" rtlCol="0" anchor="ctr"/>
+          <a:lstStyle/>
+          <a:p>
+            <a:pPr algn="r" indent="0" marL="0">
+              <a:buNone/>
+            </a:pPr>
+            <a:r>
+              <a:rPr lang="en-US" sz="1000" dirty="0">
+                <a:solidFill>
+                  <a:srgbClr val="9AA9BA"/>
+                </a:solidFill>
+                <a:latin typeface="Meiryo" pitchFamily="34" charset="0"/>
+                <a:ea typeface="Meiryo" pitchFamily="34" charset="-122"/>
+                <a:cs typeface="Meiryo" pitchFamily="34" charset="-120"/>
+              </a:rPr>
+              <a:t>6</a:t>
+            </a:r>
+            <a:endParaRPr lang="en-US" sz="1000" dirty="0"/>
+          </a:p>
+        </p:txBody>
+      </p:sp>
+    </p:spTree>
+  </p:cSld>
+  <p:clrMapOvr>
+    <a:masterClrMapping/>
+  </p:clrMapOvr>
+</p:sld>
+</file>
+
+<file path=ppt/slides/slide7.xml><?xml version="1.0" encoding="utf-8"?>
+<p:sld xmlns:a="http://schemas.openxmlformats.org/drawingml/2006/main" xmlns:r="http://schemas.openxmlformats.org/officeDocument/2006/relationships" xmlns:p="http://schemas.openxmlformats.org/presentationml/2006/main">
+  <p:cSld name="Slide 7">
+    <p:bg>
+      <p:bgPr>
+        <a:solidFill>
+          <a:srgbClr val="FFFFFF"/>
+        </a:solidFill>
+      </p:bgPr>
+    </p:bg>
+    <p:spTree>
+      <p:nvGrpSpPr>
+        <p:cNvPr id="1" name=""/>
+        <p:cNvGrpSpPr/>
+        <p:nvPr/>
+      </p:nvGrpSpPr>
+      <p:grpSpPr>
+        <a:xfrm>
+          <a:off x="0" y="0"/>
+          <a:ext cx="0" cy="0"/>
+          <a:chOff x="0" y="0"/>
+          <a:chExt cx="0" cy="0"/>
+        </a:xfrm>
+      </p:grpSpPr>
+      <p:sp>
+        <p:nvSpPr>
+          <p:cNvPr id="2" name="Text 0"/>
+          <p:cNvSpPr txBox="1"/>
+          <p:nvPr/>
+        </p:nvSpPr>
+        <p:spPr>
+          <a:xfrm>
+            <a:off x="502920" y="347472"/>
+            <a:ext cx="11183112" cy="566928"/>
+          </a:xfrm>
+          <a:prstGeom prst="rect">
+            <a:avLst/>
+          </a:prstGeom>
+          <a:noFill/>
+          <a:ln/>
+        </p:spPr>
+        <p:txBody>
+          <a:bodyPr wrap="square" lIns="0" tIns="0" rIns="0" bIns="0" rtlCol="0" anchor="ctr"/>
+          <a:lstStyle/>
+          <a:p>
+            <a:pPr indent="0" marL="0">
+              <a:buNone/>
+            </a:pPr>
+            <a:r>
+              <a:rPr lang="en-US" sz="2600" b="1" dirty="0">
+                <a:solidFill>
+                  <a:srgbClr val="13294B"/>
+                </a:solidFill>
+                <a:latin typeface="Meiryo" pitchFamily="34" charset="0"/>
+                <a:ea typeface="Meiryo" pitchFamily="34" charset="-122"/>
+                <a:cs typeface="Meiryo" pitchFamily="34" charset="-120"/>
+              </a:rPr>
+              <a:t>「増えた」とは言えるが、「施策の効果」とは言い切れない</a:t>
+            </a:r>
+            <a:endParaRPr lang="en-US" sz="2600" dirty="0"/>
+          </a:p>
+        </p:txBody>
+      </p:sp>
+      <p:sp>
+        <p:nvSpPr>
+          <p:cNvPr id="3" name="Text 1"/>
+          <p:cNvSpPr txBox="1"/>
+          <p:nvPr/>
+        </p:nvSpPr>
+        <p:spPr>
+          <a:xfrm>
+            <a:off x="502920" y="950976"/>
+            <a:ext cx="11183112" cy="384048"/>
+          </a:xfrm>
+          <a:prstGeom prst="rect">
+            <a:avLst/>
+          </a:prstGeom>
+          <a:noFill/>
+          <a:ln/>
+        </p:spPr>
+        <p:txBody>
+          <a:bodyPr wrap="square" lIns="0" tIns="0" rIns="0" bIns="0" rtlCol="0" anchor="ctr"/>
+          <a:lstStyle/>
+          <a:p>
+            <a:pPr indent="0" marL="0">
+              <a:buNone/>
+            </a:pPr>
+            <a:r>
+              <a:rPr lang="en-US" sz="1350" b="1" dirty="0">
+                <a:solidFill>
+                  <a:srgbClr val="D9482F"/>
+                </a:solidFill>
+                <a:latin typeface="Meiryo" pitchFamily="34" charset="0"/>
+                <a:ea typeface="Meiryo" pitchFamily="34" charset="-122"/>
+                <a:cs typeface="Meiryo" pitchFamily="34" charset="-120"/>
+              </a:rPr>
+              <a:t>数字から言えることと言えないことを分けることも、分析の一部だと考えた。</a:t>
+            </a:r>
+            <a:endParaRPr lang="en-US" sz="1350" dirty="0"/>
+          </a:p>
+        </p:txBody>
+      </p:sp>
+      <p:sp>
+        <p:nvSpPr>
+          <p:cNvPr id="4" name="Shape 2"/>
+          <p:cNvSpPr/>
+          <p:nvPr/>
+        </p:nvSpPr>
+        <p:spPr>
+          <a:xfrm>
+            <a:off x="502920" y="1536192"/>
+            <a:ext cx="3520440" cy="4114800"/>
+          </a:xfrm>
+          <a:prstGeom prst="roundRect">
+            <a:avLst>
+              <a:gd name="adj" fmla="val 1558"/>
+            </a:avLst>
+          </a:prstGeom>
+          <a:solidFill>
+            <a:srgbClr val="EEF2F8"/>
+          </a:solidFill>
+          <a:ln w="6350">
+            <a:solidFill>
+              <a:srgbClr val="EEF2F8"/>
+            </a:solidFill>
+            <a:prstDash val="solid"/>
+          </a:ln>
+        </p:spPr>
+      </p:sp>
+      <p:sp>
+        <p:nvSpPr>
+          <p:cNvPr id="5" name="Shape 3"/>
+          <p:cNvSpPr/>
+          <p:nvPr/>
+        </p:nvSpPr>
+        <p:spPr>
+          <a:xfrm>
+            <a:off x="722376" y="1755648"/>
+            <a:ext cx="365760" cy="365760"/>
+          </a:xfrm>
+          <a:prstGeom prst="ellipse">
+            <a:avLst/>
+          </a:prstGeom>
+          <a:solidFill>
+            <a:srgbClr val="13294B"/>
+          </a:solidFill>
+          <a:ln w="6350">
+            <a:solidFill>
+              <a:srgbClr val="13294B"/>
+            </a:solidFill>
+            <a:prstDash val="solid"/>
+          </a:ln>
+        </p:spPr>
+      </p:sp>
+      <p:sp>
+        <p:nvSpPr>
+          <p:cNvPr id="6" name="Text 4"/>
+          <p:cNvSpPr txBox="1"/>
+          <p:nvPr/>
+        </p:nvSpPr>
+        <p:spPr>
+          <a:xfrm>
+            <a:off x="722376" y="1755648"/>
+            <a:ext cx="365760" cy="365760"/>
+          </a:xfrm>
+          <a:prstGeom prst="rect">
+            <a:avLst/>
+          </a:prstGeom>
+          <a:noFill/>
+          <a:ln/>
+        </p:spPr>
+        <p:txBody>
+          <a:bodyPr wrap="square" lIns="0" tIns="0" rIns="0" bIns="0" rtlCol="0" anchor="ctr"/>
+          <a:lstStyle/>
+          <a:p>
+            <a:pPr algn="ctr" indent="0" marL="0">
+              <a:buNone/>
+            </a:pPr>
+            <a:r>
+              <a:rPr lang="en-US" sz="1300" b="1" dirty="0">
+                <a:solidFill>
+                  <a:srgbClr val="FFFFFF"/>
+                </a:solidFill>
+                <a:latin typeface="Meiryo" pitchFamily="34" charset="0"/>
+                <a:ea typeface="Meiryo" pitchFamily="34" charset="-122"/>
+                <a:cs typeface="Meiryo" pitchFamily="34" charset="-120"/>
+              </a:rPr>
+              <a:t>○</a:t>
+            </a:r>
+            <a:endParaRPr lang="en-US" sz="1300" dirty="0"/>
+          </a:p>
+        </p:txBody>
+      </p:sp>
+      <p:sp>
+        <p:nvSpPr>
+          <p:cNvPr id="7" name="Text 5"/>
+          <p:cNvSpPr txBox="1"/>
+          <p:nvPr/>
+        </p:nvSpPr>
+        <p:spPr>
+          <a:xfrm>
+            <a:off x="1197864" y="1719072"/>
+            <a:ext cx="2606040" cy="457200"/>
+          </a:xfrm>
+          <a:prstGeom prst="rect">
+            <a:avLst/>
+          </a:prstGeom>
+          <a:noFill/>
+          <a:ln/>
+        </p:spPr>
+        <p:txBody>
+          <a:bodyPr wrap="square" lIns="0" tIns="0" rIns="0" bIns="0" rtlCol="0" anchor="ctr"/>
+          <a:lstStyle/>
+          <a:p>
+            <a:pPr indent="0" marL="0">
+              <a:buNone/>
+            </a:pPr>
+            <a:r>
+              <a:rPr lang="en-US" sz="1350" b="1" dirty="0">
+                <a:solidFill>
+                  <a:srgbClr val="13294B"/>
+                </a:solidFill>
+                <a:latin typeface="Meiryo" pitchFamily="34" charset="0"/>
+                <a:ea typeface="Meiryo" pitchFamily="34" charset="-122"/>
+                <a:cs typeface="Meiryo" pitchFamily="34" charset="-120"/>
+              </a:rPr>
+              <a:t>このデータから言えること</a:t>
+            </a:r>
+            <a:endParaRPr lang="en-US" sz="1350" dirty="0"/>
+          </a:p>
+        </p:txBody>
+      </p:sp>
+      <p:sp>
+        <p:nvSpPr>
+          <p:cNvPr id="8" name="Text 6"/>
+          <p:cNvSpPr txBox="1"/>
+          <p:nvPr/>
+        </p:nvSpPr>
+        <p:spPr>
+          <a:xfrm>
+            <a:off x="758952" y="2322576"/>
+            <a:ext cx="3008376" cy="3218688"/>
+          </a:xfrm>
+          <a:prstGeom prst="rect">
+            <a:avLst/>
+          </a:prstGeom>
+          <a:noFill/>
+          <a:ln/>
+        </p:spPr>
+        <p:txBody>
+          <a:bodyPr wrap="square" lIns="0" tIns="0" rIns="0" bIns="0" rtlCol="0" anchor="t"/>
+          <a:lstStyle/>
+          <a:p>
+            <a:pPr marL="342900" indent="-342900">
+              <a:lnSpc>
+                <a:spcPct val="132000"/>
+              </a:lnSpc>
+              <a:spcAft>
+                <a:spcPts val="1000"/>
+              </a:spcAft>
+              <a:buSzPct val="100000"/>
+              <a:buChar char="▪"/>
+            </a:pPr>
+            <a:r>
+              <a:rPr lang="en-US" sz="1200" dirty="0">
+                <a:solidFill>
+                  <a:srgbClr val="1E2A38"/>
+                </a:solidFill>
+                <a:latin typeface="Meiryo" pitchFamily="34" charset="0"/>
+                <a:ea typeface="Meiryo" pitchFamily="34" charset="-122"/>
+                <a:cs typeface="Meiryo" pitchFamily="34" charset="-120"/>
+              </a:rPr>
+              <a:t>前年の同時期（4〜6月）と比べて、2026年のIB利用件数は増えている。</a:t>
+            </a:r>
+            <a:endParaRPr lang="en-US" sz="1200" dirty="0"/>
+          </a:p>
+          <a:p>
+            <a:pPr marL="342900" indent="-342900">
+              <a:lnSpc>
+                <a:spcPct val="132000"/>
+              </a:lnSpc>
+              <a:spcAft>
+                <a:spcPts val="1000"/>
+              </a:spcAft>
+              <a:buSzPct val="100000"/>
+              <a:buChar char="▪"/>
+            </a:pPr>
+            <a:r>
+              <a:rPr lang="en-US" sz="1200" dirty="0">
+                <a:solidFill>
+                  <a:srgbClr val="1E2A38"/>
+                </a:solidFill>
+                <a:latin typeface="Meiryo" pitchFamily="34" charset="0"/>
+                <a:ea typeface="Meiryo" pitchFamily="34" charset="-122"/>
+                <a:cs typeface="Meiryo" pitchFamily="34" charset="-120"/>
+              </a:rPr>
+              <a:t>1か月あたり 約15〜16万件 → 約18〜20万件。</a:t>
+            </a:r>
+            <a:endParaRPr lang="en-US" sz="1200" dirty="0"/>
+          </a:p>
+        </p:txBody>
+      </p:sp>
+      <p:sp>
+        <p:nvSpPr>
+          <p:cNvPr id="9" name="Shape 7"/>
+          <p:cNvSpPr/>
+          <p:nvPr/>
+        </p:nvSpPr>
+        <p:spPr>
+          <a:xfrm>
+            <a:off x="4288536" y="1536192"/>
+            <a:ext cx="3520440" cy="4114800"/>
+          </a:xfrm>
+          <a:prstGeom prst="roundRect">
+            <a:avLst>
+              <a:gd name="adj" fmla="val 1558"/>
+            </a:avLst>
+          </a:prstGeom>
+          <a:solidFill>
+            <a:srgbClr val="FBEAE4"/>
+          </a:solidFill>
+          <a:ln w="6350">
+            <a:solidFill>
+              <a:srgbClr val="FBEAE4"/>
+            </a:solidFill>
+            <a:prstDash val="solid"/>
+          </a:ln>
+        </p:spPr>
+      </p:sp>
+      <p:sp>
+        <p:nvSpPr>
+          <p:cNvPr id="10" name="Shape 8"/>
+          <p:cNvSpPr/>
+          <p:nvPr/>
+        </p:nvSpPr>
+        <p:spPr>
+          <a:xfrm>
+            <a:off x="4507992" y="1755648"/>
+            <a:ext cx="365760" cy="365760"/>
+          </a:xfrm>
+          <a:prstGeom prst="ellipse">
+            <a:avLst/>
+          </a:prstGeom>
+          <a:solidFill>
+            <a:srgbClr val="D9482F"/>
+          </a:solidFill>
+          <a:ln w="6350">
+            <a:solidFill>
+              <a:srgbClr val="D9482F"/>
+            </a:solidFill>
+            <a:prstDash val="solid"/>
+          </a:ln>
+        </p:spPr>
+      </p:sp>
+      <p:sp>
+        <p:nvSpPr>
+          <p:cNvPr id="11" name="Text 9"/>
+          <p:cNvSpPr txBox="1"/>
+          <p:nvPr/>
+        </p:nvSpPr>
+        <p:spPr>
+          <a:xfrm>
+            <a:off x="4507992" y="1755648"/>
+            <a:ext cx="365760" cy="365760"/>
+          </a:xfrm>
+          <a:prstGeom prst="rect">
+            <a:avLst/>
+          </a:prstGeom>
+          <a:noFill/>
+          <a:ln/>
+        </p:spPr>
+        <p:txBody>
+          <a:bodyPr wrap="square" lIns="0" tIns="0" rIns="0" bIns="0" rtlCol="0" anchor="ctr"/>
+          <a:lstStyle/>
+          <a:p>
+            <a:pPr algn="ctr" indent="0" marL="0">
+              <a:buNone/>
+            </a:pPr>
+            <a:r>
+              <a:rPr lang="en-US" sz="1300" b="1" dirty="0">
+                <a:solidFill>
+                  <a:srgbClr val="FFFFFF"/>
+                </a:solidFill>
+                <a:latin typeface="Meiryo" pitchFamily="34" charset="0"/>
+                <a:ea typeface="Meiryo" pitchFamily="34" charset="-122"/>
+                <a:cs typeface="Meiryo" pitchFamily="34" charset="-120"/>
+              </a:rPr>
+              <a:t>△</a:t>
+            </a:r>
+            <a:endParaRPr lang="en-US" sz="1300" dirty="0"/>
+          </a:p>
+        </p:txBody>
+      </p:sp>
+      <p:sp>
+        <p:nvSpPr>
+          <p:cNvPr id="12" name="Text 10"/>
+          <p:cNvSpPr txBox="1"/>
+          <p:nvPr/>
+        </p:nvSpPr>
+        <p:spPr>
+          <a:xfrm>
+            <a:off x="4983480" y="1719072"/>
+            <a:ext cx="2606040" cy="457200"/>
+          </a:xfrm>
+          <a:prstGeom prst="rect">
+            <a:avLst/>
+          </a:prstGeom>
+          <a:noFill/>
+          <a:ln/>
+        </p:spPr>
+        <p:txBody>
+          <a:bodyPr wrap="square" lIns="0" tIns="0" rIns="0" bIns="0" rtlCol="0" anchor="ctr"/>
+          <a:lstStyle/>
+          <a:p>
+            <a:pPr indent="0" marL="0">
+              <a:buNone/>
+            </a:pPr>
+            <a:r>
+              <a:rPr lang="en-US" sz="1350" b="1" dirty="0">
+                <a:solidFill>
+                  <a:srgbClr val="D9482F"/>
+                </a:solidFill>
+                <a:latin typeface="Meiryo" pitchFamily="34" charset="0"/>
+                <a:ea typeface="Meiryo" pitchFamily="34" charset="-122"/>
+                <a:cs typeface="Meiryo" pitchFamily="34" charset="-120"/>
+              </a:rPr>
+              <a:t>このデータからは言えないこと</a:t>
+            </a:r>
+            <a:endParaRPr lang="en-US" sz="1350" dirty="0"/>
+          </a:p>
+        </p:txBody>
+      </p:sp>
+      <p:sp>
+        <p:nvSpPr>
+          <p:cNvPr id="13" name="Text 11"/>
+          <p:cNvSpPr txBox="1"/>
+          <p:nvPr/>
+        </p:nvSpPr>
+        <p:spPr>
+          <a:xfrm>
+            <a:off x="4544568" y="2322576"/>
+            <a:ext cx="3008376" cy="3218688"/>
+          </a:xfrm>
+          <a:prstGeom prst="rect">
+            <a:avLst/>
+          </a:prstGeom>
+          <a:noFill/>
+          <a:ln/>
+        </p:spPr>
+        <p:txBody>
+          <a:bodyPr wrap="square" lIns="0" tIns="0" rIns="0" bIns="0" rtlCol="0" anchor="t"/>
+          <a:lstStyle/>
+          <a:p>
+            <a:pPr marL="342900" indent="-342900">
+              <a:lnSpc>
+                <a:spcPct val="132000"/>
+              </a:lnSpc>
+              <a:spcAft>
+                <a:spcPts val="1000"/>
+              </a:spcAft>
+              <a:buSzPct val="100000"/>
+              <a:buChar char="▪"/>
+            </a:pPr>
+            <a:r>
+              <a:rPr lang="en-US" sz="1200" dirty="0">
+                <a:solidFill>
+                  <a:srgbClr val="1E2A38"/>
+                </a:solidFill>
+                <a:latin typeface="Meiryo" pitchFamily="34" charset="0"/>
+                <a:ea typeface="Meiryo" pitchFamily="34" charset="-122"/>
+                <a:cs typeface="Meiryo" pitchFamily="34" charset="-120"/>
+              </a:rPr>
+              <a:t>比較できるのは4〜6月の3か月分×2年のみで、連続した推移が追えない。</a:t>
+            </a:r>
+            <a:endParaRPr lang="en-US" sz="1200" dirty="0"/>
+          </a:p>
+          <a:p>
+            <a:pPr marL="342900" indent="-342900">
+              <a:lnSpc>
+                <a:spcPct val="132000"/>
+              </a:lnSpc>
+              <a:spcAft>
+                <a:spcPts val="1000"/>
+              </a:spcAft>
+              <a:buSzPct val="100000"/>
+              <a:buChar char="▪"/>
+            </a:pPr>
+            <a:r>
+              <a:rPr lang="en-US" sz="1200" dirty="0">
+                <a:solidFill>
+                  <a:srgbClr val="1E2A38"/>
+                </a:solidFill>
+                <a:latin typeface="Meiryo" pitchFamily="34" charset="0"/>
+                <a:ea typeface="Meiryo" pitchFamily="34" charset="-122"/>
+                <a:cs typeface="Meiryo" pitchFamily="34" charset="-120"/>
+              </a:rPr>
+              <a:t>口座数の変化、取引全体の増減、季節性、社会全体でのIB利用の広がりなど、施策以外の要因を切り分けられない。</a:t>
+            </a:r>
+            <a:endParaRPr lang="en-US" sz="1200" dirty="0"/>
+          </a:p>
+          <a:p>
+            <a:pPr marL="342900" indent="-342900">
+              <a:lnSpc>
+                <a:spcPct val="132000"/>
+              </a:lnSpc>
+              <a:spcAft>
+                <a:spcPts val="1000"/>
+              </a:spcAft>
+              <a:buSzPct val="100000"/>
+              <a:buChar char="▪"/>
+            </a:pPr>
+            <a:r>
+              <a:rPr lang="en-US" sz="1200" dirty="0">
+                <a:solidFill>
+                  <a:srgbClr val="1E2A38"/>
+                </a:solidFill>
+                <a:latin typeface="Meiryo" pitchFamily="34" charset="0"/>
+                <a:ea typeface="Meiryo" pitchFamily="34" charset="-122"/>
+                <a:cs typeface="Meiryo" pitchFamily="34" charset="-120"/>
+              </a:rPr>
+              <a:t>→「IB普及施策によって増えた」という因果関係は、このデータだけでは判断できない。</a:t>
+            </a:r>
+            <a:endParaRPr lang="en-US" sz="1200" dirty="0"/>
+          </a:p>
+        </p:txBody>
+      </p:sp>
+      <p:sp>
+        <p:nvSpPr>
+          <p:cNvPr id="14" name="Shape 12"/>
+          <p:cNvSpPr/>
+          <p:nvPr/>
+        </p:nvSpPr>
+        <p:spPr>
+          <a:xfrm>
+            <a:off x="8074152" y="1536192"/>
+            <a:ext cx="3520440" cy="4114800"/>
+          </a:xfrm>
+          <a:prstGeom prst="roundRect">
+            <a:avLst>
+              <a:gd name="adj" fmla="val 1558"/>
+            </a:avLst>
+          </a:prstGeom>
+          <a:solidFill>
+            <a:srgbClr val="EEF2F8"/>
+          </a:solidFill>
+          <a:ln w="6350">
+            <a:solidFill>
+              <a:srgbClr val="EEF2F8"/>
+            </a:solidFill>
+            <a:prstDash val="solid"/>
+          </a:ln>
+        </p:spPr>
+      </p:sp>
+      <p:sp>
+        <p:nvSpPr>
+          <p:cNvPr id="15" name="Shape 13"/>
+          <p:cNvSpPr/>
+          <p:nvPr/>
+        </p:nvSpPr>
+        <p:spPr>
+          <a:xfrm>
+            <a:off x="8293608" y="1755648"/>
+            <a:ext cx="365760" cy="365760"/>
+          </a:xfrm>
+          <a:prstGeom prst="ellipse">
+            <a:avLst/>
+          </a:prstGeom>
+          <a:solidFill>
+            <a:srgbClr val="2A4A7A"/>
+          </a:solidFill>
+          <a:ln w="6350">
+            <a:solidFill>
+              <a:srgbClr val="2A4A7A"/>
+            </a:solidFill>
+            <a:prstDash val="solid"/>
+          </a:ln>
+        </p:spPr>
+      </p:sp>
+      <p:sp>
+        <p:nvSpPr>
+          <p:cNvPr id="16" name="Text 14"/>
+          <p:cNvSpPr txBox="1"/>
+          <p:nvPr/>
+        </p:nvSpPr>
+        <p:spPr>
+          <a:xfrm>
+            <a:off x="8293608" y="1755648"/>
+            <a:ext cx="365760" cy="365760"/>
+          </a:xfrm>
+          <a:prstGeom prst="rect">
+            <a:avLst/>
+          </a:prstGeom>
+          <a:noFill/>
+          <a:ln/>
+        </p:spPr>
+        <p:txBody>
+          <a:bodyPr wrap="square" lIns="0" tIns="0" rIns="0" bIns="0" rtlCol="0" anchor="ctr"/>
+          <a:lstStyle/>
+          <a:p>
+            <a:pPr algn="ctr" indent="0" marL="0">
+              <a:buNone/>
+            </a:pPr>
+            <a:r>
+              <a:rPr lang="en-US" sz="1300" b="1" dirty="0">
+                <a:solidFill>
+                  <a:srgbClr val="FFFFFF"/>
+                </a:solidFill>
+                <a:latin typeface="Meiryo" pitchFamily="34" charset="0"/>
+                <a:ea typeface="Meiryo" pitchFamily="34" charset="-122"/>
+                <a:cs typeface="Meiryo" pitchFamily="34" charset="-120"/>
+              </a:rPr>
+              <a:t>▶</a:t>
+            </a:r>
+            <a:endParaRPr lang="en-US" sz="1300" dirty="0"/>
+          </a:p>
+        </p:txBody>
+      </p:sp>
+      <p:sp>
+        <p:nvSpPr>
+          <p:cNvPr id="17" name="Text 15"/>
+          <p:cNvSpPr txBox="1"/>
+          <p:nvPr/>
+        </p:nvSpPr>
+        <p:spPr>
+          <a:xfrm>
+            <a:off x="8769096" y="1719072"/>
+            <a:ext cx="2606040" cy="457200"/>
+          </a:xfrm>
+          <a:prstGeom prst="rect">
+            <a:avLst/>
+          </a:prstGeom>
+          <a:noFill/>
+          <a:ln/>
+        </p:spPr>
+        <p:txBody>
+          <a:bodyPr wrap="square" lIns="0" tIns="0" rIns="0" bIns="0" rtlCol="0" anchor="ctr"/>
+          <a:lstStyle/>
+          <a:p>
+            <a:pPr indent="0" marL="0">
+              <a:buNone/>
+            </a:pPr>
+            <a:r>
+              <a:rPr lang="en-US" sz="1350" b="1" dirty="0">
+                <a:solidFill>
+                  <a:srgbClr val="2A4A7A"/>
+                </a:solidFill>
+                <a:latin typeface="Meiryo" pitchFamily="34" charset="0"/>
+                <a:ea typeface="Meiryo" pitchFamily="34" charset="-122"/>
+                <a:cs typeface="Meiryo" pitchFamily="34" charset="-120"/>
+              </a:rPr>
+              <a:t>データが蓄積されれば確かめられること</a:t>
+            </a:r>
+            <a:endParaRPr lang="en-US" sz="1350" dirty="0"/>
+          </a:p>
+        </p:txBody>
+      </p:sp>
+      <p:sp>
+        <p:nvSpPr>
+          <p:cNvPr id="18" name="Text 16"/>
+          <p:cNvSpPr txBox="1"/>
+          <p:nvPr/>
+        </p:nvSpPr>
+        <p:spPr>
+          <a:xfrm>
+            <a:off x="8330184" y="2322576"/>
+            <a:ext cx="3008376" cy="3218688"/>
+          </a:xfrm>
+          <a:prstGeom prst="rect">
+            <a:avLst/>
+          </a:prstGeom>
+          <a:noFill/>
+          <a:ln/>
+        </p:spPr>
+        <p:txBody>
+          <a:bodyPr wrap="square" lIns="0" tIns="0" rIns="0" bIns="0" rtlCol="0" anchor="t"/>
+          <a:lstStyle/>
+          <a:p>
+            <a:pPr marL="342900" indent="-342900">
+              <a:lnSpc>
+                <a:spcPct val="132000"/>
+              </a:lnSpc>
+              <a:spcAft>
+                <a:spcPts val="1000"/>
+              </a:spcAft>
+              <a:buSzPct val="100000"/>
+              <a:buChar char="▪"/>
+            </a:pPr>
+            <a:r>
+              <a:rPr lang="en-US" sz="1200" dirty="0">
+                <a:solidFill>
+                  <a:srgbClr val="1E2A38"/>
+                </a:solidFill>
+                <a:latin typeface="Meiryo" pitchFamily="34" charset="0"/>
+                <a:ea typeface="Meiryo" pitchFamily="34" charset="-122"/>
+                <a:cs typeface="Meiryo" pitchFamily="34" charset="-120"/>
+              </a:rPr>
+              <a:t>連続した月次の推移を見て、施策の前後で変化しているかを確かめる。</a:t>
+            </a:r>
+            <a:endParaRPr lang="en-US" sz="1200" dirty="0"/>
+          </a:p>
+          <a:p>
+            <a:pPr marL="342900" indent="-342900">
+              <a:lnSpc>
+                <a:spcPct val="132000"/>
+              </a:lnSpc>
+              <a:spcAft>
+                <a:spcPts val="1000"/>
+              </a:spcAft>
+              <a:buSzPct val="100000"/>
+              <a:buChar char="▪"/>
+            </a:pPr>
+            <a:r>
+              <a:rPr lang="en-US" sz="1200" dirty="0">
+                <a:solidFill>
+                  <a:srgbClr val="1E2A38"/>
+                </a:solidFill>
+                <a:latin typeface="Meiryo" pitchFamily="34" charset="0"/>
+                <a:ea typeface="Meiryo" pitchFamily="34" charset="-122"/>
+                <a:cs typeface="Meiryo" pitchFamily="34" charset="-120"/>
+              </a:rPr>
+              <a:t>ATMのIB代替可能取引が減っているかを、IBの増加と対応させて見る。</a:t>
+            </a:r>
+            <a:endParaRPr lang="en-US" sz="1200" dirty="0"/>
+          </a:p>
+          <a:p>
+            <a:pPr marL="342900" indent="-342900">
+              <a:lnSpc>
+                <a:spcPct val="132000"/>
+              </a:lnSpc>
+              <a:spcAft>
+                <a:spcPts val="1000"/>
+              </a:spcAft>
+              <a:buSzPct val="100000"/>
+              <a:buChar char="▪"/>
+            </a:pPr>
+            <a:r>
+              <a:rPr lang="en-US" sz="1200" dirty="0">
+                <a:solidFill>
+                  <a:srgbClr val="1E2A38"/>
+                </a:solidFill>
+                <a:latin typeface="Meiryo" pitchFamily="34" charset="0"/>
+                <a:ea typeface="Meiryo" pitchFamily="34" charset="-122"/>
+                <a:cs typeface="Meiryo" pitchFamily="34" charset="-120"/>
+              </a:rPr>
+              <a:t>支店や年代などの属性別に、普及の進み方の違いを見る。</a:t>
+            </a:r>
+            <a:endParaRPr lang="en-US" sz="1200" dirty="0"/>
+          </a:p>
+        </p:txBody>
+      </p:sp>
+      <p:sp>
+        <p:nvSpPr>
+          <p:cNvPr id="19" name="Shape 17"/>
+          <p:cNvSpPr/>
+          <p:nvPr/>
+        </p:nvSpPr>
+        <p:spPr>
+          <a:xfrm>
+            <a:off x="502920" y="5797296"/>
+            <a:ext cx="11183112" cy="548640"/>
+          </a:xfrm>
+          <a:prstGeom prst="roundRect">
+            <a:avLst>
+              <a:gd name="adj" fmla="val 10000"/>
+            </a:avLst>
+          </a:prstGeom>
+          <a:solidFill>
+            <a:srgbClr val="13294B"/>
+          </a:solidFill>
+          <a:ln w="6350">
+            <a:solidFill>
+              <a:srgbClr val="13294B"/>
+            </a:solidFill>
+            <a:prstDash val="solid"/>
+          </a:ln>
+        </p:spPr>
+      </p:sp>
+      <p:sp>
+        <p:nvSpPr>
+          <p:cNvPr id="20" name="Text 18"/>
+          <p:cNvSpPr txBox="1"/>
+          <p:nvPr/>
+        </p:nvSpPr>
+        <p:spPr>
+          <a:xfrm>
+            <a:off x="758952" y="5797296"/>
+            <a:ext cx="10671048" cy="548640"/>
+          </a:xfrm>
+          <a:prstGeom prst="rect">
+            <a:avLst/>
+          </a:prstGeom>
+          <a:noFill/>
+          <a:ln/>
+        </p:spPr>
+        <p:txBody>
+          <a:bodyPr wrap="square" lIns="0" tIns="0" rIns="0" bIns="0" rtlCol="0" anchor="ctr"/>
+          <a:lstStyle/>
+          <a:p>
+            <a:pPr algn="ctr" indent="0" marL="0">
+              <a:buNone/>
+            </a:pPr>
+            <a:r>
+              <a:rPr lang="en-US" sz="1350" b="1" dirty="0">
+                <a:solidFill>
+                  <a:srgbClr val="FFFFFF"/>
+                </a:solidFill>
+                <a:latin typeface="Meiryo" pitchFamily="34" charset="0"/>
+                <a:ea typeface="Meiryo" pitchFamily="34" charset="-122"/>
+                <a:cs typeface="Meiryo" pitchFamily="34" charset="-120"/>
+              </a:rPr>
+              <a:t>「増えている」という事実は確認できた。同時に、次に何を確かめればよいかがはっきりした。</a:t>
+            </a:r>
+            <a:endParaRPr lang="en-US" sz="1350" dirty="0"/>
+          </a:p>
+        </p:txBody>
+      </p:sp>
+      <p:sp>
+        <p:nvSpPr>
+          <p:cNvPr id="22" name="Text 19"/>
+          <p:cNvSpPr txBox="1"/>
+          <p:nvPr/>
+        </p:nvSpPr>
+        <p:spPr>
+          <a:xfrm>
+            <a:off x="11411712" y="6419088"/>
+            <a:ext cx="365760" cy="274320"/>
+          </a:xfrm>
+          <a:prstGeom prst="rect">
+            <a:avLst/>
+          </a:prstGeom>
+          <a:noFill/>
+          <a:ln/>
+        </p:spPr>
+        <p:txBody>
+          <a:bodyPr wrap="square" lIns="0" tIns="0" rIns="0" bIns="0" rtlCol="0" anchor="ctr"/>
+          <a:lstStyle/>
+          <a:p>
+            <a:pPr algn="r" indent="0" marL="0">
+              <a:buNone/>
+            </a:pPr>
+            <a:r>
+              <a:rPr lang="en-US" sz="1000" dirty="0">
+                <a:solidFill>
+                  <a:srgbClr val="9AA9BA"/>
+                </a:solidFill>
+                <a:latin typeface="Meiryo" pitchFamily="34" charset="0"/>
+                <a:ea typeface="Meiryo" pitchFamily="34" charset="-122"/>
+                <a:cs typeface="Meiryo" pitchFamily="34" charset="-120"/>
+              </a:rPr>
+              <a:t>7</a:t>
+            </a:r>
+            <a:endParaRPr lang="en-US" sz="1000" dirty="0"/>
+          </a:p>
+        </p:txBody>
+      </p:sp>
+    </p:spTree>
+  </p:cSld>
+  <p:clrMapOvr>
+    <a:masterClrMapping/>
+  </p:clrMapOvr>
+</p:sld>
+</file>
+
+<file path=ppt/slides/slide8.xml><?xml version="1.0" encoding="utf-8"?>
+<p:sld xmlns:a="http://schemas.openxmlformats.org/drawingml/2006/main" xmlns:r="http://schemas.openxmlformats.org/officeDocument/2006/relationships" xmlns:p="http://schemas.openxmlformats.org/presentationml/2006/main">
+  <p:cSld name="Slide 8">
     <p:bg>
       <p:bgPr>
         <a:solidFill>
@@ -5501,7 +7656,7 @@
                 <a:ea typeface="Meiryo" pitchFamily="34" charset="-122"/>
                 <a:cs typeface="Meiryo" pitchFamily="34" charset="-120"/>
               </a:rPr>
-              <a:t>難しいのは分析手法ではなく、「何を見るか」を決めること</a:t>
+              <a:t>この一連の流れを、専門的な分析知識なしで実施できた</a:t>
             </a:r>
             <a:endParaRPr lang="en-US" sz="2600" dirty="0"/>
           </a:p>
@@ -5540,7 +7695,7 @@
                 <a:ea typeface="Meiryo" pitchFamily="34" charset="-122"/>
                 <a:cs typeface="Meiryo" pitchFamily="34" charset="-120"/>
               </a:rPr>
-              <a:t>DYNATREKが「取り出す」壁を下げてくれるからこそ、「何を見るか」を考えることに時間を使えた。</a:t>
+              <a:t>人が考えるところと、DYNATREKが引き受けるところ。</a:t>
             </a:r>
             <a:endParaRPr lang="en-US" sz="1350" dirty="0"/>
           </a:p>
@@ -5554,12 +7709,12 @@
         </p:nvSpPr>
         <p:spPr>
           <a:xfrm>
-            <a:off x="502920" y="1572768"/>
-            <a:ext cx="3520440" cy="3401568"/>
+            <a:off x="781812" y="1883664"/>
+            <a:ext cx="1920240" cy="1783080"/>
           </a:xfrm>
           <a:prstGeom prst="roundRect">
             <a:avLst>
-              <a:gd name="adj" fmla="val 1613"/>
+              <a:gd name="adj" fmla="val 3077"/>
             </a:avLst>
           </a:prstGeom>
           <a:solidFill>
@@ -5581,24 +7736,24 @@
         </p:nvSpPr>
         <p:spPr>
           <a:xfrm>
-            <a:off x="758952" y="1755648"/>
-            <a:ext cx="3008376" cy="384048"/>
-          </a:xfrm>
-          <a:prstGeom prst="rect">
-            <a:avLst/>
-          </a:prstGeom>
-          <a:noFill/>
-          <a:ln/>
-        </p:spPr>
-        <p:txBody>
-          <a:bodyPr wrap="square" lIns="0" tIns="0" rIns="0" bIns="0" rtlCol="0" anchor="ctr"/>
-          <a:lstStyle/>
-          <a:p>
-            <a:pPr indent="0" marL="0">
-              <a:buNone/>
-            </a:pPr>
-            <a:r>
-              <a:rPr lang="en-US" sz="1400" b="1" dirty="0">
+            <a:off x="781812" y="2048256"/>
+            <a:ext cx="1920240" cy="274320"/>
+          </a:xfrm>
+          <a:prstGeom prst="rect">
+            <a:avLst/>
+          </a:prstGeom>
+          <a:noFill/>
+          <a:ln/>
+        </p:spPr>
+        <p:txBody>
+          <a:bodyPr wrap="square" lIns="0" tIns="0" rIns="0" bIns="0" rtlCol="0" anchor="ctr"/>
+          <a:lstStyle/>
+          <a:p>
+            <a:pPr algn="ctr" indent="0" marL="0">
+              <a:buNone/>
+            </a:pPr>
+            <a:r>
+              <a:rPr lang="en-US" sz="1050" b="1" dirty="0">
                 <a:solidFill>
                   <a:srgbClr val="FFC9BC"/>
                 </a:solidFill>
@@ -5606,9 +7761,9 @@
                 <a:ea typeface="Meiryo" pitchFamily="34" charset="-122"/>
                 <a:cs typeface="Meiryo" pitchFamily="34" charset="-120"/>
               </a:rPr>
-              <a:t>DYNATREKに感じた価値</a:t>
-            </a:r>
-            <a:endParaRPr lang="en-US" sz="1400" dirty="0"/>
+              <a:t>人</a:t>
+            </a:r>
+            <a:endParaRPr lang="en-US" sz="1050" dirty="0"/>
           </a:p>
         </p:txBody>
       </p:sp>
@@ -5620,27 +7775,27 @@
         </p:nvSpPr>
         <p:spPr>
           <a:xfrm>
-            <a:off x="758952" y="2212848"/>
-            <a:ext cx="3008376" cy="2560320"/>
-          </a:xfrm>
-          <a:prstGeom prst="rect">
-            <a:avLst/>
-          </a:prstGeom>
-          <a:noFill/>
-          <a:ln/>
-        </p:spPr>
-        <p:txBody>
-          <a:bodyPr wrap="square" lIns="0" tIns="0" rIns="0" bIns="0" rtlCol="0" anchor="t"/>
-          <a:lstStyle/>
-          <a:p>
-            <a:pPr indent="0" marL="0">
+            <a:off x="909828" y="2395728"/>
+            <a:ext cx="1664208" cy="1005840"/>
+          </a:xfrm>
+          <a:prstGeom prst="rect">
+            <a:avLst/>
+          </a:prstGeom>
+          <a:noFill/>
+          <a:ln/>
+        </p:spPr>
+        <p:txBody>
+          <a:bodyPr wrap="square" lIns="0" tIns="0" rIns="0" bIns="0" rtlCol="0" anchor="ctr"/>
+          <a:lstStyle/>
+          <a:p>
+            <a:pPr algn="ctr" indent="0" marL="0">
               <a:lnSpc>
-                <a:spcPct val="135000"/>
+                <a:spcPct val="130000"/>
               </a:lnSpc>
               <a:buNone/>
             </a:pPr>
             <a:r>
-              <a:rPr lang="en-US" sz="1150" dirty="0">
+              <a:rPr lang="en-US" sz="1250" b="1" dirty="0">
                 <a:solidFill>
                   <a:srgbClr val="FFFFFF"/>
                 </a:solidFill>
@@ -5648,9 +7803,29 @@
                 <a:ea typeface="Meiryo" pitchFamily="34" charset="-122"/>
                 <a:cs typeface="Meiryo" pitchFamily="34" charset="-120"/>
               </a:rPr>
-              <a:t>業務DBには分析に使わない項目も多く含まれ、目的のデータを取り出すこと自体が難しい。DYNATREKは条件を指定して必要なデータだけを表示・集計できるため、専門的な分析知識がなくても、業務上の疑問をその場でデータに当てて確かめられる。</a:t>
-            </a:r>
-            <a:endParaRPr lang="en-US" sz="1150" dirty="0"/>
+              <a:t>IBの普及状況を</a:t>
+            </a:r>
+            <a:endParaRPr lang="en-US" sz="1250" dirty="0"/>
+          </a:p>
+          <a:p>
+            <a:pPr algn="ctr" indent="0" marL="0">
+              <a:lnSpc>
+                <a:spcPct val="130000"/>
+              </a:lnSpc>
+              <a:buNone/>
+            </a:pPr>
+            <a:r>
+              <a:rPr lang="en-US" sz="1250" b="1" dirty="0">
+                <a:solidFill>
+                  <a:srgbClr val="FFFFFF"/>
+                </a:solidFill>
+                <a:latin typeface="Meiryo" pitchFamily="34" charset="0"/>
+                <a:ea typeface="Meiryo" pitchFamily="34" charset="-122"/>
+                <a:cs typeface="Meiryo" pitchFamily="34" charset="-120"/>
+              </a:rPr>
+              <a:t>知りたい</a:t>
+            </a:r>
+            <a:endParaRPr lang="en-US" sz="1250" dirty="0"/>
           </a:p>
         </p:txBody>
       </p:sp>
@@ -5662,12 +7837,37 @@
         </p:nvSpPr>
         <p:spPr>
           <a:xfrm>
-            <a:off x="4288536" y="1572768"/>
-            <a:ext cx="3520440" cy="3401568"/>
+            <a:off x="2729484" y="2633472"/>
+            <a:ext cx="201168" cy="274320"/>
+          </a:xfrm>
+          <a:prstGeom prst="rightArrow">
+            <a:avLst/>
+          </a:prstGeom>
+          <a:solidFill>
+            <a:srgbClr val="2A4A7A"/>
+          </a:solidFill>
+          <a:ln w="6350">
+            <a:solidFill>
+              <a:srgbClr val="2A4A7A"/>
+            </a:solidFill>
+            <a:prstDash val="solid"/>
+          </a:ln>
+        </p:spPr>
+      </p:sp>
+      <p:sp>
+        <p:nvSpPr>
+          <p:cNvPr id="8" name="Shape 6"/>
+          <p:cNvSpPr/>
+          <p:nvPr/>
+        </p:nvSpPr>
+        <p:spPr>
+          <a:xfrm>
+            <a:off x="2958084" y="1883664"/>
+            <a:ext cx="1920240" cy="1783080"/>
           </a:xfrm>
           <a:prstGeom prst="roundRect">
             <a:avLst>
-              <a:gd name="adj" fmla="val 1613"/>
+              <a:gd name="adj" fmla="val 3077"/>
             </a:avLst>
           </a:prstGeom>
           <a:solidFill>
@@ -5683,30 +7883,30 @@
       </p:sp>
       <p:sp>
         <p:nvSpPr>
-          <p:cNvPr id="8" name="Text 6"/>
-          <p:cNvSpPr txBox="1"/>
-          <p:nvPr/>
-        </p:nvSpPr>
-        <p:spPr>
-          <a:xfrm>
-            <a:off x="4544568" y="1755648"/>
-            <a:ext cx="3008376" cy="384048"/>
-          </a:xfrm>
-          <a:prstGeom prst="rect">
-            <a:avLst/>
-          </a:prstGeom>
-          <a:noFill/>
-          <a:ln/>
-        </p:spPr>
-        <p:txBody>
-          <a:bodyPr wrap="square" lIns="0" tIns="0" rIns="0" bIns="0" rtlCol="0" anchor="ctr"/>
-          <a:lstStyle/>
-          <a:p>
-            <a:pPr indent="0" marL="0">
-              <a:buNone/>
-            </a:pPr>
-            <a:r>
-              <a:rPr lang="en-US" sz="1400" b="1" dirty="0">
+          <p:cNvPr id="9" name="Text 7"/>
+          <p:cNvSpPr txBox="1"/>
+          <p:nvPr/>
+        </p:nvSpPr>
+        <p:spPr>
+          <a:xfrm>
+            <a:off x="2958084" y="2048256"/>
+            <a:ext cx="1920240" cy="274320"/>
+          </a:xfrm>
+          <a:prstGeom prst="rect">
+            <a:avLst/>
+          </a:prstGeom>
+          <a:noFill/>
+          <a:ln/>
+        </p:spPr>
+        <p:txBody>
+          <a:bodyPr wrap="square" lIns="0" tIns="0" rIns="0" bIns="0" rtlCol="0" anchor="ctr"/>
+          <a:lstStyle/>
+          <a:p>
+            <a:pPr algn="ctr" indent="0" marL="0">
+              <a:buNone/>
+            </a:pPr>
+            <a:r>
+              <a:rPr lang="en-US" sz="1050" b="1" dirty="0">
                 <a:solidFill>
                   <a:srgbClr val="FFC9BC"/>
                 </a:solidFill>
@@ -5714,41 +7914,41 @@
                 <a:ea typeface="Meiryo" pitchFamily="34" charset="-122"/>
                 <a:cs typeface="Meiryo" pitchFamily="34" charset="-120"/>
               </a:rPr>
-              <a:t>今回いちばん難しかったこと</a:t>
-            </a:r>
-            <a:endParaRPr lang="en-US" sz="1400" dirty="0"/>
-          </a:p>
-        </p:txBody>
-      </p:sp>
-      <p:sp>
-        <p:nvSpPr>
-          <p:cNvPr id="9" name="Text 7"/>
-          <p:cNvSpPr txBox="1"/>
-          <p:nvPr/>
-        </p:nvSpPr>
-        <p:spPr>
-          <a:xfrm>
-            <a:off x="4544568" y="2212848"/>
-            <a:ext cx="3008376" cy="2560320"/>
-          </a:xfrm>
-          <a:prstGeom prst="rect">
-            <a:avLst/>
-          </a:prstGeom>
-          <a:noFill/>
-          <a:ln/>
-        </p:spPr>
-        <p:txBody>
-          <a:bodyPr wrap="square" lIns="0" tIns="0" rIns="0" bIns="0" rtlCol="0" anchor="t"/>
-          <a:lstStyle/>
-          <a:p>
-            <a:pPr indent="0" marL="0">
+              <a:t>人</a:t>
+            </a:r>
+            <a:endParaRPr lang="en-US" sz="1050" dirty="0"/>
+          </a:p>
+        </p:txBody>
+      </p:sp>
+      <p:sp>
+        <p:nvSpPr>
+          <p:cNvPr id="10" name="Text 8"/>
+          <p:cNvSpPr txBox="1"/>
+          <p:nvPr/>
+        </p:nvSpPr>
+        <p:spPr>
+          <a:xfrm>
+            <a:off x="3086100" y="2395728"/>
+            <a:ext cx="1664208" cy="1005840"/>
+          </a:xfrm>
+          <a:prstGeom prst="rect">
+            <a:avLst/>
+          </a:prstGeom>
+          <a:noFill/>
+          <a:ln/>
+        </p:spPr>
+        <p:txBody>
+          <a:bodyPr wrap="square" lIns="0" tIns="0" rIns="0" bIns="0" rtlCol="0" anchor="ctr"/>
+          <a:lstStyle/>
+          <a:p>
+            <a:pPr algn="ctr" indent="0" marL="0">
               <a:lnSpc>
-                <a:spcPct val="135000"/>
+                <a:spcPct val="130000"/>
               </a:lnSpc>
               <a:buNone/>
             </a:pPr>
             <a:r>
-              <a:rPr lang="en-US" sz="1150" dirty="0">
+              <a:rPr lang="en-US" sz="1250" b="1" dirty="0">
                 <a:solidFill>
                   <a:srgbClr val="FFFFFF"/>
                 </a:solidFill>
@@ -5756,26 +7956,377 @@
                 <a:ea typeface="Meiryo" pitchFamily="34" charset="-122"/>
                 <a:cs typeface="Meiryo" pitchFamily="34" charset="-120"/>
               </a:rPr>
-              <a:t>大学の研究ではPOSデータを扱ってきたが、今回難しかったのは手法ではなかった。目的に対して何を見るべきか、何と比べるべきか、どこまで条件を絞るか。DYNATREKは条件を細かく設定できるぶん、仮説はいくらでも立てられる。限られた時間の中では「分析できること」ではなく「目的の達成に必要な分析」を選ぶことが重要だと感じた。</a:t>
-            </a:r>
-            <a:endParaRPr lang="en-US" sz="1150" dirty="0"/>
-          </a:p>
-        </p:txBody>
-      </p:sp>
-      <p:sp>
-        <p:nvSpPr>
-          <p:cNvPr id="10" name="Shape 8"/>
+              <a:t>何と比べれば</a:t>
+            </a:r>
+            <a:endParaRPr lang="en-US" sz="1250" dirty="0"/>
+          </a:p>
+          <a:p>
+            <a:pPr algn="ctr" indent="0" marL="0">
+              <a:lnSpc>
+                <a:spcPct val="130000"/>
+              </a:lnSpc>
+              <a:buNone/>
+            </a:pPr>
+            <a:r>
+              <a:rPr lang="en-US" sz="1250" b="1" dirty="0">
+                <a:solidFill>
+                  <a:srgbClr val="FFFFFF"/>
+                </a:solidFill>
+                <a:latin typeface="Meiryo" pitchFamily="34" charset="0"/>
+                <a:ea typeface="Meiryo" pitchFamily="34" charset="-122"/>
+                <a:cs typeface="Meiryo" pitchFamily="34" charset="-120"/>
+              </a:rPr>
+              <a:t>よいか考える</a:t>
+            </a:r>
+            <a:endParaRPr lang="en-US" sz="1250" dirty="0"/>
+          </a:p>
+        </p:txBody>
+      </p:sp>
+      <p:sp>
+        <p:nvSpPr>
+          <p:cNvPr id="11" name="Shape 9"/>
           <p:cNvSpPr/>
           <p:nvPr/>
         </p:nvSpPr>
         <p:spPr>
           <a:xfrm>
-            <a:off x="8074152" y="1572768"/>
-            <a:ext cx="3520440" cy="3401568"/>
+            <a:off x="4905756" y="2633472"/>
+            <a:ext cx="201168" cy="274320"/>
+          </a:xfrm>
+          <a:prstGeom prst="rightArrow">
+            <a:avLst/>
+          </a:prstGeom>
+          <a:solidFill>
+            <a:srgbClr val="2A4A7A"/>
+          </a:solidFill>
+          <a:ln w="6350">
+            <a:solidFill>
+              <a:srgbClr val="2A4A7A"/>
+            </a:solidFill>
+            <a:prstDash val="solid"/>
+          </a:ln>
+        </p:spPr>
+      </p:sp>
+      <p:sp>
+        <p:nvSpPr>
+          <p:cNvPr id="12" name="Shape 10"/>
+          <p:cNvSpPr/>
+          <p:nvPr/>
+        </p:nvSpPr>
+        <p:spPr>
+          <a:xfrm>
+            <a:off x="5134356" y="1883664"/>
+            <a:ext cx="1920240" cy="1783080"/>
           </a:xfrm>
           <a:prstGeom prst="roundRect">
             <a:avLst>
-              <a:gd name="adj" fmla="val 1613"/>
+              <a:gd name="adj" fmla="val 3077"/>
+            </a:avLst>
+          </a:prstGeom>
+          <a:solidFill>
+            <a:srgbClr val="D9482F"/>
+          </a:solidFill>
+          <a:ln w="12700">
+            <a:solidFill>
+              <a:srgbClr val="D9482F"/>
+            </a:solidFill>
+            <a:prstDash val="solid"/>
+          </a:ln>
+        </p:spPr>
+      </p:sp>
+      <p:sp>
+        <p:nvSpPr>
+          <p:cNvPr id="13" name="Text 11"/>
+          <p:cNvSpPr txBox="1"/>
+          <p:nvPr/>
+        </p:nvSpPr>
+        <p:spPr>
+          <a:xfrm>
+            <a:off x="5134356" y="2048256"/>
+            <a:ext cx="1920240" cy="274320"/>
+          </a:xfrm>
+          <a:prstGeom prst="rect">
+            <a:avLst/>
+          </a:prstGeom>
+          <a:noFill/>
+          <a:ln/>
+        </p:spPr>
+        <p:txBody>
+          <a:bodyPr wrap="square" lIns="0" tIns="0" rIns="0" bIns="0" rtlCol="0" anchor="ctr"/>
+          <a:lstStyle/>
+          <a:p>
+            <a:pPr algn="ctr" indent="0" marL="0">
+              <a:buNone/>
+            </a:pPr>
+            <a:r>
+              <a:rPr lang="en-US" sz="1050" b="1" dirty="0">
+                <a:solidFill>
+                  <a:srgbClr val="FFFFFF"/>
+                </a:solidFill>
+                <a:latin typeface="Meiryo" pitchFamily="34" charset="0"/>
+                <a:ea typeface="Meiryo" pitchFamily="34" charset="-122"/>
+                <a:cs typeface="Meiryo" pitchFamily="34" charset="-120"/>
+              </a:rPr>
+              <a:t>DYNATREK</a:t>
+            </a:r>
+            <a:endParaRPr lang="en-US" sz="1050" dirty="0"/>
+          </a:p>
+        </p:txBody>
+      </p:sp>
+      <p:sp>
+        <p:nvSpPr>
+          <p:cNvPr id="14" name="Text 12"/>
+          <p:cNvSpPr txBox="1"/>
+          <p:nvPr/>
+        </p:nvSpPr>
+        <p:spPr>
+          <a:xfrm>
+            <a:off x="5262372" y="2395728"/>
+            <a:ext cx="1664208" cy="1005840"/>
+          </a:xfrm>
+          <a:prstGeom prst="rect">
+            <a:avLst/>
+          </a:prstGeom>
+          <a:noFill/>
+          <a:ln/>
+        </p:spPr>
+        <p:txBody>
+          <a:bodyPr wrap="square" lIns="0" tIns="0" rIns="0" bIns="0" rtlCol="0" anchor="ctr"/>
+          <a:lstStyle/>
+          <a:p>
+            <a:pPr algn="ctr" indent="0" marL="0">
+              <a:lnSpc>
+                <a:spcPct val="130000"/>
+              </a:lnSpc>
+              <a:buNone/>
+            </a:pPr>
+            <a:r>
+              <a:rPr lang="en-US" sz="1250" b="1" dirty="0">
+                <a:solidFill>
+                  <a:srgbClr val="FFFFFF"/>
+                </a:solidFill>
+                <a:latin typeface="Meiryo" pitchFamily="34" charset="0"/>
+                <a:ea typeface="Meiryo" pitchFamily="34" charset="-122"/>
+                <a:cs typeface="Meiryo" pitchFamily="34" charset="-120"/>
+              </a:rPr>
+              <a:t>条件を指定して</a:t>
+            </a:r>
+            <a:endParaRPr lang="en-US" sz="1250" dirty="0"/>
+          </a:p>
+          <a:p>
+            <a:pPr algn="ctr" indent="0" marL="0">
+              <a:lnSpc>
+                <a:spcPct val="130000"/>
+              </a:lnSpc>
+              <a:buNone/>
+            </a:pPr>
+            <a:r>
+              <a:rPr lang="en-US" sz="1250" b="1" dirty="0">
+                <a:solidFill>
+                  <a:srgbClr val="FFFFFF"/>
+                </a:solidFill>
+                <a:latin typeface="Meiryo" pitchFamily="34" charset="0"/>
+                <a:ea typeface="Meiryo" pitchFamily="34" charset="-122"/>
+                <a:cs typeface="Meiryo" pitchFamily="34" charset="-120"/>
+              </a:rPr>
+              <a:t>集計する</a:t>
+            </a:r>
+            <a:endParaRPr lang="en-US" sz="1250" dirty="0"/>
+          </a:p>
+        </p:txBody>
+      </p:sp>
+      <p:sp>
+        <p:nvSpPr>
+          <p:cNvPr id="15" name="Shape 13"/>
+          <p:cNvSpPr/>
+          <p:nvPr/>
+        </p:nvSpPr>
+        <p:spPr>
+          <a:xfrm>
+            <a:off x="7082028" y="2633472"/>
+            <a:ext cx="201168" cy="274320"/>
+          </a:xfrm>
+          <a:prstGeom prst="rightArrow">
+            <a:avLst/>
+          </a:prstGeom>
+          <a:solidFill>
+            <a:srgbClr val="2A4A7A"/>
+          </a:solidFill>
+          <a:ln w="6350">
+            <a:solidFill>
+              <a:srgbClr val="2A4A7A"/>
+            </a:solidFill>
+            <a:prstDash val="solid"/>
+          </a:ln>
+        </p:spPr>
+      </p:sp>
+      <p:sp>
+        <p:nvSpPr>
+          <p:cNvPr id="16" name="Shape 14"/>
+          <p:cNvSpPr/>
+          <p:nvPr/>
+        </p:nvSpPr>
+        <p:spPr>
+          <a:xfrm>
+            <a:off x="7310628" y="1883664"/>
+            <a:ext cx="1920240" cy="1783080"/>
+          </a:xfrm>
+          <a:prstGeom prst="roundRect">
+            <a:avLst>
+              <a:gd name="adj" fmla="val 3077"/>
+            </a:avLst>
+          </a:prstGeom>
+          <a:solidFill>
+            <a:srgbClr val="D9482F"/>
+          </a:solidFill>
+          <a:ln w="12700">
+            <a:solidFill>
+              <a:srgbClr val="D9482F"/>
+            </a:solidFill>
+            <a:prstDash val="solid"/>
+          </a:ln>
+        </p:spPr>
+      </p:sp>
+      <p:sp>
+        <p:nvSpPr>
+          <p:cNvPr id="17" name="Text 15"/>
+          <p:cNvSpPr txBox="1"/>
+          <p:nvPr/>
+        </p:nvSpPr>
+        <p:spPr>
+          <a:xfrm>
+            <a:off x="7310628" y="2048256"/>
+            <a:ext cx="1920240" cy="274320"/>
+          </a:xfrm>
+          <a:prstGeom prst="rect">
+            <a:avLst/>
+          </a:prstGeom>
+          <a:noFill/>
+          <a:ln/>
+        </p:spPr>
+        <p:txBody>
+          <a:bodyPr wrap="square" lIns="0" tIns="0" rIns="0" bIns="0" rtlCol="0" anchor="ctr"/>
+          <a:lstStyle/>
+          <a:p>
+            <a:pPr algn="ctr" indent="0" marL="0">
+              <a:buNone/>
+            </a:pPr>
+            <a:r>
+              <a:rPr lang="en-US" sz="1050" b="1" dirty="0">
+                <a:solidFill>
+                  <a:srgbClr val="FFFFFF"/>
+                </a:solidFill>
+                <a:latin typeface="Meiryo" pitchFamily="34" charset="0"/>
+                <a:ea typeface="Meiryo" pitchFamily="34" charset="-122"/>
+                <a:cs typeface="Meiryo" pitchFamily="34" charset="-120"/>
+              </a:rPr>
+              <a:t>DYNATREK</a:t>
+            </a:r>
+            <a:endParaRPr lang="en-US" sz="1050" dirty="0"/>
+          </a:p>
+        </p:txBody>
+      </p:sp>
+      <p:sp>
+        <p:nvSpPr>
+          <p:cNvPr id="18" name="Text 16"/>
+          <p:cNvSpPr txBox="1"/>
+          <p:nvPr/>
+        </p:nvSpPr>
+        <p:spPr>
+          <a:xfrm>
+            <a:off x="7438644" y="2395728"/>
+            <a:ext cx="1664208" cy="1005840"/>
+          </a:xfrm>
+          <a:prstGeom prst="rect">
+            <a:avLst/>
+          </a:prstGeom>
+          <a:noFill/>
+          <a:ln/>
+        </p:spPr>
+        <p:txBody>
+          <a:bodyPr wrap="square" lIns="0" tIns="0" rIns="0" bIns="0" rtlCol="0" anchor="ctr"/>
+          <a:lstStyle/>
+          <a:p>
+            <a:pPr algn="ctr" indent="0" marL="0">
+              <a:lnSpc>
+                <a:spcPct val="130000"/>
+              </a:lnSpc>
+              <a:buNone/>
+            </a:pPr>
+            <a:r>
+              <a:rPr lang="en-US" sz="1250" b="1" dirty="0">
+                <a:solidFill>
+                  <a:srgbClr val="FFFFFF"/>
+                </a:solidFill>
+                <a:latin typeface="Meiryo" pitchFamily="34" charset="0"/>
+                <a:ea typeface="Meiryo" pitchFamily="34" charset="-122"/>
+                <a:cs typeface="Meiryo" pitchFamily="34" charset="-120"/>
+              </a:rPr>
+              <a:t>出てきた結果を</a:t>
+            </a:r>
+            <a:endParaRPr lang="en-US" sz="1250" dirty="0"/>
+          </a:p>
+          <a:p>
+            <a:pPr algn="ctr" indent="0" marL="0">
+              <a:lnSpc>
+                <a:spcPct val="130000"/>
+              </a:lnSpc>
+              <a:buNone/>
+            </a:pPr>
+            <a:r>
+              <a:rPr lang="en-US" sz="1250" b="1" dirty="0">
+                <a:solidFill>
+                  <a:srgbClr val="FFFFFF"/>
+                </a:solidFill>
+                <a:latin typeface="Meiryo" pitchFamily="34" charset="0"/>
+                <a:ea typeface="Meiryo" pitchFamily="34" charset="-122"/>
+                <a:cs typeface="Meiryo" pitchFamily="34" charset="-120"/>
+              </a:rPr>
+              <a:t>見る</a:t>
+            </a:r>
+            <a:endParaRPr lang="en-US" sz="1250" dirty="0"/>
+          </a:p>
+        </p:txBody>
+      </p:sp>
+      <p:sp>
+        <p:nvSpPr>
+          <p:cNvPr id="19" name="Shape 17"/>
+          <p:cNvSpPr/>
+          <p:nvPr/>
+        </p:nvSpPr>
+        <p:spPr>
+          <a:xfrm>
+            <a:off x="9258300" y="2633472"/>
+            <a:ext cx="201168" cy="274320"/>
+          </a:xfrm>
+          <a:prstGeom prst="rightArrow">
+            <a:avLst/>
+          </a:prstGeom>
+          <a:solidFill>
+            <a:srgbClr val="2A4A7A"/>
+          </a:solidFill>
+          <a:ln w="6350">
+            <a:solidFill>
+              <a:srgbClr val="2A4A7A"/>
+            </a:solidFill>
+            <a:prstDash val="solid"/>
+          </a:ln>
+        </p:spPr>
+      </p:sp>
+      <p:sp>
+        <p:nvSpPr>
+          <p:cNvPr id="20" name="Shape 18"/>
+          <p:cNvSpPr/>
+          <p:nvPr/>
+        </p:nvSpPr>
+        <p:spPr>
+          <a:xfrm>
+            <a:off x="9486900" y="1883664"/>
+            <a:ext cx="1920240" cy="1783080"/>
+          </a:xfrm>
+          <a:prstGeom prst="roundRect">
+            <a:avLst>
+              <a:gd name="adj" fmla="val 3077"/>
             </a:avLst>
           </a:prstGeom>
           <a:solidFill>
@@ -5791,30 +8342,30 @@
       </p:sp>
       <p:sp>
         <p:nvSpPr>
-          <p:cNvPr id="11" name="Text 9"/>
-          <p:cNvSpPr txBox="1"/>
-          <p:nvPr/>
-        </p:nvSpPr>
-        <p:spPr>
-          <a:xfrm>
-            <a:off x="8330184" y="1755648"/>
-            <a:ext cx="3008376" cy="384048"/>
-          </a:xfrm>
-          <a:prstGeom prst="rect">
-            <a:avLst/>
-          </a:prstGeom>
-          <a:noFill/>
-          <a:ln/>
-        </p:spPr>
-        <p:txBody>
-          <a:bodyPr wrap="square" lIns="0" tIns="0" rIns="0" bIns="0" rtlCol="0" anchor="ctr"/>
-          <a:lstStyle/>
-          <a:p>
-            <a:pPr indent="0" marL="0">
-              <a:buNone/>
-            </a:pPr>
-            <a:r>
-              <a:rPr lang="en-US" sz="1400" b="1" dirty="0">
+          <p:cNvPr id="21" name="Text 19"/>
+          <p:cNvSpPr txBox="1"/>
+          <p:nvPr/>
+        </p:nvSpPr>
+        <p:spPr>
+          <a:xfrm>
+            <a:off x="9486900" y="2048256"/>
+            <a:ext cx="1920240" cy="274320"/>
+          </a:xfrm>
+          <a:prstGeom prst="rect">
+            <a:avLst/>
+          </a:prstGeom>
+          <a:noFill/>
+          <a:ln/>
+        </p:spPr>
+        <p:txBody>
+          <a:bodyPr wrap="square" lIns="0" tIns="0" rIns="0" bIns="0" rtlCol="0" anchor="ctr"/>
+          <a:lstStyle/>
+          <a:p>
+            <a:pPr algn="ctr" indent="0" marL="0">
+              <a:buNone/>
+            </a:pPr>
+            <a:r>
+              <a:rPr lang="en-US" sz="1050" b="1" dirty="0">
                 <a:solidFill>
                   <a:srgbClr val="FFC9BC"/>
                 </a:solidFill>
@@ -5822,41 +8373,41 @@
                 <a:ea typeface="Meiryo" pitchFamily="34" charset="-122"/>
                 <a:cs typeface="Meiryo" pitchFamily="34" charset="-120"/>
               </a:rPr>
-              <a:t>業務の現場で見えたこと</a:t>
-            </a:r>
-            <a:endParaRPr lang="en-US" sz="1400" dirty="0"/>
-          </a:p>
-        </p:txBody>
-      </p:sp>
-      <p:sp>
-        <p:nvSpPr>
-          <p:cNvPr id="12" name="Text 10"/>
-          <p:cNvSpPr txBox="1"/>
-          <p:nvPr/>
-        </p:nvSpPr>
-        <p:spPr>
-          <a:xfrm>
-            <a:off x="8330184" y="2212848"/>
-            <a:ext cx="3008376" cy="2560320"/>
-          </a:xfrm>
-          <a:prstGeom prst="rect">
-            <a:avLst/>
-          </a:prstGeom>
-          <a:noFill/>
-          <a:ln/>
-        </p:spPr>
-        <p:txBody>
-          <a:bodyPr wrap="square" lIns="0" tIns="0" rIns="0" bIns="0" rtlCol="0" anchor="t"/>
-          <a:lstStyle/>
-          <a:p>
-            <a:pPr indent="0" marL="0">
+              <a:t>人</a:t>
+            </a:r>
+            <a:endParaRPr lang="en-US" sz="1050" dirty="0"/>
+          </a:p>
+        </p:txBody>
+      </p:sp>
+      <p:sp>
+        <p:nvSpPr>
+          <p:cNvPr id="22" name="Text 20"/>
+          <p:cNvSpPr txBox="1"/>
+          <p:nvPr/>
+        </p:nvSpPr>
+        <p:spPr>
+          <a:xfrm>
+            <a:off x="9614916" y="2395728"/>
+            <a:ext cx="1664208" cy="1005840"/>
+          </a:xfrm>
+          <a:prstGeom prst="rect">
+            <a:avLst/>
+          </a:prstGeom>
+          <a:noFill/>
+          <a:ln/>
+        </p:spPr>
+        <p:txBody>
+          <a:bodyPr wrap="square" lIns="0" tIns="0" rIns="0" bIns="0" rtlCol="0" anchor="ctr"/>
+          <a:lstStyle/>
+          <a:p>
+            <a:pPr algn="ctr" indent="0" marL="0">
               <a:lnSpc>
-                <a:spcPct val="135000"/>
+                <a:spcPct val="130000"/>
               </a:lnSpc>
               <a:buNone/>
             </a:pPr>
             <a:r>
-              <a:rPr lang="en-US" sz="1150" dirty="0">
+              <a:rPr lang="en-US" sz="1250" b="1" dirty="0">
                 <a:solidFill>
                   <a:srgbClr val="FFFFFF"/>
                 </a:solidFill>
@@ -5864,21 +8415,107 @@
                 <a:ea typeface="Meiryo" pitchFamily="34" charset="-122"/>
                 <a:cs typeface="Meiryo" pitchFamily="34" charset="-120"/>
               </a:rPr>
-              <a:t>期間中は複数の打ち合わせにも参加させていただいた。専門的な内容も多く、すべてを理解することは難しかったが、社員の方々が意見を出し合いながら進めていく様子から、実際の仕事の進め方を知ることができた。</a:t>
-            </a:r>
-            <a:endParaRPr lang="en-US" sz="1150" dirty="0"/>
-          </a:p>
-        </p:txBody>
-      </p:sp>
-      <p:sp>
-        <p:nvSpPr>
-          <p:cNvPr id="13" name="Shape 11"/>
+              <a:t>何が言えるかを</a:t>
+            </a:r>
+            <a:endParaRPr lang="en-US" sz="1250" dirty="0"/>
+          </a:p>
+          <a:p>
+            <a:pPr algn="ctr" indent="0" marL="0">
+              <a:lnSpc>
+                <a:spcPct val="130000"/>
+              </a:lnSpc>
+              <a:buNone/>
+            </a:pPr>
+            <a:r>
+              <a:rPr lang="en-US" sz="1250" b="1" dirty="0">
+                <a:solidFill>
+                  <a:srgbClr val="FFFFFF"/>
+                </a:solidFill>
+                <a:latin typeface="Meiryo" pitchFamily="34" charset="0"/>
+                <a:ea typeface="Meiryo" pitchFamily="34" charset="-122"/>
+                <a:cs typeface="Meiryo" pitchFamily="34" charset="-120"/>
+              </a:rPr>
+              <a:t>考える</a:t>
+            </a:r>
+            <a:endParaRPr lang="en-US" sz="1250" dirty="0"/>
+          </a:p>
+        </p:txBody>
+      </p:sp>
+      <p:sp>
+        <p:nvSpPr>
+          <p:cNvPr id="23" name="Shape 21"/>
           <p:cNvSpPr/>
           <p:nvPr/>
         </p:nvSpPr>
         <p:spPr>
           <a:xfrm>
-            <a:off x="502920" y="5175504"/>
+            <a:off x="502920" y="3968496"/>
+            <a:ext cx="11183112" cy="786384"/>
+          </a:xfrm>
+          <a:prstGeom prst="roundRect">
+            <a:avLst>
+              <a:gd name="adj" fmla="val 6977"/>
+            </a:avLst>
+          </a:prstGeom>
+          <a:solidFill>
+            <a:srgbClr val="1C3A66"/>
+          </a:solidFill>
+          <a:ln w="12700">
+            <a:solidFill>
+              <a:srgbClr val="2A4A7A"/>
+            </a:solidFill>
+            <a:prstDash val="solid"/>
+          </a:ln>
+        </p:spPr>
+      </p:sp>
+      <p:sp>
+        <p:nvSpPr>
+          <p:cNvPr id="24" name="Text 22"/>
+          <p:cNvSpPr txBox="1"/>
+          <p:nvPr/>
+        </p:nvSpPr>
+        <p:spPr>
+          <a:xfrm>
+            <a:off x="777240" y="3968496"/>
+            <a:ext cx="10634472" cy="786384"/>
+          </a:xfrm>
+          <a:prstGeom prst="rect">
+            <a:avLst/>
+          </a:prstGeom>
+          <a:noFill/>
+          <a:ln/>
+        </p:spPr>
+        <p:txBody>
+          <a:bodyPr wrap="square" lIns="0" tIns="0" rIns="0" bIns="0" rtlCol="0" anchor="ctr"/>
+          <a:lstStyle/>
+          <a:p>
+            <a:pPr algn="ctr" indent="0" marL="0">
+              <a:buNone/>
+            </a:pPr>
+            <a:r>
+              <a:rPr lang="en-US" sz="1300" dirty="0">
+                <a:solidFill>
+                  <a:srgbClr val="FFFFFF"/>
+                </a:solidFill>
+                <a:latin typeface="Meiryo" pitchFamily="34" charset="0"/>
+                <a:ea typeface="Meiryo" pitchFamily="34" charset="-122"/>
+                <a:cs typeface="Meiryo" pitchFamily="34" charset="-120"/>
+              </a:rPr>
+              <a:t>専門的な知識が要るのは、業務DBから必要なデータを取り出すところ。そこはDYNATREKが引き受けてくれた。</a:t>
+            </a:r>
+            <a:endParaRPr lang="en-US" sz="1300" dirty="0"/>
+          </a:p>
+        </p:txBody>
+      </p:sp>
+      <p:sp>
+        <p:nvSpPr>
+          <p:cNvPr id="25" name="Shape 23"/>
+          <p:cNvSpPr/>
+          <p:nvPr/>
+        </p:nvSpPr>
+        <p:spPr>
+          <a:xfrm>
+            <a:off x="502920" y="5047488"/>
             <a:ext cx="11183112" cy="1133856"/>
           </a:xfrm>
           <a:prstGeom prst="roundRect">
@@ -5887,11 +8524,11 @@
             </a:avLst>
           </a:prstGeom>
           <a:solidFill>
-            <a:srgbClr val="D9482F"/>
+            <a:srgbClr val="FFFFFF"/>
           </a:solidFill>
           <a:ln w="6350">
             <a:solidFill>
-              <a:srgbClr val="D9482F"/>
+              <a:srgbClr val="FFFFFF"/>
             </a:solidFill>
             <a:prstDash val="solid"/>
           </a:ln>
@@ -5899,13 +8536,13 @@
       </p:sp>
       <p:sp>
         <p:nvSpPr>
-          <p:cNvPr id="14" name="Text 12"/>
-          <p:cNvSpPr txBox="1"/>
-          <p:nvPr/>
-        </p:nvSpPr>
-        <p:spPr>
-          <a:xfrm>
-            <a:off x="777240" y="5175504"/>
+          <p:cNvPr id="26" name="Text 24"/>
+          <p:cNvSpPr txBox="1"/>
+          <p:nvPr/>
+        </p:nvSpPr>
+        <p:spPr>
+          <a:xfrm>
+            <a:off x="777240" y="5047488"/>
             <a:ext cx="10634472" cy="1133856"/>
           </a:xfrm>
           <a:prstGeom prst="rect">
@@ -5925,17 +8562,17 @@
               <a:buNone/>
             </a:pPr>
             <a:r>
-              <a:rPr lang="en-US" sz="1500" b="1" dirty="0">
-                <a:solidFill>
-                  <a:srgbClr val="FFFFFF"/>
-                </a:solidFill>
-                <a:latin typeface="Meiryo" pitchFamily="34" charset="0"/>
-                <a:ea typeface="Meiryo" pitchFamily="34" charset="-122"/>
-                <a:cs typeface="Meiryo" pitchFamily="34" charset="-120"/>
-              </a:rPr>
-              <a:t>専門的なデータ分析の知識がなくても、DYNATREKを使えば、業務上の疑問に対して</a:t>
-            </a:r>
-            <a:endParaRPr lang="en-US" sz="1500" dirty="0"/>
+              <a:rPr lang="en-US" sz="1600" b="1" dirty="0">
+                <a:solidFill>
+                  <a:srgbClr val="13294B"/>
+                </a:solidFill>
+                <a:latin typeface="Meiryo" pitchFamily="34" charset="0"/>
+                <a:ea typeface="Meiryo" pitchFamily="34" charset="-122"/>
+                <a:cs typeface="Meiryo" pitchFamily="34" charset="-120"/>
+              </a:rPr>
+              <a:t>分析の専門知識や経験がなくても、DYNATREKを使えば、</a:t>
+            </a:r>
+            <a:endParaRPr lang="en-US" sz="1600" dirty="0"/>
           </a:p>
           <a:p>
             <a:pPr algn="ctr" indent="0" marL="0">
@@ -5945,29 +8582,29 @@
               <a:buNone/>
             </a:pPr>
             <a:r>
-              <a:rPr lang="en-US" sz="1500" b="1" dirty="0">
-                <a:solidFill>
-                  <a:srgbClr val="FFFFFF"/>
-                </a:solidFill>
-                <a:latin typeface="Meiryo" pitchFamily="34" charset="0"/>
-                <a:ea typeface="Meiryo" pitchFamily="34" charset="-122"/>
-                <a:cs typeface="Meiryo" pitchFamily="34" charset="-120"/>
-              </a:rPr>
-              <a:t>データで確認・比較していける ── 今回の分析を通して、それを実感しました。</a:t>
-            </a:r>
-            <a:endParaRPr lang="en-US" sz="1500" dirty="0"/>
-          </a:p>
-        </p:txBody>
-      </p:sp>
-      <p:sp>
-        <p:nvSpPr>
-          <p:cNvPr id="16" name="Text 13"/>
-          <p:cNvSpPr txBox="1"/>
-          <p:nvPr/>
-        </p:nvSpPr>
-        <p:spPr>
-          <a:xfrm>
-            <a:off x="11411712" y="6382512"/>
+              <a:rPr lang="en-US" sz="1600" b="1" dirty="0">
+                <a:solidFill>
+                  <a:srgbClr val="13294B"/>
+                </a:solidFill>
+                <a:latin typeface="Meiryo" pitchFamily="34" charset="0"/>
+                <a:ea typeface="Meiryo" pitchFamily="34" charset="-122"/>
+                <a:cs typeface="Meiryo" pitchFamily="34" charset="-120"/>
+              </a:rPr>
+              <a:t>業務上の疑問に対してデータで確認・比較していける。</a:t>
+            </a:r>
+            <a:endParaRPr lang="en-US" sz="1600" dirty="0"/>
+          </a:p>
+        </p:txBody>
+      </p:sp>
+      <p:sp>
+        <p:nvSpPr>
+          <p:cNvPr id="28" name="Text 25"/>
+          <p:cNvSpPr txBox="1"/>
+          <p:nvPr/>
+        </p:nvSpPr>
+        <p:spPr>
+          <a:xfrm>
+            <a:off x="11411712" y="6419088"/>
             <a:ext cx="365760" cy="274320"/>
           </a:xfrm>
           <a:prstGeom prst="rect">
@@ -5992,7 +8629,7 @@
                 <a:ea typeface="Meiryo" pitchFamily="34" charset="-122"/>
                 <a:cs typeface="Meiryo" pitchFamily="34" charset="-120"/>
               </a:rPr>
-              <a:t>6</a:t>
+              <a:t>8</a:t>
             </a:r>
             <a:endParaRPr lang="en-US" sz="1000" dirty="0"/>
           </a:p>
